--- a/media/exports/reports/2025-10/job-margins.pptx
+++ b/media/exports/reports/2025-10/job-margins.pptx
@@ -7964,7 +7964,7 @@
         <p:spPr>
           <a:xfrm>
             <a:off x="457200" y="1645920"/>
-            <a:ext cx="11277295" cy="2011680"/>
+            <a:ext cx="3576218" cy="2011680"/>
           </a:xfrm>
           <a:prstGeom prst="rect">
             <a:avLst/>
@@ -8009,7 +8009,7 @@
         <p:spPr>
           <a:xfrm>
             <a:off x="640080" y="1783080"/>
-            <a:ext cx="10911535" cy="457200"/>
+            <a:ext cx="3210458" cy="457200"/>
           </a:xfrm>
           <a:prstGeom prst="rect">
             <a:avLst/>
@@ -8043,7 +8043,7 @@
         <p:spPr>
           <a:xfrm>
             <a:off x="640080" y="2240280"/>
-            <a:ext cx="10911535" cy="731520"/>
+            <a:ext cx="3210458" cy="731520"/>
           </a:xfrm>
           <a:prstGeom prst="rect">
             <a:avLst/>
@@ -8077,7 +8077,7 @@
         <p:spPr>
           <a:xfrm>
             <a:off x="640080" y="3017520"/>
-            <a:ext cx="10911535" cy="548640"/>
+            <a:ext cx="3210458" cy="548640"/>
           </a:xfrm>
           <a:prstGeom prst="rect">
             <a:avLst/>
@@ -8104,7 +8104,301 @@
       </p:sp>
       <p:sp>
         <p:nvSpPr>
-          <p:cNvPr id="9" name="TextBox 8"/>
+          <p:cNvPr id="9" name="Rectangle 8"/>
+          <p:cNvSpPr/>
+          <p:nvPr/>
+        </p:nvSpPr>
+        <p:spPr>
+          <a:xfrm>
+            <a:off x="4307738" y="1645920"/>
+            <a:ext cx="3576218" cy="2011680"/>
+          </a:xfrm>
+          <a:prstGeom prst="rect">
+            <a:avLst/>
+          </a:prstGeom>
+          <a:solidFill>
+            <a:srgbClr val="F7FAF7"/>
+          </a:solidFill>
+          <a:ln>
+            <a:solidFill>
+              <a:srgbClr val="DCE8DC"/>
+            </a:solidFill>
+          </a:ln>
+        </p:spPr>
+        <p:style>
+          <a:lnRef idx="1">
+            <a:schemeClr val="accent1"/>
+          </a:lnRef>
+          <a:fillRef idx="3">
+            <a:schemeClr val="accent1"/>
+          </a:fillRef>
+          <a:effectRef idx="2">
+            <a:schemeClr val="accent1"/>
+          </a:effectRef>
+          <a:fontRef idx="minor">
+            <a:schemeClr val="lt1"/>
+          </a:fontRef>
+        </p:style>
+        <p:txBody>
+          <a:bodyPr rtlCol="0" anchor="ctr"/>
+          <a:lstStyle/>
+          <a:p>
+            <a:pPr algn="ctr"/>
+          </a:p>
+        </p:txBody>
+      </p:sp>
+      <p:sp>
+        <p:nvSpPr>
+          <p:cNvPr id="10" name="TextBox 9"/>
+          <p:cNvSpPr txBox="1"/>
+          <p:nvPr/>
+        </p:nvSpPr>
+        <p:spPr>
+          <a:xfrm>
+            <a:off x="4490618" y="1783080"/>
+            <a:ext cx="3210458" cy="457200"/>
+          </a:xfrm>
+          <a:prstGeom prst="rect">
+            <a:avLst/>
+          </a:prstGeom>
+          <a:noFill/>
+        </p:spPr>
+        <p:txBody>
+          <a:bodyPr wrap="square">
+            <a:spAutoFit/>
+          </a:bodyPr>
+          <a:lstStyle/>
+          <a:p>
+            <a:r>
+              <a:rPr sz="1200" b="0">
+                <a:solidFill>
+                  <a:srgbClr val="5F6F63"/>
+                </a:solidFill>
+                <a:latin typeface="Arial"/>
+              </a:rPr>
+              <a:t>Technician time charged, October</a:t>
+            </a:r>
+          </a:p>
+        </p:txBody>
+      </p:sp>
+      <p:sp>
+        <p:nvSpPr>
+          <p:cNvPr id="11" name="TextBox 10"/>
+          <p:cNvSpPr txBox="1"/>
+          <p:nvPr/>
+        </p:nvSpPr>
+        <p:spPr>
+          <a:xfrm>
+            <a:off x="4490618" y="2240280"/>
+            <a:ext cx="3210458" cy="731520"/>
+          </a:xfrm>
+          <a:prstGeom prst="rect">
+            <a:avLst/>
+          </a:prstGeom>
+          <a:noFill/>
+        </p:spPr>
+        <p:txBody>
+          <a:bodyPr wrap="square">
+            <a:spAutoFit/>
+          </a:bodyPr>
+          <a:lstStyle/>
+          <a:p>
+            <a:r>
+              <a:rPr sz="3000" b="1">
+                <a:solidFill>
+                  <a:srgbClr val="2F7A5D"/>
+                </a:solidFill>
+                <a:latin typeface="Arial"/>
+              </a:rPr>
+              <a:t>$15,005</a:t>
+            </a:r>
+          </a:p>
+        </p:txBody>
+      </p:sp>
+      <p:sp>
+        <p:nvSpPr>
+          <p:cNvPr id="12" name="TextBox 11"/>
+          <p:cNvSpPr txBox="1"/>
+          <p:nvPr/>
+        </p:nvSpPr>
+        <p:spPr>
+          <a:xfrm>
+            <a:off x="4490618" y="3017520"/>
+            <a:ext cx="3210458" cy="548640"/>
+          </a:xfrm>
+          <a:prstGeom prst="rect">
+            <a:avLst/>
+          </a:prstGeom>
+          <a:noFill/>
+        </p:spPr>
+        <p:txBody>
+          <a:bodyPr wrap="square">
+            <a:spAutoFit/>
+          </a:bodyPr>
+          <a:lstStyle/>
+          <a:p>
+            <a:r>
+              <a:rPr sz="1100" b="0">
+                <a:solidFill>
+                  <a:srgbClr val="5F6F63"/>
+                </a:solidFill>
+                <a:latin typeface="Arial"/>
+              </a:rPr>
+              <a:t>67.3% of call-out revenue</a:t>
+            </a:r>
+          </a:p>
+        </p:txBody>
+      </p:sp>
+      <p:sp>
+        <p:nvSpPr>
+          <p:cNvPr id="13" name="Rectangle 12"/>
+          <p:cNvSpPr/>
+          <p:nvPr/>
+        </p:nvSpPr>
+        <p:spPr>
+          <a:xfrm>
+            <a:off x="8158276" y="1645920"/>
+            <a:ext cx="3576218" cy="2011680"/>
+          </a:xfrm>
+          <a:prstGeom prst="rect">
+            <a:avLst/>
+          </a:prstGeom>
+          <a:solidFill>
+            <a:srgbClr val="F7FAF7"/>
+          </a:solidFill>
+          <a:ln>
+            <a:solidFill>
+              <a:srgbClr val="DCE8DC"/>
+            </a:solidFill>
+          </a:ln>
+        </p:spPr>
+        <p:style>
+          <a:lnRef idx="1">
+            <a:schemeClr val="accent1"/>
+          </a:lnRef>
+          <a:fillRef idx="3">
+            <a:schemeClr val="accent1"/>
+          </a:fillRef>
+          <a:effectRef idx="2">
+            <a:schemeClr val="accent1"/>
+          </a:effectRef>
+          <a:fontRef idx="minor">
+            <a:schemeClr val="lt1"/>
+          </a:fontRef>
+        </p:style>
+        <p:txBody>
+          <a:bodyPr rtlCol="0" anchor="ctr"/>
+          <a:lstStyle/>
+          <a:p>
+            <a:pPr algn="ctr"/>
+          </a:p>
+        </p:txBody>
+      </p:sp>
+      <p:sp>
+        <p:nvSpPr>
+          <p:cNvPr id="14" name="TextBox 13"/>
+          <p:cNvSpPr txBox="1"/>
+          <p:nvPr/>
+        </p:nvSpPr>
+        <p:spPr>
+          <a:xfrm>
+            <a:off x="8341156" y="1783080"/>
+            <a:ext cx="3210458" cy="457200"/>
+          </a:xfrm>
+          <a:prstGeom prst="rect">
+            <a:avLst/>
+          </a:prstGeom>
+          <a:noFill/>
+        </p:spPr>
+        <p:txBody>
+          <a:bodyPr wrap="square">
+            <a:spAutoFit/>
+          </a:bodyPr>
+          <a:lstStyle/>
+          <a:p>
+            <a:r>
+              <a:rPr sz="1200" b="0">
+                <a:solidFill>
+                  <a:srgbClr val="5F6F63"/>
+                </a:solidFill>
+                <a:latin typeface="Arial"/>
+              </a:rPr>
+              <a:t>Materials charged, October</a:t>
+            </a:r>
+          </a:p>
+        </p:txBody>
+      </p:sp>
+      <p:sp>
+        <p:nvSpPr>
+          <p:cNvPr id="15" name="TextBox 14"/>
+          <p:cNvSpPr txBox="1"/>
+          <p:nvPr/>
+        </p:nvSpPr>
+        <p:spPr>
+          <a:xfrm>
+            <a:off x="8341156" y="2240280"/>
+            <a:ext cx="3210458" cy="731520"/>
+          </a:xfrm>
+          <a:prstGeom prst="rect">
+            <a:avLst/>
+          </a:prstGeom>
+          <a:noFill/>
+        </p:spPr>
+        <p:txBody>
+          <a:bodyPr wrap="square">
+            <a:spAutoFit/>
+          </a:bodyPr>
+          <a:lstStyle/>
+          <a:p>
+            <a:r>
+              <a:rPr sz="3000" b="1">
+                <a:solidFill>
+                  <a:srgbClr val="2F7A5D"/>
+                </a:solidFill>
+                <a:latin typeface="Arial"/>
+              </a:rPr>
+              <a:t>$7,293</a:t>
+            </a:r>
+          </a:p>
+        </p:txBody>
+      </p:sp>
+      <p:sp>
+        <p:nvSpPr>
+          <p:cNvPr id="16" name="TextBox 15"/>
+          <p:cNvSpPr txBox="1"/>
+          <p:nvPr/>
+        </p:nvSpPr>
+        <p:spPr>
+          <a:xfrm>
+            <a:off x="8341156" y="3017520"/>
+            <a:ext cx="3210458" cy="548640"/>
+          </a:xfrm>
+          <a:prstGeom prst="rect">
+            <a:avLst/>
+          </a:prstGeom>
+          <a:noFill/>
+        </p:spPr>
+        <p:txBody>
+          <a:bodyPr wrap="square">
+            <a:spAutoFit/>
+          </a:bodyPr>
+          <a:lstStyle/>
+          <a:p>
+            <a:r>
+              <a:rPr sz="1100" b="0">
+                <a:solidFill>
+                  <a:srgbClr val="5F6F63"/>
+                </a:solidFill>
+                <a:latin typeface="Arial"/>
+              </a:rPr>
+              <a:t>$5,610 at cost, plus 30%</a:t>
+            </a:r>
+          </a:p>
+        </p:txBody>
+      </p:sp>
+      <p:sp>
+        <p:nvSpPr>
+          <p:cNvPr id="17" name="TextBox 16"/>
           <p:cNvSpPr txBox="1"/>
           <p:nvPr/>
         </p:nvSpPr>
@@ -8138,7 +8432,7 @@
       </p:sp>
       <p:sp>
         <p:nvSpPr>
-          <p:cNvPr id="10" name="TextBox 9"/>
+          <p:cNvPr id="18" name="TextBox 17"/>
           <p:cNvSpPr txBox="1"/>
           <p:nvPr/>
         </p:nvSpPr>
@@ -8173,7 +8467,7 @@
       </p:sp>
       <p:sp>
         <p:nvSpPr>
-          <p:cNvPr id="11" name="TextBox 10"/>
+          <p:cNvPr id="19" name="TextBox 18"/>
           <p:cNvSpPr txBox="1"/>
           <p:nvPr/>
         </p:nvSpPr>
@@ -9047,7 +9341,7 @@
                 </a:solidFill>
                 <a:latin typeface="Arial"/>
               </a:rPr>
-              <a:t>43 call-outs in October made a 43.3% job gross margin between them. Gross margins run from 37.8% to 45.9% by length: the hourly rate covers technician time comfortably, so the gross margin mostly moves with how much material goes on the van.</a:t>
+              <a:t>43 call-outs in October billed $15,005 of technician time and $7,293 of materials ($5,610 at cost plus 30%), and made a 43.3% job gross margin between them. Gross margins run from 37.8% to 45.9% by length: the hourly rate covers technician time comfortably, so the gross margin mostly moves with how much material goes on the van.</a:t>
             </a:r>
           </a:p>
         </p:txBody>

--- a/media/exports/reports/2025-10/job-margins.pptx
+++ b/media/exports/reports/2025-10/job-margins.pptx
@@ -284,7 +284,9 @@
     <a:lstStyle/>
     <a:p>
       <a:pPr>
-        <a:defRPr sz="1800"/>
+        <a:defRPr sz="1800">
+          <a:latin typeface="Roboto"/>
+        </a:defRPr>
       </a:pPr>
       <a:endParaRPr lang="en-US"/>
     </a:p>
@@ -514,7 +516,9 @@
     <a:lstStyle/>
     <a:p>
       <a:pPr>
-        <a:defRPr sz="1800"/>
+        <a:defRPr sz="1800">
+          <a:latin typeface="Roboto"/>
+        </a:defRPr>
       </a:pPr>
       <a:endParaRPr/>
     </a:p>
@@ -682,7 +686,9 @@
     <a:lstStyle/>
     <a:p>
       <a:pPr>
-        <a:defRPr sz="1800"/>
+        <a:defRPr sz="1800">
+          <a:latin typeface="Roboto"/>
+        </a:defRPr>
       </a:pPr>
       <a:endParaRPr lang="en-US"/>
     </a:p>
@@ -976,7 +982,9 @@
     <a:lstStyle/>
     <a:p>
       <a:pPr>
-        <a:defRPr sz="1800"/>
+        <a:defRPr sz="1800">
+          <a:latin typeface="Roboto"/>
+        </a:defRPr>
       </a:pPr>
       <a:endParaRPr lang="en-US"/>
     </a:p>
@@ -1270,7 +1278,9 @@
     <a:lstStyle/>
     <a:p>
       <a:pPr>
-        <a:defRPr sz="1800"/>
+        <a:defRPr sz="1800">
+          <a:latin typeface="Roboto"/>
+        </a:defRPr>
       </a:pPr>
       <a:endParaRPr lang="en-US"/>
     </a:p>
@@ -1438,7 +1448,9 @@
     <a:lstStyle/>
     <a:p>
       <a:pPr>
-        <a:defRPr sz="1800"/>
+        <a:defRPr sz="1800">
+          <a:latin typeface="Roboto"/>
+        </a:defRPr>
       </a:pPr>
       <a:endParaRPr lang="en-US"/>
     </a:p>
@@ -1606,7 +1618,9 @@
     <a:lstStyle/>
     <a:p>
       <a:pPr>
-        <a:defRPr sz="1800"/>
+        <a:defRPr sz="1800">
+          <a:latin typeface="Roboto"/>
+        </a:defRPr>
       </a:pPr>
       <a:endParaRPr lang="en-US"/>
     </a:p>
@@ -1816,7 +1830,9 @@
     <a:lstStyle/>
     <a:p>
       <a:pPr>
-        <a:defRPr sz="1800"/>
+        <a:defRPr sz="1800">
+          <a:latin typeface="Roboto"/>
+        </a:defRPr>
       </a:pPr>
       <a:endParaRPr lang="en-US"/>
     </a:p>
@@ -2026,7 +2042,9 @@
     <a:lstStyle/>
     <a:p>
       <a:pPr>
-        <a:defRPr sz="1800"/>
+        <a:defRPr sz="1800">
+          <a:latin typeface="Roboto"/>
+        </a:defRPr>
       </a:pPr>
       <a:endParaRPr lang="en-US"/>
     </a:p>
@@ -2256,7 +2274,9 @@
     <a:lstStyle/>
     <a:p>
       <a:pPr>
-        <a:defRPr sz="1800"/>
+        <a:defRPr sz="1800">
+          <a:latin typeface="Roboto"/>
+        </a:defRPr>
       </a:pPr>
       <a:endParaRPr/>
     </a:p>
@@ -5287,11 +5307,17 @@
           <a:bodyPr rtlCol="0" anchor="ctr"/>
           <a:lstStyle/>
           <a:p>
+            <a:pPr>
+              <a:defRPr>
+                <a:latin typeface="Roboto"/>
+              </a:defRPr>
+            </a:pPr>
             <a:r>
               <a:rPr sz="1600" b="1">
                 <a:solidFill>
                   <a:srgbClr val="FFFFFF"/>
                 </a:solidFill>
+                <a:latin typeface="Roboto"/>
               </a:rPr>
               <a:t>4th</a:t>
             </a:r>
@@ -5320,14 +5346,19 @@
           </a:bodyPr>
           <a:lstStyle/>
           <a:p>
+            <a:pPr>
+              <a:defRPr>
+                <a:latin typeface="Roboto"/>
+              </a:defRPr>
+            </a:pPr>
             <a:r>
               <a:rPr sz="1800" b="1">
                 <a:solidFill>
                   <a:srgbClr val="25342A"/>
                 </a:solidFill>
-                <a:latin typeface="Arial"/>
-              </a:rPr>
-              <a:t>The 4th Sheet</a:t>
+                <a:latin typeface="Roboto"/>
+              </a:rPr>
+              <a:t>The Fourth Sheet</a:t>
             </a:r>
           </a:p>
         </p:txBody>
@@ -5354,12 +5385,17 @@
           </a:bodyPr>
           <a:lstStyle/>
           <a:p>
+            <a:pPr>
+              <a:defRPr>
+                <a:latin typeface="Roboto"/>
+              </a:defRPr>
+            </a:pPr>
             <a:r>
               <a:rPr sz="1100" b="1">
                 <a:solidFill>
                   <a:srgbClr val="8A7A52"/>
                 </a:solidFill>
-                <a:latin typeface="Arial"/>
+                <a:latin typeface="Roboto"/>
               </a:rPr>
               <a:t>SAMPLE DATA · invented figures for demonstration</a:t>
             </a:r>
@@ -5388,12 +5424,17 @@
           </a:bodyPr>
           <a:lstStyle/>
           <a:p>
+            <a:pPr>
+              <a:defRPr>
+                <a:latin typeface="Roboto"/>
+              </a:defRPr>
+            </a:pPr>
             <a:r>
               <a:rPr sz="3400" b="1">
                 <a:solidFill>
                   <a:srgbClr val="25342A"/>
                 </a:solidFill>
-                <a:latin typeface="Arial"/>
+                <a:latin typeface="Roboto"/>
               </a:rPr>
               <a:t>Which jobs actually make money?</a:t>
             </a:r>
@@ -5422,12 +5463,17 @@
           </a:bodyPr>
           <a:lstStyle/>
           <a:p>
+            <a:pPr>
+              <a:defRPr>
+                <a:latin typeface="Roboto"/>
+              </a:defRPr>
+            </a:pPr>
             <a:r>
               <a:rPr sz="1600" b="0">
                 <a:solidFill>
                   <a:srgbClr val="5F6F63"/>
                 </a:solidFill>
-                <a:latin typeface="Arial"/>
+                <a:latin typeface="Roboto"/>
               </a:rPr>
               <a:t>Sample Electrical &amp; Air Pty Ltd</a:t>
             </a:r>
@@ -5456,12 +5502,17 @@
           </a:bodyPr>
           <a:lstStyle/>
           <a:p>
+            <a:pPr>
+              <a:defRPr>
+                <a:latin typeface="Roboto"/>
+              </a:defRPr>
+            </a:pPr>
             <a:r>
               <a:rPr sz="1400" b="0">
                 <a:solidFill>
                   <a:srgbClr val="25342A"/>
                 </a:solidFill>
-                <a:latin typeface="Arial"/>
+                <a:latin typeface="Roboto"/>
               </a:rPr>
               <a:t>Period: October 2025. Every job's gross margin: revenue less materials, subcontractors and technician time at $68 an hour (fully loaded: wages and all on-costs). Before overheads, so this is not profit. Pick a type of job and every number, chart and note on the page follows it.</a:t>
             </a:r>
@@ -5490,45 +5541,65 @@
           </a:bodyPr>
           <a:lstStyle/>
           <a:p>
+            <a:pPr>
+              <a:defRPr>
+                <a:latin typeface="Roboto"/>
+              </a:defRPr>
+            </a:pPr>
             <a:r>
               <a:rPr sz="1100" b="0">
                 <a:solidFill>
                   <a:srgbClr val="5F6F63"/>
                 </a:solidFill>
-                <a:latin typeface="Arial"/>
+                <a:latin typeface="Roboto"/>
               </a:rPr>
               <a:t>How final is this data?</a:t>
             </a:r>
           </a:p>
           <a:p>
+            <a:pPr>
+              <a:defRPr>
+                <a:latin typeface="Roboto"/>
+              </a:defRPr>
+            </a:pPr>
             <a:r>
               <a:rPr sz="1100" b="0">
                 <a:solidFill>
                   <a:srgbClr val="5F6F63"/>
                 </a:solidFill>
-                <a:latin typeface="Arial"/>
+                <a:latin typeface="Roboto"/>
               </a:rPr>
               <a:t>September 2025: Locked. September 2025 is locked (closed 2 Oct 2025). These numbers won't change.</a:t>
             </a:r>
           </a:p>
           <a:p>
+            <a:pPr>
+              <a:defRPr>
+                <a:latin typeface="Roboto"/>
+              </a:defRPr>
+            </a:pPr>
             <a:r>
               <a:rPr sz="1100" b="0">
                 <a:solidFill>
                   <a:srgbClr val="5F6F63"/>
                 </a:solidFill>
-                <a:latin typeface="Arial"/>
+                <a:latin typeface="Roboto"/>
               </a:rPr>
               <a:t>October 2025: Locked. October 2025 is locked (closed 4 Nov 2025). These numbers won't change.</a:t>
             </a:r>
           </a:p>
           <a:p>
+            <a:pPr>
+              <a:defRPr>
+                <a:latin typeface="Roboto"/>
+              </a:defRPr>
+            </a:pPr>
             <a:r>
               <a:rPr sz="1100" b="0">
                 <a:solidFill>
                   <a:srgbClr val="5F6F63"/>
                 </a:solidFill>
-                <a:latin typeface="Arial"/>
+                <a:latin typeface="Roboto"/>
               </a:rPr>
               <a:t>October 2026: Incomplete. October 2026 is still in progress: figures to 6 Oct only.</a:t>
             </a:r>
@@ -5557,12 +5628,17 @@
           </a:bodyPr>
           <a:lstStyle/>
           <a:p>
+            <a:pPr>
+              <a:defRPr>
+                <a:latin typeface="Roboto"/>
+              </a:defRPr>
+            </a:pPr>
             <a:r>
               <a:rPr sz="900" b="0">
                 <a:solidFill>
                   <a:srgbClr val="5F6F63"/>
                 </a:solidFill>
-                <a:latin typeface="Arial"/>
+                <a:latin typeface="Roboto"/>
               </a:rPr>
               <a:t>job-margins.pptx</a:t>
             </a:r>
@@ -5591,13 +5667,17 @@
           </a:bodyPr>
           <a:lstStyle/>
           <a:p>
-            <a:pPr algn="ctr"/>
+            <a:pPr algn="ctr">
+              <a:defRPr>
+                <a:latin typeface="Roboto"/>
+              </a:defRPr>
+            </a:pPr>
             <a:r>
               <a:rPr sz="900" b="0">
                 <a:solidFill>
                   <a:srgbClr val="5F6F63"/>
                 </a:solidFill>
-                <a:latin typeface="Arial"/>
+                <a:latin typeface="Roboto"/>
               </a:rPr>
               <a:t>Data retrieved 2pm, Tue 6 Oct 2026 · Sample data</a:t>
             </a:r>
@@ -5626,13 +5706,17 @@
           </a:bodyPr>
           <a:lstStyle/>
           <a:p>
-            <a:pPr algn="r"/>
+            <a:pPr algn="r">
+              <a:defRPr>
+                <a:latin typeface="Roboto"/>
+              </a:defRPr>
+            </a:pPr>
             <a:r>
               <a:rPr sz="900" b="0">
                 <a:solidFill>
                   <a:srgbClr val="5F6F63"/>
                 </a:solidFill>
-                <a:latin typeface="Arial"/>
+                <a:latin typeface="Roboto"/>
               </a:rPr>
               <a:t>Slide 1 of 21</a:t>
             </a:r>
@@ -5696,7 +5780,11 @@
           <a:bodyPr rtlCol="0" anchor="ctr"/>
           <a:lstStyle/>
           <a:p>
-            <a:pPr algn="ctr"/>
+            <a:pPr algn="ctr">
+              <a:defRPr>
+                <a:latin typeface="Roboto"/>
+              </a:defRPr>
+            </a:pPr>
           </a:p>
         </p:txBody>
       </p:sp>
@@ -5722,12 +5810,17 @@
           </a:bodyPr>
           <a:lstStyle/>
           <a:p>
+            <a:pPr>
+              <a:defRPr>
+                <a:latin typeface="Roboto"/>
+              </a:defRPr>
+            </a:pPr>
             <a:r>
               <a:rPr sz="1000" b="0">
                 <a:solidFill>
                   <a:srgbClr val="5F6F63"/>
                 </a:solidFill>
-                <a:latin typeface="Arial"/>
+                <a:latin typeface="Roboto"/>
               </a:rPr>
               <a:t>Sample Electrical &amp; Air Pty Ltd · Which jobs actually make money?</a:t>
             </a:r>
@@ -5756,12 +5849,17 @@
           </a:bodyPr>
           <a:lstStyle/>
           <a:p>
+            <a:pPr>
+              <a:defRPr>
+                <a:latin typeface="Roboto"/>
+              </a:defRPr>
+            </a:pPr>
             <a:r>
               <a:rPr sz="2400" b="1">
                 <a:solidFill>
                   <a:srgbClr val="25342A"/>
                 </a:solidFill>
-                <a:latin typeface="Arial"/>
+                <a:latin typeface="Roboto"/>
               </a:rPr>
               <a:t>Job gross margin on each maintenance contract, October 2025 · Gross margin $ · Type of job: Maintenance contracts</a:t>
             </a:r>
@@ -5790,12 +5888,17 @@
           </a:bodyPr>
           <a:lstStyle/>
           <a:p>
+            <a:pPr>
+              <a:defRPr>
+                <a:latin typeface="Roboto"/>
+              </a:defRPr>
+            </a:pPr>
             <a:r>
               <a:rPr sz="1200" b="0">
                 <a:solidFill>
                   <a:srgbClr val="5F6F63"/>
                 </a:solidFill>
-                <a:latin typeface="Arial"/>
+                <a:latin typeface="Roboto"/>
               </a:rPr>
               <a:t>The month's fee less materials and technician time at $68/hour.</a:t>
             </a:r>
@@ -5842,12 +5945,17 @@
           </a:bodyPr>
           <a:lstStyle/>
           <a:p>
+            <a:pPr>
+              <a:defRPr>
+                <a:latin typeface="Roboto"/>
+              </a:defRPr>
+            </a:pPr>
             <a:r>
               <a:rPr sz="900" b="0">
                 <a:solidFill>
                   <a:srgbClr val="5F6F63"/>
                 </a:solidFill>
-                <a:latin typeface="Arial"/>
+                <a:latin typeface="Roboto"/>
               </a:rPr>
               <a:t>job-margins.pptx</a:t>
             </a:r>
@@ -5876,13 +5984,17 @@
           </a:bodyPr>
           <a:lstStyle/>
           <a:p>
-            <a:pPr algn="ctr"/>
+            <a:pPr algn="ctr">
+              <a:defRPr>
+                <a:latin typeface="Roboto"/>
+              </a:defRPr>
+            </a:pPr>
             <a:r>
               <a:rPr sz="900" b="0">
                 <a:solidFill>
                   <a:srgbClr val="5F6F63"/>
                 </a:solidFill>
-                <a:latin typeface="Arial"/>
+                <a:latin typeface="Roboto"/>
               </a:rPr>
               <a:t>Data retrieved 2pm, Tue 6 Oct 2026 · Sample data</a:t>
             </a:r>
@@ -5911,13 +6023,17 @@
           </a:bodyPr>
           <a:lstStyle/>
           <a:p>
-            <a:pPr algn="r"/>
+            <a:pPr algn="r">
+              <a:defRPr>
+                <a:latin typeface="Roboto"/>
+              </a:defRPr>
+            </a:pPr>
             <a:r>
               <a:rPr sz="900" b="0">
                 <a:solidFill>
                   <a:srgbClr val="5F6F63"/>
                 </a:solidFill>
-                <a:latin typeface="Arial"/>
+                <a:latin typeface="Roboto"/>
               </a:rPr>
               <a:t>Slide 10 of 21</a:t>
             </a:r>
@@ -5981,7 +6097,11 @@
           <a:bodyPr rtlCol="0" anchor="ctr"/>
           <a:lstStyle/>
           <a:p>
-            <a:pPr algn="ctr"/>
+            <a:pPr algn="ctr">
+              <a:defRPr>
+                <a:latin typeface="Roboto"/>
+              </a:defRPr>
+            </a:pPr>
           </a:p>
         </p:txBody>
       </p:sp>
@@ -6007,12 +6127,17 @@
           </a:bodyPr>
           <a:lstStyle/>
           <a:p>
+            <a:pPr>
+              <a:defRPr>
+                <a:latin typeface="Roboto"/>
+              </a:defRPr>
+            </a:pPr>
             <a:r>
               <a:rPr sz="1000" b="0">
                 <a:solidFill>
                   <a:srgbClr val="5F6F63"/>
                 </a:solidFill>
-                <a:latin typeface="Arial"/>
+                <a:latin typeface="Roboto"/>
               </a:rPr>
               <a:t>Sample Electrical &amp; Air Pty Ltd · Which jobs actually make money?</a:t>
             </a:r>
@@ -6041,12 +6166,17 @@
           </a:bodyPr>
           <a:lstStyle/>
           <a:p>
+            <a:pPr>
+              <a:defRPr>
+                <a:latin typeface="Roboto"/>
+              </a:defRPr>
+            </a:pPr>
             <a:r>
               <a:rPr sz="2400" b="1">
                 <a:solidFill>
                   <a:srgbClr val="25342A"/>
                 </a:solidFill>
-                <a:latin typeface="Arial"/>
+                <a:latin typeface="Roboto"/>
               </a:rPr>
               <a:t>What it shows · Type of job: Maintenance contracts</a:t>
             </a:r>
@@ -6094,7 +6224,11 @@
           <a:bodyPr rtlCol="0" anchor="ctr"/>
           <a:lstStyle/>
           <a:p>
-            <a:pPr algn="ctr"/>
+            <a:pPr algn="ctr">
+              <a:defRPr>
+                <a:latin typeface="Roboto"/>
+              </a:defRPr>
+            </a:pPr>
           </a:p>
         </p:txBody>
       </p:sp>
@@ -6120,12 +6254,17 @@
           </a:bodyPr>
           <a:lstStyle/>
           <a:p>
+            <a:pPr>
+              <a:defRPr>
+                <a:latin typeface="Roboto"/>
+              </a:defRPr>
+            </a:pPr>
             <a:r>
               <a:rPr sz="1100" b="1">
                 <a:solidFill>
                   <a:srgbClr val="5F6F63"/>
                 </a:solidFill>
-                <a:latin typeface="Arial"/>
+                <a:latin typeface="Roboto"/>
               </a:rPr>
               <a:t>WHAT IT SHOWS</a:t>
             </a:r>
@@ -6154,12 +6293,17 @@
           </a:bodyPr>
           <a:lstStyle/>
           <a:p>
+            <a:pPr>
+              <a:defRPr>
+                <a:latin typeface="Roboto"/>
+              </a:defRPr>
+            </a:pPr>
             <a:r>
               <a:rPr sz="1600" b="0">
                 <a:solidFill>
                   <a:srgbClr val="25342A"/>
                 </a:solidFill>
-                <a:latin typeface="Arial"/>
+                <a:latin typeface="Roboto"/>
               </a:rPr>
               <a:t>All 12 contracts made more than the 35.0% job gross margin target. The thinnest was Kangaroo Point townhouses at 58.2% job gross margin: 14.0 h of technician time on a $2,400 monthly fee.</a:t>
             </a:r>
@@ -6207,7 +6351,11 @@
           <a:bodyPr rtlCol="0" anchor="ctr"/>
           <a:lstStyle/>
           <a:p>
-            <a:pPr algn="ctr"/>
+            <a:pPr algn="ctr">
+              <a:defRPr>
+                <a:latin typeface="Roboto"/>
+              </a:defRPr>
+            </a:pPr>
           </a:p>
         </p:txBody>
       </p:sp>
@@ -6233,12 +6381,17 @@
           </a:bodyPr>
           <a:lstStyle/>
           <a:p>
+            <a:pPr>
+              <a:defRPr>
+                <a:latin typeface="Roboto"/>
+              </a:defRPr>
+            </a:pPr>
             <a:r>
               <a:rPr sz="1100" b="1">
                 <a:solidFill>
                   <a:srgbClr val="5F6F63"/>
                 </a:solidFill>
-                <a:latin typeface="Arial"/>
+                <a:latin typeface="Roboto"/>
               </a:rPr>
               <a:t>WHAT YOU'D DO ABOUT IT</a:t>
             </a:r>
@@ -6267,12 +6420,17 @@
           </a:bodyPr>
           <a:lstStyle/>
           <a:p>
+            <a:pPr>
+              <a:defRPr>
+                <a:latin typeface="Roboto"/>
+              </a:defRPr>
+            </a:pPr>
             <a:r>
               <a:rPr sz="1600" b="0">
                 <a:solidFill>
                   <a:srgbClr val="25342A"/>
                 </a:solidFill>
-                <a:latin typeface="Arial"/>
+                <a:latin typeface="Roboto"/>
               </a:rPr>
               <a:t>The Kangaroo Point townhouses contract: 58.2% gross margin, 5.8 points clear of the 52.5% overheads need. Maintenance contracts overall: 59.5% gross margin.</a:t>
             </a:r>
@@ -6301,12 +6459,17 @@
           </a:bodyPr>
           <a:lstStyle/>
           <a:p>
+            <a:pPr>
+              <a:defRPr>
+                <a:latin typeface="Roboto"/>
+              </a:defRPr>
+            </a:pPr>
             <a:r>
               <a:rPr sz="900" b="0">
                 <a:solidFill>
                   <a:srgbClr val="5F6F63"/>
                 </a:solidFill>
-                <a:latin typeface="Arial"/>
+                <a:latin typeface="Roboto"/>
               </a:rPr>
               <a:t>job-margins.pptx</a:t>
             </a:r>
@@ -6335,13 +6498,17 @@
           </a:bodyPr>
           <a:lstStyle/>
           <a:p>
-            <a:pPr algn="ctr"/>
+            <a:pPr algn="ctr">
+              <a:defRPr>
+                <a:latin typeface="Roboto"/>
+              </a:defRPr>
+            </a:pPr>
             <a:r>
               <a:rPr sz="900" b="0">
                 <a:solidFill>
                   <a:srgbClr val="5F6F63"/>
                 </a:solidFill>
-                <a:latin typeface="Arial"/>
+                <a:latin typeface="Roboto"/>
               </a:rPr>
               <a:t>Data retrieved 2pm, Tue 6 Oct 2026 · Sample data</a:t>
             </a:r>
@@ -6370,13 +6537,17 @@
           </a:bodyPr>
           <a:lstStyle/>
           <a:p>
-            <a:pPr algn="r"/>
+            <a:pPr algn="r">
+              <a:defRPr>
+                <a:latin typeface="Roboto"/>
+              </a:defRPr>
+            </a:pPr>
             <a:r>
               <a:rPr sz="900" b="0">
                 <a:solidFill>
                   <a:srgbClr val="5F6F63"/>
                 </a:solidFill>
-                <a:latin typeface="Arial"/>
+                <a:latin typeface="Roboto"/>
               </a:rPr>
               <a:t>Slide 11 of 21</a:t>
             </a:r>
@@ -6440,7 +6611,11 @@
           <a:bodyPr rtlCol="0" anchor="ctr"/>
           <a:lstStyle/>
           <a:p>
-            <a:pPr algn="ctr"/>
+            <a:pPr algn="ctr">
+              <a:defRPr>
+                <a:latin typeface="Roboto"/>
+              </a:defRPr>
+            </a:pPr>
           </a:p>
         </p:txBody>
       </p:sp>
@@ -6466,12 +6641,17 @@
           </a:bodyPr>
           <a:lstStyle/>
           <a:p>
+            <a:pPr>
+              <a:defRPr>
+                <a:latin typeface="Roboto"/>
+              </a:defRPr>
+            </a:pPr>
             <a:r>
               <a:rPr sz="1000" b="0">
                 <a:solidFill>
                   <a:srgbClr val="5F6F63"/>
                 </a:solidFill>
-                <a:latin typeface="Arial"/>
+                <a:latin typeface="Roboto"/>
               </a:rPr>
               <a:t>Sample Electrical &amp; Air Pty Ltd · Which jobs actually make money?</a:t>
             </a:r>
@@ -6500,12 +6680,17 @@
           </a:bodyPr>
           <a:lstStyle/>
           <a:p>
+            <a:pPr>
+              <a:defRPr>
+                <a:latin typeface="Roboto"/>
+              </a:defRPr>
+            </a:pPr>
             <a:r>
               <a:rPr sz="2400" b="1">
                 <a:solidFill>
                   <a:srgbClr val="25342A"/>
                 </a:solidFill>
-                <a:latin typeface="Arial"/>
+                <a:latin typeface="Roboto"/>
               </a:rPr>
               <a:t>Headline numbers · Type of job: Installations</a:t>
             </a:r>
@@ -6553,7 +6738,11 @@
           <a:bodyPr rtlCol="0" anchor="ctr"/>
           <a:lstStyle/>
           <a:p>
-            <a:pPr algn="ctr"/>
+            <a:pPr algn="ctr">
+              <a:defRPr>
+                <a:latin typeface="Roboto"/>
+              </a:defRPr>
+            </a:pPr>
           </a:p>
         </p:txBody>
       </p:sp>
@@ -6579,12 +6768,17 @@
           </a:bodyPr>
           <a:lstStyle/>
           <a:p>
+            <a:pPr>
+              <a:defRPr>
+                <a:latin typeface="Roboto"/>
+              </a:defRPr>
+            </a:pPr>
             <a:r>
               <a:rPr sz="1200" b="0">
                 <a:solidFill>
                   <a:srgbClr val="5F6F63"/>
                 </a:solidFill>
-                <a:latin typeface="Arial"/>
+                <a:latin typeface="Roboto"/>
               </a:rPr>
               <a:t>Job gross margin, October · Installations</a:t>
             </a:r>
@@ -6613,12 +6807,17 @@
           </a:bodyPr>
           <a:lstStyle/>
           <a:p>
+            <a:pPr>
+              <a:defRPr>
+                <a:latin typeface="Roboto"/>
+              </a:defRPr>
+            </a:pPr>
             <a:r>
               <a:rPr sz="3000" b="1">
                 <a:solidFill>
                   <a:srgbClr val="2F7A5D"/>
                 </a:solidFill>
-                <a:latin typeface="Arial"/>
+                <a:latin typeface="Roboto"/>
               </a:rPr>
               <a:t>26.1%</a:t>
             </a:r>
@@ -6647,12 +6846,17 @@
           </a:bodyPr>
           <a:lstStyle/>
           <a:p>
+            <a:pPr>
+              <a:defRPr>
+                <a:latin typeface="Roboto"/>
+              </a:defRPr>
+            </a:pPr>
             <a:r>
               <a:rPr sz="1100" b="0">
                 <a:solidFill>
                   <a:srgbClr val="5F6F63"/>
                 </a:solidFill>
-                <a:latin typeface="Arial"/>
+                <a:latin typeface="Roboto"/>
               </a:rPr>
               <a:t>September 26.2%</a:t>
             </a:r>
@@ -6681,12 +6885,17 @@
           </a:bodyPr>
           <a:lstStyle/>
           <a:p>
+            <a:pPr>
+              <a:defRPr>
+                <a:latin typeface="Roboto"/>
+              </a:defRPr>
+            </a:pPr>
             <a:r>
               <a:rPr sz="900" b="0">
                 <a:solidFill>
                   <a:srgbClr val="5F6F63"/>
                 </a:solidFill>
-                <a:latin typeface="Arial"/>
+                <a:latin typeface="Roboto"/>
               </a:rPr>
               <a:t>job-margins.pptx</a:t>
             </a:r>
@@ -6715,13 +6924,17 @@
           </a:bodyPr>
           <a:lstStyle/>
           <a:p>
-            <a:pPr algn="ctr"/>
+            <a:pPr algn="ctr">
+              <a:defRPr>
+                <a:latin typeface="Roboto"/>
+              </a:defRPr>
+            </a:pPr>
             <a:r>
               <a:rPr sz="900" b="0">
                 <a:solidFill>
                   <a:srgbClr val="5F6F63"/>
                 </a:solidFill>
-                <a:latin typeface="Arial"/>
+                <a:latin typeface="Roboto"/>
               </a:rPr>
               <a:t>Data retrieved 2pm, Tue 6 Oct 2026 · Sample data</a:t>
             </a:r>
@@ -6750,13 +6963,17 @@
           </a:bodyPr>
           <a:lstStyle/>
           <a:p>
-            <a:pPr algn="r"/>
+            <a:pPr algn="r">
+              <a:defRPr>
+                <a:latin typeface="Roboto"/>
+              </a:defRPr>
+            </a:pPr>
             <a:r>
               <a:rPr sz="900" b="0">
                 <a:solidFill>
                   <a:srgbClr val="5F6F63"/>
                 </a:solidFill>
-                <a:latin typeface="Arial"/>
+                <a:latin typeface="Roboto"/>
               </a:rPr>
               <a:t>Slide 12 of 21</a:t>
             </a:r>
@@ -6820,7 +7037,11 @@
           <a:bodyPr rtlCol="0" anchor="ctr"/>
           <a:lstStyle/>
           <a:p>
-            <a:pPr algn="ctr"/>
+            <a:pPr algn="ctr">
+              <a:defRPr>
+                <a:latin typeface="Roboto"/>
+              </a:defRPr>
+            </a:pPr>
           </a:p>
         </p:txBody>
       </p:sp>
@@ -6846,12 +7067,17 @@
           </a:bodyPr>
           <a:lstStyle/>
           <a:p>
+            <a:pPr>
+              <a:defRPr>
+                <a:latin typeface="Roboto"/>
+              </a:defRPr>
+            </a:pPr>
             <a:r>
               <a:rPr sz="1000" b="0">
                 <a:solidFill>
                   <a:srgbClr val="5F6F63"/>
                 </a:solidFill>
-                <a:latin typeface="Arial"/>
+                <a:latin typeface="Roboto"/>
               </a:rPr>
               <a:t>Sample Electrical &amp; Air Pty Ltd · Which jobs actually make money?</a:t>
             </a:r>
@@ -6880,12 +7106,17 @@
           </a:bodyPr>
           <a:lstStyle/>
           <a:p>
+            <a:pPr>
+              <a:defRPr>
+                <a:latin typeface="Roboto"/>
+              </a:defRPr>
+            </a:pPr>
             <a:r>
               <a:rPr sz="2400" b="1">
                 <a:solidFill>
                   <a:srgbClr val="25342A"/>
                 </a:solidFill>
-                <a:latin typeface="Arial"/>
+                <a:latin typeface="Roboto"/>
               </a:rPr>
               <a:t>Job gross margin on each installation invoiced in October 2025 · Gross margin % · Type of job: Installations</a:t>
             </a:r>
@@ -6914,12 +7145,17 @@
           </a:bodyPr>
           <a:lstStyle/>
           <a:p>
+            <a:pPr>
+              <a:defRPr>
+                <a:latin typeface="Roboto"/>
+              </a:defRPr>
+            </a:pPr>
             <a:r>
               <a:rPr sz="1200" b="0">
                 <a:solidFill>
                   <a:srgbClr val="5F6F63"/>
                 </a:solidFill>
-                <a:latin typeface="Arial"/>
+                <a:latin typeface="Roboto"/>
               </a:rPr>
               <a:t>Whole job, recognised when invoiced: revenue less materials, subcontractors and technician time at $68/hour. Before overheads: not profit. One 35.0% target for every job for now.</a:t>
             </a:r>
@@ -6966,12 +7202,17 @@
           </a:bodyPr>
           <a:lstStyle/>
           <a:p>
+            <a:pPr>
+              <a:defRPr>
+                <a:latin typeface="Roboto"/>
+              </a:defRPr>
+            </a:pPr>
             <a:r>
               <a:rPr sz="1000" b="0">
                 <a:solidFill>
                   <a:srgbClr val="5F6F63"/>
                 </a:solidFill>
-                <a:latin typeface="Arial"/>
+                <a:latin typeface="Roboto"/>
               </a:rPr>
               <a:t>Target 35.0%  ·  grey = below target</a:t>
             </a:r>
@@ -7000,12 +7241,17 @@
           </a:bodyPr>
           <a:lstStyle/>
           <a:p>
+            <a:pPr>
+              <a:defRPr>
+                <a:latin typeface="Roboto"/>
+              </a:defRPr>
+            </a:pPr>
             <a:r>
               <a:rPr sz="900" b="0">
                 <a:solidFill>
                   <a:srgbClr val="5F6F63"/>
                 </a:solidFill>
-                <a:latin typeface="Arial"/>
+                <a:latin typeface="Roboto"/>
               </a:rPr>
               <a:t>job-margins.pptx</a:t>
             </a:r>
@@ -7034,13 +7280,17 @@
           </a:bodyPr>
           <a:lstStyle/>
           <a:p>
-            <a:pPr algn="ctr"/>
+            <a:pPr algn="ctr">
+              <a:defRPr>
+                <a:latin typeface="Roboto"/>
+              </a:defRPr>
+            </a:pPr>
             <a:r>
               <a:rPr sz="900" b="0">
                 <a:solidFill>
                   <a:srgbClr val="5F6F63"/>
                 </a:solidFill>
-                <a:latin typeface="Arial"/>
+                <a:latin typeface="Roboto"/>
               </a:rPr>
               <a:t>Data retrieved 2pm, Tue 6 Oct 2026 · Sample data</a:t>
             </a:r>
@@ -7069,13 +7319,17 @@
           </a:bodyPr>
           <a:lstStyle/>
           <a:p>
-            <a:pPr algn="r"/>
+            <a:pPr algn="r">
+              <a:defRPr>
+                <a:latin typeface="Roboto"/>
+              </a:defRPr>
+            </a:pPr>
             <a:r>
               <a:rPr sz="900" b="0">
                 <a:solidFill>
                   <a:srgbClr val="5F6F63"/>
                 </a:solidFill>
-                <a:latin typeface="Arial"/>
+                <a:latin typeface="Roboto"/>
               </a:rPr>
               <a:t>Slide 13 of 21</a:t>
             </a:r>
@@ -7139,7 +7393,11 @@
           <a:bodyPr rtlCol="0" anchor="ctr"/>
           <a:lstStyle/>
           <a:p>
-            <a:pPr algn="ctr"/>
+            <a:pPr algn="ctr">
+              <a:defRPr>
+                <a:latin typeface="Roboto"/>
+              </a:defRPr>
+            </a:pPr>
           </a:p>
         </p:txBody>
       </p:sp>
@@ -7165,12 +7423,17 @@
           </a:bodyPr>
           <a:lstStyle/>
           <a:p>
+            <a:pPr>
+              <a:defRPr>
+                <a:latin typeface="Roboto"/>
+              </a:defRPr>
+            </a:pPr>
             <a:r>
               <a:rPr sz="1000" b="0">
                 <a:solidFill>
                   <a:srgbClr val="5F6F63"/>
                 </a:solidFill>
-                <a:latin typeface="Arial"/>
+                <a:latin typeface="Roboto"/>
               </a:rPr>
               <a:t>Sample Electrical &amp; Air Pty Ltd · Which jobs actually make money?</a:t>
             </a:r>
@@ -7199,12 +7462,17 @@
           </a:bodyPr>
           <a:lstStyle/>
           <a:p>
+            <a:pPr>
+              <a:defRPr>
+                <a:latin typeface="Roboto"/>
+              </a:defRPr>
+            </a:pPr>
             <a:r>
               <a:rPr sz="2400" b="1">
                 <a:solidFill>
                   <a:srgbClr val="25342A"/>
                 </a:solidFill>
-                <a:latin typeface="Arial"/>
+                <a:latin typeface="Roboto"/>
               </a:rPr>
               <a:t>Job gross margin on each installation invoiced in October 2025 · Gross margin $ · Type of job: Installations</a:t>
             </a:r>
@@ -7233,12 +7501,17 @@
           </a:bodyPr>
           <a:lstStyle/>
           <a:p>
+            <a:pPr>
+              <a:defRPr>
+                <a:latin typeface="Roboto"/>
+              </a:defRPr>
+            </a:pPr>
             <a:r>
               <a:rPr sz="1200" b="0">
                 <a:solidFill>
                   <a:srgbClr val="5F6F63"/>
                 </a:solidFill>
-                <a:latin typeface="Arial"/>
+                <a:latin typeface="Roboto"/>
               </a:rPr>
               <a:t>Whole job, recognised when invoiced: revenue less materials, subcontractors and technician time at $68/hour. Before overheads: not profit. One 35.0% target for every job for now.</a:t>
             </a:r>
@@ -7285,12 +7558,17 @@
           </a:bodyPr>
           <a:lstStyle/>
           <a:p>
+            <a:pPr>
+              <a:defRPr>
+                <a:latin typeface="Roboto"/>
+              </a:defRPr>
+            </a:pPr>
             <a:r>
               <a:rPr sz="900" b="0">
                 <a:solidFill>
                   <a:srgbClr val="5F6F63"/>
                 </a:solidFill>
-                <a:latin typeface="Arial"/>
+                <a:latin typeface="Roboto"/>
               </a:rPr>
               <a:t>job-margins.pptx</a:t>
             </a:r>
@@ -7319,13 +7597,17 @@
           </a:bodyPr>
           <a:lstStyle/>
           <a:p>
-            <a:pPr algn="ctr"/>
+            <a:pPr algn="ctr">
+              <a:defRPr>
+                <a:latin typeface="Roboto"/>
+              </a:defRPr>
+            </a:pPr>
             <a:r>
               <a:rPr sz="900" b="0">
                 <a:solidFill>
                   <a:srgbClr val="5F6F63"/>
                 </a:solidFill>
-                <a:latin typeface="Arial"/>
+                <a:latin typeface="Roboto"/>
               </a:rPr>
               <a:t>Data retrieved 2pm, Tue 6 Oct 2026 · Sample data</a:t>
             </a:r>
@@ -7354,13 +7636,17 @@
           </a:bodyPr>
           <a:lstStyle/>
           <a:p>
-            <a:pPr algn="r"/>
+            <a:pPr algn="r">
+              <a:defRPr>
+                <a:latin typeface="Roboto"/>
+              </a:defRPr>
+            </a:pPr>
             <a:r>
               <a:rPr sz="900" b="0">
                 <a:solidFill>
                   <a:srgbClr val="5F6F63"/>
                 </a:solidFill>
-                <a:latin typeface="Arial"/>
+                <a:latin typeface="Roboto"/>
               </a:rPr>
               <a:t>Slide 14 of 21</a:t>
             </a:r>
@@ -7424,7 +7710,11 @@
           <a:bodyPr rtlCol="0" anchor="ctr"/>
           <a:lstStyle/>
           <a:p>
-            <a:pPr algn="ctr"/>
+            <a:pPr algn="ctr">
+              <a:defRPr>
+                <a:latin typeface="Roboto"/>
+              </a:defRPr>
+            </a:pPr>
           </a:p>
         </p:txBody>
       </p:sp>
@@ -7450,12 +7740,17 @@
           </a:bodyPr>
           <a:lstStyle/>
           <a:p>
+            <a:pPr>
+              <a:defRPr>
+                <a:latin typeface="Roboto"/>
+              </a:defRPr>
+            </a:pPr>
             <a:r>
               <a:rPr sz="1000" b="0">
                 <a:solidFill>
                   <a:srgbClr val="5F6F63"/>
                 </a:solidFill>
-                <a:latin typeface="Arial"/>
+                <a:latin typeface="Roboto"/>
               </a:rPr>
               <a:t>Sample Electrical &amp; Air Pty Ltd · Which jobs actually make money?</a:t>
             </a:r>
@@ -7484,12 +7779,17 @@
           </a:bodyPr>
           <a:lstStyle/>
           <a:p>
+            <a:pPr>
+              <a:defRPr>
+                <a:latin typeface="Roboto"/>
+              </a:defRPr>
+            </a:pPr>
             <a:r>
               <a:rPr sz="2400" b="1">
                 <a:solidFill>
                   <a:srgbClr val="25342A"/>
                 </a:solidFill>
-                <a:latin typeface="Arial"/>
+                <a:latin typeface="Roboto"/>
               </a:rPr>
               <a:t>What it shows · Type of job: Installations</a:t>
             </a:r>
@@ -7537,7 +7837,11 @@
           <a:bodyPr rtlCol="0" anchor="ctr"/>
           <a:lstStyle/>
           <a:p>
-            <a:pPr algn="ctr"/>
+            <a:pPr algn="ctr">
+              <a:defRPr>
+                <a:latin typeface="Roboto"/>
+              </a:defRPr>
+            </a:pPr>
           </a:p>
         </p:txBody>
       </p:sp>
@@ -7563,12 +7867,17 @@
           </a:bodyPr>
           <a:lstStyle/>
           <a:p>
+            <a:pPr>
+              <a:defRPr>
+                <a:latin typeface="Roboto"/>
+              </a:defRPr>
+            </a:pPr>
             <a:r>
               <a:rPr sz="1100" b="1">
                 <a:solidFill>
                   <a:srgbClr val="5F6F63"/>
                 </a:solidFill>
-                <a:latin typeface="Arial"/>
+                <a:latin typeface="Roboto"/>
               </a:rPr>
               <a:t>WHAT IT SHOWS</a:t>
             </a:r>
@@ -7597,12 +7906,17 @@
           </a:bodyPr>
           <a:lstStyle/>
           <a:p>
+            <a:pPr>
+              <a:defRPr>
+                <a:latin typeface="Roboto"/>
+              </a:defRPr>
+            </a:pPr>
             <a:r>
               <a:rPr sz="1600" b="0">
                 <a:solidFill>
                   <a:srgbClr val="25342A"/>
                 </a:solidFill>
-                <a:latin typeface="Arial"/>
+                <a:latin typeface="Roboto"/>
               </a:rPr>
               <a:t>2 of the 3 installation jobs invoiced in October made less than the 35.0% job gross margin target. The Salisbury shop solar and battery made a 17.3% job gross margin: 120.0 h of technician time ($8,160) and $3,900 of subcontractors on a $35,500 job. Jobs need 52.5% gross margin just to cover overheads.</a:t>
             </a:r>
@@ -7650,7 +7964,11 @@
           <a:bodyPr rtlCol="0" anchor="ctr"/>
           <a:lstStyle/>
           <a:p>
-            <a:pPr algn="ctr"/>
+            <a:pPr algn="ctr">
+              <a:defRPr>
+                <a:latin typeface="Roboto"/>
+              </a:defRPr>
+            </a:pPr>
           </a:p>
         </p:txBody>
       </p:sp>
@@ -7676,12 +7994,17 @@
           </a:bodyPr>
           <a:lstStyle/>
           <a:p>
+            <a:pPr>
+              <a:defRPr>
+                <a:latin typeface="Roboto"/>
+              </a:defRPr>
+            </a:pPr>
             <a:r>
               <a:rPr sz="1100" b="1">
                 <a:solidFill>
                   <a:srgbClr val="5F6F63"/>
                 </a:solidFill>
-                <a:latin typeface="Arial"/>
+                <a:latin typeface="Roboto"/>
               </a:rPr>
               <a:t>WHAT YOU'D DO ABOUT IT</a:t>
             </a:r>
@@ -7710,12 +8033,17 @@
           </a:bodyPr>
           <a:lstStyle/>
           <a:p>
+            <a:pPr>
+              <a:defRPr>
+                <a:latin typeface="Roboto"/>
+              </a:defRPr>
+            </a:pPr>
             <a:r>
               <a:rPr sz="1600" b="0">
                 <a:solidFill>
                   <a:srgbClr val="25342A"/>
                 </a:solidFill>
-                <a:latin typeface="Arial"/>
+                <a:latin typeface="Roboto"/>
               </a:rPr>
               <a:t>Below the 52.5% overheads need: Aspley cafe data cabling (37.8%), Coorparoo shop air-con install (32.5%), Salisbury shop solar and battery (17.3%). Most profitable: Aspley cafe data cabling (37.8%).</a:t>
             </a:r>
@@ -7744,12 +8072,17 @@
           </a:bodyPr>
           <a:lstStyle/>
           <a:p>
+            <a:pPr>
+              <a:defRPr>
+                <a:latin typeface="Roboto"/>
+              </a:defRPr>
+            </a:pPr>
             <a:r>
               <a:rPr sz="900" b="0">
                 <a:solidFill>
                   <a:srgbClr val="5F6F63"/>
                 </a:solidFill>
-                <a:latin typeface="Arial"/>
+                <a:latin typeface="Roboto"/>
               </a:rPr>
               <a:t>job-margins.pptx</a:t>
             </a:r>
@@ -7778,13 +8111,17 @@
           </a:bodyPr>
           <a:lstStyle/>
           <a:p>
-            <a:pPr algn="ctr"/>
+            <a:pPr algn="ctr">
+              <a:defRPr>
+                <a:latin typeface="Roboto"/>
+              </a:defRPr>
+            </a:pPr>
             <a:r>
               <a:rPr sz="900" b="0">
                 <a:solidFill>
                   <a:srgbClr val="5F6F63"/>
                 </a:solidFill>
-                <a:latin typeface="Arial"/>
+                <a:latin typeface="Roboto"/>
               </a:rPr>
               <a:t>Data retrieved 2pm, Tue 6 Oct 2026 · Sample data</a:t>
             </a:r>
@@ -7813,13 +8150,17 @@
           </a:bodyPr>
           <a:lstStyle/>
           <a:p>
-            <a:pPr algn="r"/>
+            <a:pPr algn="r">
+              <a:defRPr>
+                <a:latin typeface="Roboto"/>
+              </a:defRPr>
+            </a:pPr>
             <a:r>
               <a:rPr sz="900" b="0">
                 <a:solidFill>
                   <a:srgbClr val="5F6F63"/>
                 </a:solidFill>
-                <a:latin typeface="Arial"/>
+                <a:latin typeface="Roboto"/>
               </a:rPr>
               <a:t>Slide 15 of 21</a:t>
             </a:r>
@@ -7883,7 +8224,11 @@
           <a:bodyPr rtlCol="0" anchor="ctr"/>
           <a:lstStyle/>
           <a:p>
-            <a:pPr algn="ctr"/>
+            <a:pPr algn="ctr">
+              <a:defRPr>
+                <a:latin typeface="Roboto"/>
+              </a:defRPr>
+            </a:pPr>
           </a:p>
         </p:txBody>
       </p:sp>
@@ -7909,12 +8254,17 @@
           </a:bodyPr>
           <a:lstStyle/>
           <a:p>
+            <a:pPr>
+              <a:defRPr>
+                <a:latin typeface="Roboto"/>
+              </a:defRPr>
+            </a:pPr>
             <a:r>
               <a:rPr sz="1000" b="0">
                 <a:solidFill>
                   <a:srgbClr val="5F6F63"/>
                 </a:solidFill>
-                <a:latin typeface="Arial"/>
+                <a:latin typeface="Roboto"/>
               </a:rPr>
               <a:t>Sample Electrical &amp; Air Pty Ltd · Which jobs actually make money?</a:t>
             </a:r>
@@ -7943,12 +8293,17 @@
           </a:bodyPr>
           <a:lstStyle/>
           <a:p>
+            <a:pPr>
+              <a:defRPr>
+                <a:latin typeface="Roboto"/>
+              </a:defRPr>
+            </a:pPr>
             <a:r>
               <a:rPr sz="2400" b="1">
                 <a:solidFill>
                   <a:srgbClr val="25342A"/>
                 </a:solidFill>
-                <a:latin typeface="Arial"/>
+                <a:latin typeface="Roboto"/>
               </a:rPr>
               <a:t>Headline numbers · Type of job: Call-outs and repairs</a:t>
             </a:r>
@@ -7996,7 +8351,11 @@
           <a:bodyPr rtlCol="0" anchor="ctr"/>
           <a:lstStyle/>
           <a:p>
-            <a:pPr algn="ctr"/>
+            <a:pPr algn="ctr">
+              <a:defRPr>
+                <a:latin typeface="Roboto"/>
+              </a:defRPr>
+            </a:pPr>
           </a:p>
         </p:txBody>
       </p:sp>
@@ -8022,12 +8381,17 @@
           </a:bodyPr>
           <a:lstStyle/>
           <a:p>
+            <a:pPr>
+              <a:defRPr>
+                <a:latin typeface="Roboto"/>
+              </a:defRPr>
+            </a:pPr>
             <a:r>
               <a:rPr sz="1200" b="0">
                 <a:solidFill>
                   <a:srgbClr val="5F6F63"/>
                 </a:solidFill>
-                <a:latin typeface="Arial"/>
+                <a:latin typeface="Roboto"/>
               </a:rPr>
               <a:t>Job gross margin, October · Call-outs and repairs</a:t>
             </a:r>
@@ -8056,12 +8420,17 @@
           </a:bodyPr>
           <a:lstStyle/>
           <a:p>
+            <a:pPr>
+              <a:defRPr>
+                <a:latin typeface="Roboto"/>
+              </a:defRPr>
+            </a:pPr>
             <a:r>
               <a:rPr sz="3000" b="1">
                 <a:solidFill>
                   <a:srgbClr val="2F7A5D"/>
                 </a:solidFill>
-                <a:latin typeface="Arial"/>
+                <a:latin typeface="Roboto"/>
               </a:rPr>
               <a:t>43.3%</a:t>
             </a:r>
@@ -8090,12 +8459,17 @@
           </a:bodyPr>
           <a:lstStyle/>
           <a:p>
+            <a:pPr>
+              <a:defRPr>
+                <a:latin typeface="Roboto"/>
+              </a:defRPr>
+            </a:pPr>
             <a:r>
               <a:rPr sz="1100" b="0">
                 <a:solidFill>
                   <a:srgbClr val="5F6F63"/>
                 </a:solidFill>
-                <a:latin typeface="Arial"/>
+                <a:latin typeface="Roboto"/>
               </a:rPr>
               <a:t>September 44.0%</a:t>
             </a:r>
@@ -8143,7 +8517,11 @@
           <a:bodyPr rtlCol="0" anchor="ctr"/>
           <a:lstStyle/>
           <a:p>
-            <a:pPr algn="ctr"/>
+            <a:pPr algn="ctr">
+              <a:defRPr>
+                <a:latin typeface="Roboto"/>
+              </a:defRPr>
+            </a:pPr>
           </a:p>
         </p:txBody>
       </p:sp>
@@ -8169,12 +8547,17 @@
           </a:bodyPr>
           <a:lstStyle/>
           <a:p>
+            <a:pPr>
+              <a:defRPr>
+                <a:latin typeface="Roboto"/>
+              </a:defRPr>
+            </a:pPr>
             <a:r>
               <a:rPr sz="1200" b="0">
                 <a:solidFill>
                   <a:srgbClr val="5F6F63"/>
                 </a:solidFill>
-                <a:latin typeface="Arial"/>
+                <a:latin typeface="Roboto"/>
               </a:rPr>
               <a:t>Technician time charged, October</a:t>
             </a:r>
@@ -8203,12 +8586,17 @@
           </a:bodyPr>
           <a:lstStyle/>
           <a:p>
+            <a:pPr>
+              <a:defRPr>
+                <a:latin typeface="Roboto"/>
+              </a:defRPr>
+            </a:pPr>
             <a:r>
               <a:rPr sz="3000" b="1">
                 <a:solidFill>
                   <a:srgbClr val="2F7A5D"/>
                 </a:solidFill>
-                <a:latin typeface="Arial"/>
+                <a:latin typeface="Roboto"/>
               </a:rPr>
               <a:t>$15,005</a:t>
             </a:r>
@@ -8237,12 +8625,17 @@
           </a:bodyPr>
           <a:lstStyle/>
           <a:p>
+            <a:pPr>
+              <a:defRPr>
+                <a:latin typeface="Roboto"/>
+              </a:defRPr>
+            </a:pPr>
             <a:r>
               <a:rPr sz="1100" b="0">
                 <a:solidFill>
                   <a:srgbClr val="5F6F63"/>
                 </a:solidFill>
-                <a:latin typeface="Arial"/>
+                <a:latin typeface="Roboto"/>
               </a:rPr>
               <a:t>67.3% of call-out revenue</a:t>
             </a:r>
@@ -8290,7 +8683,11 @@
           <a:bodyPr rtlCol="0" anchor="ctr"/>
           <a:lstStyle/>
           <a:p>
-            <a:pPr algn="ctr"/>
+            <a:pPr algn="ctr">
+              <a:defRPr>
+                <a:latin typeface="Roboto"/>
+              </a:defRPr>
+            </a:pPr>
           </a:p>
         </p:txBody>
       </p:sp>
@@ -8316,12 +8713,17 @@
           </a:bodyPr>
           <a:lstStyle/>
           <a:p>
+            <a:pPr>
+              <a:defRPr>
+                <a:latin typeface="Roboto"/>
+              </a:defRPr>
+            </a:pPr>
             <a:r>
               <a:rPr sz="1200" b="0">
                 <a:solidFill>
                   <a:srgbClr val="5F6F63"/>
                 </a:solidFill>
-                <a:latin typeface="Arial"/>
+                <a:latin typeface="Roboto"/>
               </a:rPr>
               <a:t>Materials charged, October</a:t>
             </a:r>
@@ -8350,12 +8752,17 @@
           </a:bodyPr>
           <a:lstStyle/>
           <a:p>
+            <a:pPr>
+              <a:defRPr>
+                <a:latin typeface="Roboto"/>
+              </a:defRPr>
+            </a:pPr>
             <a:r>
               <a:rPr sz="3000" b="1">
                 <a:solidFill>
                   <a:srgbClr val="2F7A5D"/>
                 </a:solidFill>
-                <a:latin typeface="Arial"/>
+                <a:latin typeface="Roboto"/>
               </a:rPr>
               <a:t>$7,293</a:t>
             </a:r>
@@ -8384,12 +8791,17 @@
           </a:bodyPr>
           <a:lstStyle/>
           <a:p>
+            <a:pPr>
+              <a:defRPr>
+                <a:latin typeface="Roboto"/>
+              </a:defRPr>
+            </a:pPr>
             <a:r>
               <a:rPr sz="1100" b="0">
                 <a:solidFill>
                   <a:srgbClr val="5F6F63"/>
                 </a:solidFill>
-                <a:latin typeface="Arial"/>
+                <a:latin typeface="Roboto"/>
               </a:rPr>
               <a:t>$5,610 at cost, plus 30%</a:t>
             </a:r>
@@ -8418,12 +8830,17 @@
           </a:bodyPr>
           <a:lstStyle/>
           <a:p>
+            <a:pPr>
+              <a:defRPr>
+                <a:latin typeface="Roboto"/>
+              </a:defRPr>
+            </a:pPr>
             <a:r>
               <a:rPr sz="900" b="0">
                 <a:solidFill>
                   <a:srgbClr val="5F6F63"/>
                 </a:solidFill>
-                <a:latin typeface="Arial"/>
+                <a:latin typeface="Roboto"/>
               </a:rPr>
               <a:t>job-margins.pptx</a:t>
             </a:r>
@@ -8452,13 +8869,17 @@
           </a:bodyPr>
           <a:lstStyle/>
           <a:p>
-            <a:pPr algn="ctr"/>
+            <a:pPr algn="ctr">
+              <a:defRPr>
+                <a:latin typeface="Roboto"/>
+              </a:defRPr>
+            </a:pPr>
             <a:r>
               <a:rPr sz="900" b="0">
                 <a:solidFill>
                   <a:srgbClr val="5F6F63"/>
                 </a:solidFill>
-                <a:latin typeface="Arial"/>
+                <a:latin typeface="Roboto"/>
               </a:rPr>
               <a:t>Data retrieved 2pm, Tue 6 Oct 2026 · Sample data</a:t>
             </a:r>
@@ -8487,13 +8908,17 @@
           </a:bodyPr>
           <a:lstStyle/>
           <a:p>
-            <a:pPr algn="r"/>
+            <a:pPr algn="r">
+              <a:defRPr>
+                <a:latin typeface="Roboto"/>
+              </a:defRPr>
+            </a:pPr>
             <a:r>
               <a:rPr sz="900" b="0">
                 <a:solidFill>
                   <a:srgbClr val="5F6F63"/>
                 </a:solidFill>
-                <a:latin typeface="Arial"/>
+                <a:latin typeface="Roboto"/>
               </a:rPr>
               <a:t>Slide 16 of 21</a:t>
             </a:r>
@@ -8557,7 +8982,11 @@
           <a:bodyPr rtlCol="0" anchor="ctr"/>
           <a:lstStyle/>
           <a:p>
-            <a:pPr algn="ctr"/>
+            <a:pPr algn="ctr">
+              <a:defRPr>
+                <a:latin typeface="Roboto"/>
+              </a:defRPr>
+            </a:pPr>
           </a:p>
         </p:txBody>
       </p:sp>
@@ -8583,12 +9012,17 @@
           </a:bodyPr>
           <a:lstStyle/>
           <a:p>
+            <a:pPr>
+              <a:defRPr>
+                <a:latin typeface="Roboto"/>
+              </a:defRPr>
+            </a:pPr>
             <a:r>
               <a:rPr sz="1000" b="0">
                 <a:solidFill>
                   <a:srgbClr val="5F6F63"/>
                 </a:solidFill>
-                <a:latin typeface="Arial"/>
+                <a:latin typeface="Roboto"/>
               </a:rPr>
               <a:t>Sample Electrical &amp; Air Pty Ltd · Which jobs actually make money?</a:t>
             </a:r>
@@ -8617,12 +9051,17 @@
           </a:bodyPr>
           <a:lstStyle/>
           <a:p>
+            <a:pPr>
+              <a:defRPr>
+                <a:latin typeface="Roboto"/>
+              </a:defRPr>
+            </a:pPr>
             <a:r>
               <a:rPr sz="2400" b="1">
                 <a:solidFill>
                   <a:srgbClr val="25342A"/>
                 </a:solidFill>
-                <a:latin typeface="Arial"/>
+                <a:latin typeface="Roboto"/>
               </a:rPr>
               <a:t>Job gross margin on call-outs by length, October 2025 · Gross margin % · Type of job: Call-outs and repairs</a:t>
             </a:r>
@@ -8651,12 +9090,17 @@
           </a:bodyPr>
           <a:lstStyle/>
           <a:p>
+            <a:pPr>
+              <a:defRPr>
+                <a:latin typeface="Roboto"/>
+              </a:defRPr>
+            </a:pPr>
             <a:r>
               <a:rPr sz="1200" b="0">
                 <a:solidFill>
                   <a:srgbClr val="5F6F63"/>
                 </a:solidFill>
-                <a:latin typeface="Arial"/>
+                <a:latin typeface="Roboto"/>
               </a:rPr>
               <a:t>Charged at $145/hour plus materials at cost × 1.3; technician time at $68/hour.</a:t>
             </a:r>
@@ -8703,12 +9147,17 @@
           </a:bodyPr>
           <a:lstStyle/>
           <a:p>
+            <a:pPr>
+              <a:defRPr>
+                <a:latin typeface="Roboto"/>
+              </a:defRPr>
+            </a:pPr>
             <a:r>
               <a:rPr sz="1000" b="0">
                 <a:solidFill>
                   <a:srgbClr val="5F6F63"/>
                 </a:solidFill>
-                <a:latin typeface="Arial"/>
+                <a:latin typeface="Roboto"/>
               </a:rPr>
               <a:t>Target 35.0%  ·  grey = below target</a:t>
             </a:r>
@@ -8737,12 +9186,17 @@
           </a:bodyPr>
           <a:lstStyle/>
           <a:p>
+            <a:pPr>
+              <a:defRPr>
+                <a:latin typeface="Roboto"/>
+              </a:defRPr>
+            </a:pPr>
             <a:r>
               <a:rPr sz="900" b="0">
                 <a:solidFill>
                   <a:srgbClr val="5F6F63"/>
                 </a:solidFill>
-                <a:latin typeface="Arial"/>
+                <a:latin typeface="Roboto"/>
               </a:rPr>
               <a:t>job-margins.pptx</a:t>
             </a:r>
@@ -8771,13 +9225,17 @@
           </a:bodyPr>
           <a:lstStyle/>
           <a:p>
-            <a:pPr algn="ctr"/>
+            <a:pPr algn="ctr">
+              <a:defRPr>
+                <a:latin typeface="Roboto"/>
+              </a:defRPr>
+            </a:pPr>
             <a:r>
               <a:rPr sz="900" b="0">
                 <a:solidFill>
                   <a:srgbClr val="5F6F63"/>
                 </a:solidFill>
-                <a:latin typeface="Arial"/>
+                <a:latin typeface="Roboto"/>
               </a:rPr>
               <a:t>Data retrieved 2pm, Tue 6 Oct 2026 · Sample data</a:t>
             </a:r>
@@ -8806,13 +9264,17 @@
           </a:bodyPr>
           <a:lstStyle/>
           <a:p>
-            <a:pPr algn="r"/>
+            <a:pPr algn="r">
+              <a:defRPr>
+                <a:latin typeface="Roboto"/>
+              </a:defRPr>
+            </a:pPr>
             <a:r>
               <a:rPr sz="900" b="0">
                 <a:solidFill>
                   <a:srgbClr val="5F6F63"/>
                 </a:solidFill>
-                <a:latin typeface="Arial"/>
+                <a:latin typeface="Roboto"/>
               </a:rPr>
               <a:t>Slide 17 of 21</a:t>
             </a:r>
@@ -8876,7 +9338,11 @@
           <a:bodyPr rtlCol="0" anchor="ctr"/>
           <a:lstStyle/>
           <a:p>
-            <a:pPr algn="ctr"/>
+            <a:pPr algn="ctr">
+              <a:defRPr>
+                <a:latin typeface="Roboto"/>
+              </a:defRPr>
+            </a:pPr>
           </a:p>
         </p:txBody>
       </p:sp>
@@ -8902,12 +9368,17 @@
           </a:bodyPr>
           <a:lstStyle/>
           <a:p>
+            <a:pPr>
+              <a:defRPr>
+                <a:latin typeface="Roboto"/>
+              </a:defRPr>
+            </a:pPr>
             <a:r>
               <a:rPr sz="1000" b="0">
                 <a:solidFill>
                   <a:srgbClr val="5F6F63"/>
                 </a:solidFill>
-                <a:latin typeface="Arial"/>
+                <a:latin typeface="Roboto"/>
               </a:rPr>
               <a:t>Sample Electrical &amp; Air Pty Ltd · Which jobs actually make money?</a:t>
             </a:r>
@@ -8936,12 +9407,17 @@
           </a:bodyPr>
           <a:lstStyle/>
           <a:p>
+            <a:pPr>
+              <a:defRPr>
+                <a:latin typeface="Roboto"/>
+              </a:defRPr>
+            </a:pPr>
             <a:r>
               <a:rPr sz="2400" b="1">
                 <a:solidFill>
                   <a:srgbClr val="25342A"/>
                 </a:solidFill>
-                <a:latin typeface="Arial"/>
+                <a:latin typeface="Roboto"/>
               </a:rPr>
               <a:t>Job gross margin on call-outs by length, October 2025 · Gross margin $ · Type of job: Call-outs and repairs</a:t>
             </a:r>
@@ -8970,12 +9446,17 @@
           </a:bodyPr>
           <a:lstStyle/>
           <a:p>
+            <a:pPr>
+              <a:defRPr>
+                <a:latin typeface="Roboto"/>
+              </a:defRPr>
+            </a:pPr>
             <a:r>
               <a:rPr sz="1200" b="0">
                 <a:solidFill>
                   <a:srgbClr val="5F6F63"/>
                 </a:solidFill>
-                <a:latin typeface="Arial"/>
+                <a:latin typeface="Roboto"/>
               </a:rPr>
               <a:t>Charged at $145/hour plus materials at cost × 1.3; technician time at $68/hour.</a:t>
             </a:r>
@@ -9022,12 +9503,17 @@
           </a:bodyPr>
           <a:lstStyle/>
           <a:p>
+            <a:pPr>
+              <a:defRPr>
+                <a:latin typeface="Roboto"/>
+              </a:defRPr>
+            </a:pPr>
             <a:r>
               <a:rPr sz="900" b="0">
                 <a:solidFill>
                   <a:srgbClr val="5F6F63"/>
                 </a:solidFill>
-                <a:latin typeface="Arial"/>
+                <a:latin typeface="Roboto"/>
               </a:rPr>
               <a:t>job-margins.pptx</a:t>
             </a:r>
@@ -9056,13 +9542,17 @@
           </a:bodyPr>
           <a:lstStyle/>
           <a:p>
-            <a:pPr algn="ctr"/>
+            <a:pPr algn="ctr">
+              <a:defRPr>
+                <a:latin typeface="Roboto"/>
+              </a:defRPr>
+            </a:pPr>
             <a:r>
               <a:rPr sz="900" b="0">
                 <a:solidFill>
                   <a:srgbClr val="5F6F63"/>
                 </a:solidFill>
-                <a:latin typeface="Arial"/>
+                <a:latin typeface="Roboto"/>
               </a:rPr>
               <a:t>Data retrieved 2pm, Tue 6 Oct 2026 · Sample data</a:t>
             </a:r>
@@ -9091,13 +9581,17 @@
           </a:bodyPr>
           <a:lstStyle/>
           <a:p>
-            <a:pPr algn="r"/>
+            <a:pPr algn="r">
+              <a:defRPr>
+                <a:latin typeface="Roboto"/>
+              </a:defRPr>
+            </a:pPr>
             <a:r>
               <a:rPr sz="900" b="0">
                 <a:solidFill>
                   <a:srgbClr val="5F6F63"/>
                 </a:solidFill>
-                <a:latin typeface="Arial"/>
+                <a:latin typeface="Roboto"/>
               </a:rPr>
               <a:t>Slide 18 of 21</a:t>
             </a:r>
@@ -9161,7 +9655,11 @@
           <a:bodyPr rtlCol="0" anchor="ctr"/>
           <a:lstStyle/>
           <a:p>
-            <a:pPr algn="ctr"/>
+            <a:pPr algn="ctr">
+              <a:defRPr>
+                <a:latin typeface="Roboto"/>
+              </a:defRPr>
+            </a:pPr>
           </a:p>
         </p:txBody>
       </p:sp>
@@ -9187,12 +9685,17 @@
           </a:bodyPr>
           <a:lstStyle/>
           <a:p>
+            <a:pPr>
+              <a:defRPr>
+                <a:latin typeface="Roboto"/>
+              </a:defRPr>
+            </a:pPr>
             <a:r>
               <a:rPr sz="1000" b="0">
                 <a:solidFill>
                   <a:srgbClr val="5F6F63"/>
                 </a:solidFill>
-                <a:latin typeface="Arial"/>
+                <a:latin typeface="Roboto"/>
               </a:rPr>
               <a:t>Sample Electrical &amp; Air Pty Ltd · Which jobs actually make money?</a:t>
             </a:r>
@@ -9221,12 +9724,17 @@
           </a:bodyPr>
           <a:lstStyle/>
           <a:p>
+            <a:pPr>
+              <a:defRPr>
+                <a:latin typeface="Roboto"/>
+              </a:defRPr>
+            </a:pPr>
             <a:r>
               <a:rPr sz="2400" b="1">
                 <a:solidFill>
                   <a:srgbClr val="25342A"/>
                 </a:solidFill>
-                <a:latin typeface="Arial"/>
+                <a:latin typeface="Roboto"/>
               </a:rPr>
               <a:t>What it shows · Type of job: Call-outs and repairs</a:t>
             </a:r>
@@ -9274,7 +9782,11 @@
           <a:bodyPr rtlCol="0" anchor="ctr"/>
           <a:lstStyle/>
           <a:p>
-            <a:pPr algn="ctr"/>
+            <a:pPr algn="ctr">
+              <a:defRPr>
+                <a:latin typeface="Roboto"/>
+              </a:defRPr>
+            </a:pPr>
           </a:p>
         </p:txBody>
       </p:sp>
@@ -9300,12 +9812,17 @@
           </a:bodyPr>
           <a:lstStyle/>
           <a:p>
+            <a:pPr>
+              <a:defRPr>
+                <a:latin typeface="Roboto"/>
+              </a:defRPr>
+            </a:pPr>
             <a:r>
               <a:rPr sz="1100" b="1">
                 <a:solidFill>
                   <a:srgbClr val="5F6F63"/>
                 </a:solidFill>
-                <a:latin typeface="Arial"/>
+                <a:latin typeface="Roboto"/>
               </a:rPr>
               <a:t>WHAT IT SHOWS</a:t>
             </a:r>
@@ -9334,12 +9851,17 @@
           </a:bodyPr>
           <a:lstStyle/>
           <a:p>
+            <a:pPr>
+              <a:defRPr>
+                <a:latin typeface="Roboto"/>
+              </a:defRPr>
+            </a:pPr>
             <a:r>
               <a:rPr sz="1600" b="0">
                 <a:solidFill>
                   <a:srgbClr val="25342A"/>
                 </a:solidFill>
-                <a:latin typeface="Arial"/>
+                <a:latin typeface="Roboto"/>
               </a:rPr>
               <a:t>43 call-outs in October billed $15,005 of technician time and $7,293 of materials ($5,610 at cost plus 30%), and made a 43.3% job gross margin between them. Gross margins run from 37.8% to 45.9% by length: the hourly rate covers technician time comfortably, so the gross margin mostly moves with how much material goes on the van.</a:t>
             </a:r>
@@ -9387,7 +9909,11 @@
           <a:bodyPr rtlCol="0" anchor="ctr"/>
           <a:lstStyle/>
           <a:p>
-            <a:pPr algn="ctr"/>
+            <a:pPr algn="ctr">
+              <a:defRPr>
+                <a:latin typeface="Roboto"/>
+              </a:defRPr>
+            </a:pPr>
           </a:p>
         </p:txBody>
       </p:sp>
@@ -9413,12 +9939,17 @@
           </a:bodyPr>
           <a:lstStyle/>
           <a:p>
+            <a:pPr>
+              <a:defRPr>
+                <a:latin typeface="Roboto"/>
+              </a:defRPr>
+            </a:pPr>
             <a:r>
               <a:rPr sz="1100" b="1">
                 <a:solidFill>
                   <a:srgbClr val="5F6F63"/>
                 </a:solidFill>
-                <a:latin typeface="Arial"/>
+                <a:latin typeface="Roboto"/>
               </a:rPr>
               <a:t>WHAT YOU'D DO ABOUT IT</a:t>
             </a:r>
@@ -9447,12 +9978,17 @@
           </a:bodyPr>
           <a:lstStyle/>
           <a:p>
+            <a:pPr>
+              <a:defRPr>
+                <a:latin typeface="Roboto"/>
+              </a:defRPr>
+            </a:pPr>
             <a:r>
               <a:rPr sz="1600" b="0">
                 <a:solidFill>
                   <a:srgbClr val="25342A"/>
                 </a:solidFill>
-                <a:latin typeface="Arial"/>
+                <a:latin typeface="Roboto"/>
               </a:rPr>
               <a:t>Call-outs: 43.3% gross margin, below the 52.5% needed to cover overheads.</a:t>
             </a:r>
@@ -9481,12 +10017,17 @@
           </a:bodyPr>
           <a:lstStyle/>
           <a:p>
+            <a:pPr>
+              <a:defRPr>
+                <a:latin typeface="Roboto"/>
+              </a:defRPr>
+            </a:pPr>
             <a:r>
               <a:rPr sz="900" b="0">
                 <a:solidFill>
                   <a:srgbClr val="5F6F63"/>
                 </a:solidFill>
-                <a:latin typeface="Arial"/>
+                <a:latin typeface="Roboto"/>
               </a:rPr>
               <a:t>job-margins.pptx</a:t>
             </a:r>
@@ -9515,13 +10056,17 @@
           </a:bodyPr>
           <a:lstStyle/>
           <a:p>
-            <a:pPr algn="ctr"/>
+            <a:pPr algn="ctr">
+              <a:defRPr>
+                <a:latin typeface="Roboto"/>
+              </a:defRPr>
+            </a:pPr>
             <a:r>
               <a:rPr sz="900" b="0">
                 <a:solidFill>
                   <a:srgbClr val="5F6F63"/>
                 </a:solidFill>
-                <a:latin typeface="Arial"/>
+                <a:latin typeface="Roboto"/>
               </a:rPr>
               <a:t>Data retrieved 2pm, Tue 6 Oct 2026 · Sample data</a:t>
             </a:r>
@@ -9550,13 +10095,17 @@
           </a:bodyPr>
           <a:lstStyle/>
           <a:p>
-            <a:pPr algn="r"/>
+            <a:pPr algn="r">
+              <a:defRPr>
+                <a:latin typeface="Roboto"/>
+              </a:defRPr>
+            </a:pPr>
             <a:r>
               <a:rPr sz="900" b="0">
                 <a:solidFill>
                   <a:srgbClr val="5F6F63"/>
                 </a:solidFill>
-                <a:latin typeface="Arial"/>
+                <a:latin typeface="Roboto"/>
               </a:rPr>
               <a:t>Slide 19 of 21</a:t>
             </a:r>
@@ -9620,7 +10169,11 @@
           <a:bodyPr rtlCol="0" anchor="ctr"/>
           <a:lstStyle/>
           <a:p>
-            <a:pPr algn="ctr"/>
+            <a:pPr algn="ctr">
+              <a:defRPr>
+                <a:latin typeface="Roboto"/>
+              </a:defRPr>
+            </a:pPr>
           </a:p>
         </p:txBody>
       </p:sp>
@@ -9646,12 +10199,17 @@
           </a:bodyPr>
           <a:lstStyle/>
           <a:p>
+            <a:pPr>
+              <a:defRPr>
+                <a:latin typeface="Roboto"/>
+              </a:defRPr>
+            </a:pPr>
             <a:r>
               <a:rPr sz="1000" b="0">
                 <a:solidFill>
                   <a:srgbClr val="5F6F63"/>
                 </a:solidFill>
-                <a:latin typeface="Arial"/>
+                <a:latin typeface="Roboto"/>
               </a:rPr>
               <a:t>Sample Electrical &amp; Air Pty Ltd · Which jobs actually make money?</a:t>
             </a:r>
@@ -9680,12 +10238,17 @@
           </a:bodyPr>
           <a:lstStyle/>
           <a:p>
+            <a:pPr>
+              <a:defRPr>
+                <a:latin typeface="Roboto"/>
+              </a:defRPr>
+            </a:pPr>
             <a:r>
               <a:rPr sz="2400" b="1">
                 <a:solidFill>
                   <a:srgbClr val="25342A"/>
                 </a:solidFill>
-                <a:latin typeface="Arial"/>
+                <a:latin typeface="Roboto"/>
               </a:rPr>
               <a:t>Gross margin, not profit</a:t>
             </a:r>
@@ -9733,7 +10296,11 @@
           <a:bodyPr rtlCol="0" anchor="ctr"/>
           <a:lstStyle/>
           <a:p>
-            <a:pPr algn="ctr"/>
+            <a:pPr algn="ctr">
+              <a:defRPr>
+                <a:latin typeface="Roboto"/>
+              </a:defRPr>
+            </a:pPr>
           </a:p>
         </p:txBody>
       </p:sp>
@@ -9759,12 +10326,17 @@
           </a:bodyPr>
           <a:lstStyle/>
           <a:p>
+            <a:pPr>
+              <a:defRPr>
+                <a:latin typeface="Roboto"/>
+              </a:defRPr>
+            </a:pPr>
             <a:r>
               <a:rPr sz="1100" b="1">
                 <a:solidFill>
                   <a:srgbClr val="5F6F63"/>
                 </a:solidFill>
-                <a:latin typeface="Arial"/>
+                <a:latin typeface="Roboto"/>
               </a:rPr>
               <a:t>GROSS MARGIN, NOT PROFIT</a:t>
             </a:r>
@@ -9793,12 +10365,17 @@
           </a:bodyPr>
           <a:lstStyle/>
           <a:p>
+            <a:pPr>
+              <a:defRPr>
+                <a:latin typeface="Roboto"/>
+              </a:defRPr>
+            </a:pPr>
             <a:r>
               <a:rPr sz="1600" b="0">
                 <a:solidFill>
                   <a:srgbClr val="25342A"/>
                 </a:solidFill>
-                <a:latin typeface="Arial"/>
+                <a:latin typeface="Roboto"/>
               </a:rPr>
               <a:t>Gross margin is not profit. Job gross margin = revenue less materials, subcontractors and technician time charged to the job at $68 an hour (wages and all on-costs). Not included: technician time not charged to any job (travel, training, waiting), and overheads (office wages, marketing, vehicles, rent, insurance, IT, depreciation, interest). Profit is what's left after those. Wages always include all on-costs: super, payroll tax, workers' compensation insurance and leave.</a:t>
             </a:r>
@@ -9827,12 +10404,17 @@
           </a:bodyPr>
           <a:lstStyle/>
           <a:p>
+            <a:pPr>
+              <a:defRPr>
+                <a:latin typeface="Roboto"/>
+              </a:defRPr>
+            </a:pPr>
             <a:r>
               <a:rPr sz="900" b="0">
                 <a:solidFill>
                   <a:srgbClr val="5F6F63"/>
                 </a:solidFill>
-                <a:latin typeface="Arial"/>
+                <a:latin typeface="Roboto"/>
               </a:rPr>
               <a:t>job-margins.pptx</a:t>
             </a:r>
@@ -9861,13 +10443,17 @@
           </a:bodyPr>
           <a:lstStyle/>
           <a:p>
-            <a:pPr algn="ctr"/>
+            <a:pPr algn="ctr">
+              <a:defRPr>
+                <a:latin typeface="Roboto"/>
+              </a:defRPr>
+            </a:pPr>
             <a:r>
               <a:rPr sz="900" b="0">
                 <a:solidFill>
                   <a:srgbClr val="5F6F63"/>
                 </a:solidFill>
-                <a:latin typeface="Arial"/>
+                <a:latin typeface="Roboto"/>
               </a:rPr>
               <a:t>Data retrieved 2pm, Tue 6 Oct 2026 · Sample data</a:t>
             </a:r>
@@ -9896,13 +10482,17 @@
           </a:bodyPr>
           <a:lstStyle/>
           <a:p>
-            <a:pPr algn="r"/>
+            <a:pPr algn="r">
+              <a:defRPr>
+                <a:latin typeface="Roboto"/>
+              </a:defRPr>
+            </a:pPr>
             <a:r>
               <a:rPr sz="900" b="0">
                 <a:solidFill>
                   <a:srgbClr val="5F6F63"/>
                 </a:solidFill>
-                <a:latin typeface="Arial"/>
+                <a:latin typeface="Roboto"/>
               </a:rPr>
               <a:t>Slide 2 of 21</a:t>
             </a:r>
@@ -9966,7 +10556,11 @@
           <a:bodyPr rtlCol="0" anchor="ctr"/>
           <a:lstStyle/>
           <a:p>
-            <a:pPr algn="ctr"/>
+            <a:pPr algn="ctr">
+              <a:defRPr>
+                <a:latin typeface="Roboto"/>
+              </a:defRPr>
+            </a:pPr>
           </a:p>
         </p:txBody>
       </p:sp>
@@ -9992,12 +10586,17 @@
           </a:bodyPr>
           <a:lstStyle/>
           <a:p>
+            <a:pPr>
+              <a:defRPr>
+                <a:latin typeface="Roboto"/>
+              </a:defRPr>
+            </a:pPr>
             <a:r>
               <a:rPr sz="1000" b="0">
                 <a:solidFill>
                   <a:srgbClr val="5F6F63"/>
                 </a:solidFill>
-                <a:latin typeface="Arial"/>
+                <a:latin typeface="Roboto"/>
               </a:rPr>
               <a:t>Sample Electrical &amp; Air Pty Ltd · Which jobs actually make money?</a:t>
             </a:r>
@@ -10026,12 +10625,17 @@
           </a:bodyPr>
           <a:lstStyle/>
           <a:p>
+            <a:pPr>
+              <a:defRPr>
+                <a:latin typeface="Roboto"/>
+              </a:defRPr>
+            </a:pPr>
             <a:r>
               <a:rPr sz="2400" b="1">
                 <a:solidFill>
                   <a:srgbClr val="25342A"/>
                 </a:solidFill>
-                <a:latin typeface="Arial"/>
+                <a:latin typeface="Roboto"/>
               </a:rPr>
               <a:t>Job gross margin by month · Gross margin % · Every type of job at once</a:t>
             </a:r>
@@ -10060,12 +10664,17 @@
           </a:bodyPr>
           <a:lstStyle/>
           <a:p>
+            <a:pPr>
+              <a:defRPr>
+                <a:latin typeface="Roboto"/>
+              </a:defRPr>
+            </a:pPr>
             <a:r>
               <a:rPr sz="1200" b="0">
                 <a:solidFill>
                   <a:srgbClr val="5F6F63"/>
                 </a:solidFill>
-                <a:latin typeface="Arial"/>
+                <a:latin typeface="Roboto"/>
               </a:rPr>
               <a:t>Tap a month for its workings.</a:t>
             </a:r>
@@ -10112,12 +10721,17 @@
           </a:bodyPr>
           <a:lstStyle/>
           <a:p>
+            <a:pPr>
+              <a:defRPr>
+                <a:latin typeface="Roboto"/>
+              </a:defRPr>
+            </a:pPr>
             <a:r>
               <a:rPr sz="900" b="0">
                 <a:solidFill>
                   <a:srgbClr val="5F6F63"/>
                 </a:solidFill>
-                <a:latin typeface="Arial"/>
+                <a:latin typeface="Roboto"/>
               </a:rPr>
               <a:t>job-margins.pptx</a:t>
             </a:r>
@@ -10146,13 +10760,17 @@
           </a:bodyPr>
           <a:lstStyle/>
           <a:p>
-            <a:pPr algn="ctr"/>
+            <a:pPr algn="ctr">
+              <a:defRPr>
+                <a:latin typeface="Roboto"/>
+              </a:defRPr>
+            </a:pPr>
             <a:r>
               <a:rPr sz="900" b="0">
                 <a:solidFill>
                   <a:srgbClr val="5F6F63"/>
                 </a:solidFill>
-                <a:latin typeface="Arial"/>
+                <a:latin typeface="Roboto"/>
               </a:rPr>
               <a:t>Data retrieved 2pm, Tue 6 Oct 2026 · Sample data</a:t>
             </a:r>
@@ -10181,13 +10799,17 @@
           </a:bodyPr>
           <a:lstStyle/>
           <a:p>
-            <a:pPr algn="r"/>
+            <a:pPr algn="r">
+              <a:defRPr>
+                <a:latin typeface="Roboto"/>
+              </a:defRPr>
+            </a:pPr>
             <a:r>
               <a:rPr sz="900" b="0">
                 <a:solidFill>
                   <a:srgbClr val="5F6F63"/>
                 </a:solidFill>
-                <a:latin typeface="Arial"/>
+                <a:latin typeface="Roboto"/>
               </a:rPr>
               <a:t>Slide 20 of 21</a:t>
             </a:r>
@@ -10251,7 +10873,11 @@
           <a:bodyPr rtlCol="0" anchor="ctr"/>
           <a:lstStyle/>
           <a:p>
-            <a:pPr algn="ctr"/>
+            <a:pPr algn="ctr">
+              <a:defRPr>
+                <a:latin typeface="Roboto"/>
+              </a:defRPr>
+            </a:pPr>
           </a:p>
         </p:txBody>
       </p:sp>
@@ -10277,12 +10903,17 @@
           </a:bodyPr>
           <a:lstStyle/>
           <a:p>
+            <a:pPr>
+              <a:defRPr>
+                <a:latin typeface="Roboto"/>
+              </a:defRPr>
+            </a:pPr>
             <a:r>
               <a:rPr sz="1000" b="0">
                 <a:solidFill>
                   <a:srgbClr val="5F6F63"/>
                 </a:solidFill>
-                <a:latin typeface="Arial"/>
+                <a:latin typeface="Roboto"/>
               </a:rPr>
               <a:t>Sample Electrical &amp; Air Pty Ltd · Which jobs actually make money?</a:t>
             </a:r>
@@ -10311,12 +10942,17 @@
           </a:bodyPr>
           <a:lstStyle/>
           <a:p>
+            <a:pPr>
+              <a:defRPr>
+                <a:latin typeface="Roboto"/>
+              </a:defRPr>
+            </a:pPr>
             <a:r>
               <a:rPr sz="2400" b="1">
                 <a:solidFill>
                   <a:srgbClr val="25342A"/>
                 </a:solidFill>
-                <a:latin typeface="Arial"/>
+                <a:latin typeface="Roboto"/>
               </a:rPr>
               <a:t>Job gross margin by month · Gross margin $ · Every type of job at once</a:t>
             </a:r>
@@ -10345,12 +10981,17 @@
           </a:bodyPr>
           <a:lstStyle/>
           <a:p>
+            <a:pPr>
+              <a:defRPr>
+                <a:latin typeface="Roboto"/>
+              </a:defRPr>
+            </a:pPr>
             <a:r>
               <a:rPr sz="1200" b="0">
                 <a:solidFill>
                   <a:srgbClr val="5F6F63"/>
                 </a:solidFill>
-                <a:latin typeface="Arial"/>
+                <a:latin typeface="Roboto"/>
               </a:rPr>
               <a:t>Tap a month for its workings.</a:t>
             </a:r>
@@ -10397,12 +11038,17 @@
           </a:bodyPr>
           <a:lstStyle/>
           <a:p>
+            <a:pPr>
+              <a:defRPr>
+                <a:latin typeface="Roboto"/>
+              </a:defRPr>
+            </a:pPr>
             <a:r>
               <a:rPr sz="900" b="0">
                 <a:solidFill>
                   <a:srgbClr val="5F6F63"/>
                 </a:solidFill>
-                <a:latin typeface="Arial"/>
+                <a:latin typeface="Roboto"/>
               </a:rPr>
               <a:t>job-margins.pptx</a:t>
             </a:r>
@@ -10431,13 +11077,17 @@
           </a:bodyPr>
           <a:lstStyle/>
           <a:p>
-            <a:pPr algn="ctr"/>
+            <a:pPr algn="ctr">
+              <a:defRPr>
+                <a:latin typeface="Roboto"/>
+              </a:defRPr>
+            </a:pPr>
             <a:r>
               <a:rPr sz="900" b="0">
                 <a:solidFill>
                   <a:srgbClr val="5F6F63"/>
                 </a:solidFill>
-                <a:latin typeface="Arial"/>
+                <a:latin typeface="Roboto"/>
               </a:rPr>
               <a:t>Data retrieved 2pm, Tue 6 Oct 2026 · Sample data</a:t>
             </a:r>
@@ -10466,13 +11116,17 @@
           </a:bodyPr>
           <a:lstStyle/>
           <a:p>
-            <a:pPr algn="r"/>
+            <a:pPr algn="r">
+              <a:defRPr>
+                <a:latin typeface="Roboto"/>
+              </a:defRPr>
+            </a:pPr>
             <a:r>
               <a:rPr sz="900" b="0">
                 <a:solidFill>
                   <a:srgbClr val="5F6F63"/>
                 </a:solidFill>
-                <a:latin typeface="Arial"/>
+                <a:latin typeface="Roboto"/>
               </a:rPr>
               <a:t>Slide 21 of 21</a:t>
             </a:r>
@@ -10536,7 +11190,11 @@
           <a:bodyPr rtlCol="0" anchor="ctr"/>
           <a:lstStyle/>
           <a:p>
-            <a:pPr algn="ctr"/>
+            <a:pPr algn="ctr">
+              <a:defRPr>
+                <a:latin typeface="Roboto"/>
+              </a:defRPr>
+            </a:pPr>
           </a:p>
         </p:txBody>
       </p:sp>
@@ -10562,12 +11220,17 @@
           </a:bodyPr>
           <a:lstStyle/>
           <a:p>
+            <a:pPr>
+              <a:defRPr>
+                <a:latin typeface="Roboto"/>
+              </a:defRPr>
+            </a:pPr>
             <a:r>
               <a:rPr sz="1000" b="0">
                 <a:solidFill>
                   <a:srgbClr val="5F6F63"/>
                 </a:solidFill>
-                <a:latin typeface="Arial"/>
+                <a:latin typeface="Roboto"/>
               </a:rPr>
               <a:t>Sample Electrical &amp; Air Pty Ltd · Which jobs actually make money?</a:t>
             </a:r>
@@ -10596,12 +11259,17 @@
           </a:bodyPr>
           <a:lstStyle/>
           <a:p>
+            <a:pPr>
+              <a:defRPr>
+                <a:latin typeface="Roboto"/>
+              </a:defRPr>
+            </a:pPr>
             <a:r>
               <a:rPr sz="2400" b="1">
                 <a:solidFill>
                   <a:srgbClr val="25342A"/>
                 </a:solidFill>
-                <a:latin typeface="Arial"/>
+                <a:latin typeface="Roboto"/>
               </a:rPr>
               <a:t>From gross margin to profit</a:t>
             </a:r>
@@ -10630,12 +11298,17 @@
           </a:bodyPr>
           <a:lstStyle/>
           <a:p>
+            <a:pPr>
+              <a:defRPr>
+                <a:latin typeface="Roboto"/>
+              </a:defRPr>
+            </a:pPr>
             <a:r>
               <a:rPr sz="1200" b="0">
                 <a:solidFill>
                   <a:srgbClr val="5F6F63"/>
                 </a:solidFill>
-                <a:latin typeface="Arial"/>
+                <a:latin typeface="Roboto"/>
               </a:rPr>
               <a:t>October's jobs made $49,446 gross margin (38.4%). Technician time not charged to jobs took $9,638 and overheads $57,980, leaving ($18,172) profit before tax ((14.1%) of revenue). To cover overheads, jobs need a 52.5% gross margin on average.</a:t>
             </a:r>
@@ -10669,7 +11342,13 @@
                   <a:txBody>
                     <a:bodyPr/>
                     <a:lstStyle/>
-                    <a:p/>
+                    <a:p>
+                      <a:pPr>
+                        <a:defRPr>
+                          <a:latin typeface="Roboto"/>
+                        </a:defRPr>
+                      </a:pPr>
+                    </a:p>
                   </a:txBody>
                   <a:tcPr>
                     <a:solidFill>
@@ -10682,12 +11361,17 @@
                     <a:bodyPr/>
                     <a:lstStyle/>
                     <a:p>
-                      <a:pPr algn="r"/>
+                      <a:pPr algn="r">
+                        <a:defRPr>
+                          <a:latin typeface="Roboto"/>
+                        </a:defRPr>
+                      </a:pPr>
                       <a:r>
                         <a:rPr sz="1100" b="1">
                           <a:solidFill>
                             <a:srgbClr val="FFFFFF"/>
                           </a:solidFill>
+                          <a:latin typeface="Roboto"/>
                         </a:rPr>
                         <a:t>October 2025</a:t>
                       </a:r>
@@ -10706,11 +11390,17 @@
                     <a:bodyPr/>
                     <a:lstStyle/>
                     <a:p>
+                      <a:pPr>
+                        <a:defRPr>
+                          <a:latin typeface="Roboto"/>
+                        </a:defRPr>
+                      </a:pPr>
                       <a:r>
                         <a:rPr sz="1050">
                           <a:solidFill>
                             <a:srgbClr val="25342A"/>
                           </a:solidFill>
+                          <a:latin typeface="Roboto"/>
                         </a:rPr>
                         <a:t>Gross margin on jobs</a:t>
                       </a:r>
@@ -10727,12 +11417,17 @@
                     <a:bodyPr/>
                     <a:lstStyle/>
                     <a:p>
-                      <a:pPr algn="r"/>
+                      <a:pPr algn="r">
+                        <a:defRPr>
+                          <a:latin typeface="Roboto"/>
+                        </a:defRPr>
+                      </a:pPr>
                       <a:r>
                         <a:rPr sz="1050">
                           <a:solidFill>
                             <a:srgbClr val="25342A"/>
                           </a:solidFill>
+                          <a:latin typeface="Roboto"/>
                         </a:rPr>
                         <a:t>$49,446</a:t>
                       </a:r>
@@ -10751,11 +11446,17 @@
                     <a:bodyPr/>
                     <a:lstStyle/>
                     <a:p>
+                      <a:pPr>
+                        <a:defRPr>
+                          <a:latin typeface="Roboto"/>
+                        </a:defRPr>
+                      </a:pPr>
                       <a:r>
                         <a:rPr sz="1050">
                           <a:solidFill>
                             <a:srgbClr val="25342A"/>
                           </a:solidFill>
+                          <a:latin typeface="Roboto"/>
                         </a:rPr>
                         <a:t>Technician wages and on-costs</a:t>
                       </a:r>
@@ -10772,12 +11473,17 @@
                     <a:bodyPr/>
                     <a:lstStyle/>
                     <a:p>
-                      <a:pPr algn="r"/>
+                      <a:pPr algn="r">
+                        <a:defRPr>
+                          <a:latin typeface="Roboto"/>
+                        </a:defRPr>
+                      </a:pPr>
                       <a:r>
                         <a:rPr sz="1050">
                           <a:solidFill>
                             <a:srgbClr val="25342A"/>
                           </a:solidFill>
+                          <a:latin typeface="Roboto"/>
                         </a:rPr>
                         <a:t>$46,800</a:t>
                       </a:r>
@@ -10796,11 +11502,17 @@
                     <a:bodyPr/>
                     <a:lstStyle/>
                     <a:p>
+                      <a:pPr>
+                        <a:defRPr>
+                          <a:latin typeface="Roboto"/>
+                        </a:defRPr>
+                      </a:pPr>
                       <a:r>
                         <a:rPr sz="1050">
                           <a:solidFill>
                             <a:srgbClr val="25342A"/>
                           </a:solidFill>
+                          <a:latin typeface="Roboto"/>
                         </a:rPr>
                         <a:t>Technician time charged to jobs (at cost)</a:t>
                       </a:r>
@@ -10817,12 +11529,17 @@
                     <a:bodyPr/>
                     <a:lstStyle/>
                     <a:p>
-                      <a:pPr algn="r"/>
+                      <a:pPr algn="r">
+                        <a:defRPr>
+                          <a:latin typeface="Roboto"/>
+                        </a:defRPr>
+                      </a:pPr>
                       <a:r>
                         <a:rPr sz="1050">
                           <a:solidFill>
                             <a:srgbClr val="25342A"/>
                           </a:solidFill>
+                          <a:latin typeface="Roboto"/>
                         </a:rPr>
                         <a:t>$37,162</a:t>
                       </a:r>
@@ -10841,11 +11558,17 @@
                     <a:bodyPr/>
                     <a:lstStyle/>
                     <a:p>
+                      <a:pPr>
+                        <a:defRPr>
+                          <a:latin typeface="Roboto"/>
+                        </a:defRPr>
+                      </a:pPr>
                       <a:r>
                         <a:rPr sz="1050">
                           <a:solidFill>
                             <a:srgbClr val="25342A"/>
                           </a:solidFill>
+                          <a:latin typeface="Roboto"/>
                         </a:rPr>
                         <a:t>Technician time not charged to jobs</a:t>
                       </a:r>
@@ -10862,12 +11585,17 @@
                     <a:bodyPr/>
                     <a:lstStyle/>
                     <a:p>
-                      <a:pPr algn="r"/>
+                      <a:pPr algn="r">
+                        <a:defRPr>
+                          <a:latin typeface="Roboto"/>
+                        </a:defRPr>
+                      </a:pPr>
                       <a:r>
                         <a:rPr sz="1050">
                           <a:solidFill>
                             <a:srgbClr val="25342A"/>
                           </a:solidFill>
+                          <a:latin typeface="Roboto"/>
                         </a:rPr>
                         <a:t>$9,638</a:t>
                       </a:r>
@@ -10886,11 +11614,17 @@
                     <a:bodyPr/>
                     <a:lstStyle/>
                     <a:p>
+                      <a:pPr>
+                        <a:defRPr>
+                          <a:latin typeface="Roboto"/>
+                        </a:defRPr>
+                      </a:pPr>
                       <a:r>
                         <a:rPr sz="1050">
                           <a:solidFill>
                             <a:srgbClr val="25342A"/>
                           </a:solidFill>
+                          <a:latin typeface="Roboto"/>
                         </a:rPr>
                         <a:t>Gross profit (the P&amp;L)</a:t>
                       </a:r>
@@ -10907,12 +11641,17 @@
                     <a:bodyPr/>
                     <a:lstStyle/>
                     <a:p>
-                      <a:pPr algn="r"/>
+                      <a:pPr algn="r">
+                        <a:defRPr>
+                          <a:latin typeface="Roboto"/>
+                        </a:defRPr>
+                      </a:pPr>
                       <a:r>
                         <a:rPr sz="1050">
                           <a:solidFill>
                             <a:srgbClr val="25342A"/>
                           </a:solidFill>
+                          <a:latin typeface="Roboto"/>
                         </a:rPr>
                         <a:t>$39,808</a:t>
                       </a:r>
@@ -10931,11 +11670,17 @@
                     <a:bodyPr/>
                     <a:lstStyle/>
                     <a:p>
+                      <a:pPr>
+                        <a:defRPr>
+                          <a:latin typeface="Roboto"/>
+                        </a:defRPr>
+                      </a:pPr>
                       <a:r>
                         <a:rPr sz="1050">
                           <a:solidFill>
                             <a:srgbClr val="25342A"/>
                           </a:solidFill>
+                          <a:latin typeface="Roboto"/>
                         </a:rPr>
                         <a:t>Overheads (operating expenses, depreciation, interest)</a:t>
                       </a:r>
@@ -10952,12 +11697,17 @@
                     <a:bodyPr/>
                     <a:lstStyle/>
                     <a:p>
-                      <a:pPr algn="r"/>
+                      <a:pPr algn="r">
+                        <a:defRPr>
+                          <a:latin typeface="Roboto"/>
+                        </a:defRPr>
+                      </a:pPr>
                       <a:r>
                         <a:rPr sz="1050">
                           <a:solidFill>
                             <a:srgbClr val="25342A"/>
                           </a:solidFill>
+                          <a:latin typeface="Roboto"/>
                         </a:rPr>
                         <a:t>$57,980</a:t>
                       </a:r>
@@ -10976,11 +11726,17 @@
                     <a:bodyPr/>
                     <a:lstStyle/>
                     <a:p>
+                      <a:pPr>
+                        <a:defRPr>
+                          <a:latin typeface="Roboto"/>
+                        </a:defRPr>
+                      </a:pPr>
                       <a:r>
                         <a:rPr sz="1050">
                           <a:solidFill>
                             <a:srgbClr val="25342A"/>
                           </a:solidFill>
+                          <a:latin typeface="Roboto"/>
                         </a:rPr>
                         <a:t>Profit before tax (the P&amp;L)</a:t>
                       </a:r>
@@ -10997,12 +11753,17 @@
                     <a:bodyPr/>
                     <a:lstStyle/>
                     <a:p>
-                      <a:pPr algn="r"/>
+                      <a:pPr algn="r">
+                        <a:defRPr>
+                          <a:latin typeface="Roboto"/>
+                        </a:defRPr>
+                      </a:pPr>
                       <a:r>
                         <a:rPr sz="1050">
                           <a:solidFill>
                             <a:srgbClr val="B42318"/>
                           </a:solidFill>
+                          <a:latin typeface="Roboto"/>
                         </a:rPr>
                         <a:t>($18,172)</a:t>
                       </a:r>
@@ -11021,11 +11782,17 @@
                     <a:bodyPr/>
                     <a:lstStyle/>
                     <a:p>
+                      <a:pPr>
+                        <a:defRPr>
+                          <a:latin typeface="Roboto"/>
+                        </a:defRPr>
+                      </a:pPr>
                       <a:r>
                         <a:rPr sz="1050">
                           <a:solidFill>
                             <a:srgbClr val="25342A"/>
                           </a:solidFill>
+                          <a:latin typeface="Roboto"/>
                         </a:rPr>
                         <a:t>Revenue</a:t>
                       </a:r>
@@ -11042,12 +11809,17 @@
                     <a:bodyPr/>
                     <a:lstStyle/>
                     <a:p>
-                      <a:pPr algn="r"/>
+                      <a:pPr algn="r">
+                        <a:defRPr>
+                          <a:latin typeface="Roboto"/>
+                        </a:defRPr>
+                      </a:pPr>
                       <a:r>
                         <a:rPr sz="1050">
                           <a:solidFill>
                             <a:srgbClr val="25342A"/>
                           </a:solidFill>
+                          <a:latin typeface="Roboto"/>
                         </a:rPr>
                         <a:t>$128,898</a:t>
                       </a:r>
@@ -11066,11 +11838,17 @@
                     <a:bodyPr/>
                     <a:lstStyle/>
                     <a:p>
+                      <a:pPr>
+                        <a:defRPr>
+                          <a:latin typeface="Roboto"/>
+                        </a:defRPr>
+                      </a:pPr>
                       <a:r>
                         <a:rPr sz="1050">
                           <a:solidFill>
                             <a:srgbClr val="25342A"/>
                           </a:solidFill>
+                          <a:latin typeface="Roboto"/>
                         </a:rPr>
                         <a:t>Gross margin on jobs, %</a:t>
                       </a:r>
@@ -11087,12 +11865,17 @@
                     <a:bodyPr/>
                     <a:lstStyle/>
                     <a:p>
-                      <a:pPr algn="r"/>
+                      <a:pPr algn="r">
+                        <a:defRPr>
+                          <a:latin typeface="Roboto"/>
+                        </a:defRPr>
+                      </a:pPr>
                       <a:r>
                         <a:rPr sz="1050">
                           <a:solidFill>
                             <a:srgbClr val="25342A"/>
                           </a:solidFill>
+                          <a:latin typeface="Roboto"/>
                         </a:rPr>
                         <a:t>38.4%</a:t>
                       </a:r>
@@ -11111,11 +11894,17 @@
                     <a:bodyPr/>
                     <a:lstStyle/>
                     <a:p>
+                      <a:pPr>
+                        <a:defRPr>
+                          <a:latin typeface="Roboto"/>
+                        </a:defRPr>
+                      </a:pPr>
                       <a:r>
                         <a:rPr sz="1050">
                           <a:solidFill>
                             <a:srgbClr val="25342A"/>
                           </a:solidFill>
+                          <a:latin typeface="Roboto"/>
                         </a:rPr>
                         <a:t>Profit before tax, % of revenue</a:t>
                       </a:r>
@@ -11132,12 +11921,17 @@
                     <a:bodyPr/>
                     <a:lstStyle/>
                     <a:p>
-                      <a:pPr algn="r"/>
+                      <a:pPr algn="r">
+                        <a:defRPr>
+                          <a:latin typeface="Roboto"/>
+                        </a:defRPr>
+                      </a:pPr>
                       <a:r>
                         <a:rPr sz="1050">
                           <a:solidFill>
                             <a:srgbClr val="B42318"/>
                           </a:solidFill>
+                          <a:latin typeface="Roboto"/>
                         </a:rPr>
                         <a:t>(14.1%)</a:t>
                       </a:r>
@@ -11156,11 +11950,17 @@
                     <a:bodyPr/>
                     <a:lstStyle/>
                     <a:p>
+                      <a:pPr>
+                        <a:defRPr>
+                          <a:latin typeface="Roboto"/>
+                        </a:defRPr>
+                      </a:pPr>
                       <a:r>
                         <a:rPr sz="1050">
                           <a:solidFill>
                             <a:srgbClr val="25342A"/>
                           </a:solidFill>
+                          <a:latin typeface="Roboto"/>
                         </a:rPr>
                         <a:t>Gross margin jobs need just to cover overheads and time not charged</a:t>
                       </a:r>
@@ -11177,12 +11977,17 @@
                     <a:bodyPr/>
                     <a:lstStyle/>
                     <a:p>
-                      <a:pPr algn="r"/>
+                      <a:pPr algn="r">
+                        <a:defRPr>
+                          <a:latin typeface="Roboto"/>
+                        </a:defRPr>
+                      </a:pPr>
                       <a:r>
                         <a:rPr sz="1050">
                           <a:solidFill>
                             <a:srgbClr val="25342A"/>
                           </a:solidFill>
+                          <a:latin typeface="Roboto"/>
                         </a:rPr>
                         <a:t>52.5%</a:t>
                       </a:r>
@@ -11221,12 +12026,17 @@
           </a:bodyPr>
           <a:lstStyle/>
           <a:p>
+            <a:pPr>
+              <a:defRPr>
+                <a:latin typeface="Roboto"/>
+              </a:defRPr>
+            </a:pPr>
             <a:r>
               <a:rPr sz="900" b="0">
                 <a:solidFill>
                   <a:srgbClr val="5F6F63"/>
                 </a:solidFill>
-                <a:latin typeface="Arial"/>
+                <a:latin typeface="Roboto"/>
               </a:rPr>
               <a:t>job-margins.pptx</a:t>
             </a:r>
@@ -11255,13 +12065,17 @@
           </a:bodyPr>
           <a:lstStyle/>
           <a:p>
-            <a:pPr algn="ctr"/>
+            <a:pPr algn="ctr">
+              <a:defRPr>
+                <a:latin typeface="Roboto"/>
+              </a:defRPr>
+            </a:pPr>
             <a:r>
               <a:rPr sz="900" b="0">
                 <a:solidFill>
                   <a:srgbClr val="5F6F63"/>
                 </a:solidFill>
-                <a:latin typeface="Arial"/>
+                <a:latin typeface="Roboto"/>
               </a:rPr>
               <a:t>Data retrieved 2pm, Tue 6 Oct 2026 · Sample data</a:t>
             </a:r>
@@ -11290,13 +12104,17 @@
           </a:bodyPr>
           <a:lstStyle/>
           <a:p>
-            <a:pPr algn="r"/>
+            <a:pPr algn="r">
+              <a:defRPr>
+                <a:latin typeface="Roboto"/>
+              </a:defRPr>
+            </a:pPr>
             <a:r>
               <a:rPr sz="900" b="0">
                 <a:solidFill>
                   <a:srgbClr val="5F6F63"/>
                 </a:solidFill>
-                <a:latin typeface="Arial"/>
+                <a:latin typeface="Roboto"/>
               </a:rPr>
               <a:t>Slide 3 of 21</a:t>
             </a:r>
@@ -11360,7 +12178,11 @@
           <a:bodyPr rtlCol="0" anchor="ctr"/>
           <a:lstStyle/>
           <a:p>
-            <a:pPr algn="ctr"/>
+            <a:pPr algn="ctr">
+              <a:defRPr>
+                <a:latin typeface="Roboto"/>
+              </a:defRPr>
+            </a:pPr>
           </a:p>
         </p:txBody>
       </p:sp>
@@ -11386,12 +12208,17 @@
           </a:bodyPr>
           <a:lstStyle/>
           <a:p>
+            <a:pPr>
+              <a:defRPr>
+                <a:latin typeface="Roboto"/>
+              </a:defRPr>
+            </a:pPr>
             <a:r>
               <a:rPr sz="1000" b="0">
                 <a:solidFill>
                   <a:srgbClr val="5F6F63"/>
                 </a:solidFill>
-                <a:latin typeface="Arial"/>
+                <a:latin typeface="Roboto"/>
               </a:rPr>
               <a:t>Sample Electrical &amp; Air Pty Ltd · Which jobs actually make money?</a:t>
             </a:r>
@@ -11420,12 +12247,17 @@
           </a:bodyPr>
           <a:lstStyle/>
           <a:p>
+            <a:pPr>
+              <a:defRPr>
+                <a:latin typeface="Roboto"/>
+              </a:defRPr>
+            </a:pPr>
             <a:r>
               <a:rPr sz="2400" b="1">
                 <a:solidFill>
                   <a:srgbClr val="25342A"/>
                 </a:solidFill>
-                <a:latin typeface="Arial"/>
+                <a:latin typeface="Roboto"/>
               </a:rPr>
               <a:t>Headline numbers · Type of job: All jobs</a:t>
             </a:r>
@@ -11473,7 +12305,11 @@
           <a:bodyPr rtlCol="0" anchor="ctr"/>
           <a:lstStyle/>
           <a:p>
-            <a:pPr algn="ctr"/>
+            <a:pPr algn="ctr">
+              <a:defRPr>
+                <a:latin typeface="Roboto"/>
+              </a:defRPr>
+            </a:pPr>
           </a:p>
         </p:txBody>
       </p:sp>
@@ -11499,12 +12335,17 @@
           </a:bodyPr>
           <a:lstStyle/>
           <a:p>
+            <a:pPr>
+              <a:defRPr>
+                <a:latin typeface="Roboto"/>
+              </a:defRPr>
+            </a:pPr>
             <a:r>
               <a:rPr sz="1200" b="0">
                 <a:solidFill>
                   <a:srgbClr val="5F6F63"/>
                 </a:solidFill>
-                <a:latin typeface="Arial"/>
+                <a:latin typeface="Roboto"/>
               </a:rPr>
               <a:t>Job gross margin, October · All jobs</a:t>
             </a:r>
@@ -11533,12 +12374,17 @@
           </a:bodyPr>
           <a:lstStyle/>
           <a:p>
+            <a:pPr>
+              <a:defRPr>
+                <a:latin typeface="Roboto"/>
+              </a:defRPr>
+            </a:pPr>
             <a:r>
               <a:rPr sz="3000" b="1">
                 <a:solidFill>
                   <a:srgbClr val="2F7A5D"/>
                 </a:solidFill>
-                <a:latin typeface="Arial"/>
+                <a:latin typeface="Roboto"/>
               </a:rPr>
               <a:t>38.4%</a:t>
             </a:r>
@@ -11567,12 +12413,17 @@
           </a:bodyPr>
           <a:lstStyle/>
           <a:p>
+            <a:pPr>
+              <a:defRPr>
+                <a:latin typeface="Roboto"/>
+              </a:defRPr>
+            </a:pPr>
             <a:r>
               <a:rPr sz="1100" b="0">
                 <a:solidFill>
                   <a:srgbClr val="5F6F63"/>
                 </a:solidFill>
-                <a:latin typeface="Arial"/>
+                <a:latin typeface="Roboto"/>
               </a:rPr>
               <a:t>September 37.6%</a:t>
             </a:r>
@@ -11601,12 +12452,17 @@
           </a:bodyPr>
           <a:lstStyle/>
           <a:p>
+            <a:pPr>
+              <a:defRPr>
+                <a:latin typeface="Roboto"/>
+              </a:defRPr>
+            </a:pPr>
             <a:r>
               <a:rPr sz="900" b="0">
                 <a:solidFill>
                   <a:srgbClr val="5F6F63"/>
                 </a:solidFill>
-                <a:latin typeface="Arial"/>
+                <a:latin typeface="Roboto"/>
               </a:rPr>
               <a:t>job-margins.pptx</a:t>
             </a:r>
@@ -11635,13 +12491,17 @@
           </a:bodyPr>
           <a:lstStyle/>
           <a:p>
-            <a:pPr algn="ctr"/>
+            <a:pPr algn="ctr">
+              <a:defRPr>
+                <a:latin typeface="Roboto"/>
+              </a:defRPr>
+            </a:pPr>
             <a:r>
               <a:rPr sz="900" b="0">
                 <a:solidFill>
                   <a:srgbClr val="5F6F63"/>
                 </a:solidFill>
-                <a:latin typeface="Arial"/>
+                <a:latin typeface="Roboto"/>
               </a:rPr>
               <a:t>Data retrieved 2pm, Tue 6 Oct 2026 · Sample data</a:t>
             </a:r>
@@ -11670,13 +12530,17 @@
           </a:bodyPr>
           <a:lstStyle/>
           <a:p>
-            <a:pPr algn="r"/>
+            <a:pPr algn="r">
+              <a:defRPr>
+                <a:latin typeface="Roboto"/>
+              </a:defRPr>
+            </a:pPr>
             <a:r>
               <a:rPr sz="900" b="0">
                 <a:solidFill>
                   <a:srgbClr val="5F6F63"/>
                 </a:solidFill>
-                <a:latin typeface="Arial"/>
+                <a:latin typeface="Roboto"/>
               </a:rPr>
               <a:t>Slide 4 of 21</a:t>
             </a:r>
@@ -11740,7 +12604,11 @@
           <a:bodyPr rtlCol="0" anchor="ctr"/>
           <a:lstStyle/>
           <a:p>
-            <a:pPr algn="ctr"/>
+            <a:pPr algn="ctr">
+              <a:defRPr>
+                <a:latin typeface="Roboto"/>
+              </a:defRPr>
+            </a:pPr>
           </a:p>
         </p:txBody>
       </p:sp>
@@ -11766,12 +12634,17 @@
           </a:bodyPr>
           <a:lstStyle/>
           <a:p>
+            <a:pPr>
+              <a:defRPr>
+                <a:latin typeface="Roboto"/>
+              </a:defRPr>
+            </a:pPr>
             <a:r>
               <a:rPr sz="1000" b="0">
                 <a:solidFill>
                   <a:srgbClr val="5F6F63"/>
                 </a:solidFill>
-                <a:latin typeface="Arial"/>
+                <a:latin typeface="Roboto"/>
               </a:rPr>
               <a:t>Sample Electrical &amp; Air Pty Ltd · Which jobs actually make money?</a:t>
             </a:r>
@@ -11800,12 +12673,17 @@
           </a:bodyPr>
           <a:lstStyle/>
           <a:p>
+            <a:pPr>
+              <a:defRPr>
+                <a:latin typeface="Roboto"/>
+              </a:defRPr>
+            </a:pPr>
             <a:r>
               <a:rPr sz="2400" b="1">
                 <a:solidFill>
                   <a:srgbClr val="25342A"/>
                 </a:solidFill>
-                <a:latin typeface="Arial"/>
+                <a:latin typeface="Roboto"/>
               </a:rPr>
               <a:t>Job gross margin by type of job, October 2025 · Gross margin % · Type of job: All jobs</a:t>
             </a:r>
@@ -11834,12 +12712,17 @@
           </a:bodyPr>
           <a:lstStyle/>
           <a:p>
+            <a:pPr>
+              <a:defRPr>
+                <a:latin typeface="Roboto"/>
+              </a:defRPr>
+            </a:pPr>
             <a:r>
               <a:rPr sz="1200" b="0">
                 <a:solidFill>
                   <a:srgbClr val="5F6F63"/>
                 </a:solidFill>
-                <a:latin typeface="Arial"/>
+                <a:latin typeface="Roboto"/>
               </a:rPr>
               <a:t>Revenue less materials, subcontractors and technician time at $68/hour.</a:t>
             </a:r>
@@ -11886,12 +12769,17 @@
           </a:bodyPr>
           <a:lstStyle/>
           <a:p>
+            <a:pPr>
+              <a:defRPr>
+                <a:latin typeface="Roboto"/>
+              </a:defRPr>
+            </a:pPr>
             <a:r>
               <a:rPr sz="1000" b="0">
                 <a:solidFill>
                   <a:srgbClr val="5F6F63"/>
                 </a:solidFill>
-                <a:latin typeface="Arial"/>
+                <a:latin typeface="Roboto"/>
               </a:rPr>
               <a:t>Target 35.0%  ·  grey = below target</a:t>
             </a:r>
@@ -11920,12 +12808,17 @@
           </a:bodyPr>
           <a:lstStyle/>
           <a:p>
+            <a:pPr>
+              <a:defRPr>
+                <a:latin typeface="Roboto"/>
+              </a:defRPr>
+            </a:pPr>
             <a:r>
               <a:rPr sz="900" b="0">
                 <a:solidFill>
                   <a:srgbClr val="5F6F63"/>
                 </a:solidFill>
-                <a:latin typeface="Arial"/>
+                <a:latin typeface="Roboto"/>
               </a:rPr>
               <a:t>job-margins.pptx</a:t>
             </a:r>
@@ -11954,13 +12847,17 @@
           </a:bodyPr>
           <a:lstStyle/>
           <a:p>
-            <a:pPr algn="ctr"/>
+            <a:pPr algn="ctr">
+              <a:defRPr>
+                <a:latin typeface="Roboto"/>
+              </a:defRPr>
+            </a:pPr>
             <a:r>
               <a:rPr sz="900" b="0">
                 <a:solidFill>
                   <a:srgbClr val="5F6F63"/>
                 </a:solidFill>
-                <a:latin typeface="Arial"/>
+                <a:latin typeface="Roboto"/>
               </a:rPr>
               <a:t>Data retrieved 2pm, Tue 6 Oct 2026 · Sample data</a:t>
             </a:r>
@@ -11989,13 +12886,17 @@
           </a:bodyPr>
           <a:lstStyle/>
           <a:p>
-            <a:pPr algn="r"/>
+            <a:pPr algn="r">
+              <a:defRPr>
+                <a:latin typeface="Roboto"/>
+              </a:defRPr>
+            </a:pPr>
             <a:r>
               <a:rPr sz="900" b="0">
                 <a:solidFill>
                   <a:srgbClr val="5F6F63"/>
                 </a:solidFill>
-                <a:latin typeface="Arial"/>
+                <a:latin typeface="Roboto"/>
               </a:rPr>
               <a:t>Slide 5 of 21</a:t>
             </a:r>
@@ -12059,7 +12960,11 @@
           <a:bodyPr rtlCol="0" anchor="ctr"/>
           <a:lstStyle/>
           <a:p>
-            <a:pPr algn="ctr"/>
+            <a:pPr algn="ctr">
+              <a:defRPr>
+                <a:latin typeface="Roboto"/>
+              </a:defRPr>
+            </a:pPr>
           </a:p>
         </p:txBody>
       </p:sp>
@@ -12085,12 +12990,17 @@
           </a:bodyPr>
           <a:lstStyle/>
           <a:p>
+            <a:pPr>
+              <a:defRPr>
+                <a:latin typeface="Roboto"/>
+              </a:defRPr>
+            </a:pPr>
             <a:r>
               <a:rPr sz="1000" b="0">
                 <a:solidFill>
                   <a:srgbClr val="5F6F63"/>
                 </a:solidFill>
-                <a:latin typeface="Arial"/>
+                <a:latin typeface="Roboto"/>
               </a:rPr>
               <a:t>Sample Electrical &amp; Air Pty Ltd · Which jobs actually make money?</a:t>
             </a:r>
@@ -12119,12 +13029,17 @@
           </a:bodyPr>
           <a:lstStyle/>
           <a:p>
+            <a:pPr>
+              <a:defRPr>
+                <a:latin typeface="Roboto"/>
+              </a:defRPr>
+            </a:pPr>
             <a:r>
               <a:rPr sz="2400" b="1">
                 <a:solidFill>
                   <a:srgbClr val="25342A"/>
                 </a:solidFill>
-                <a:latin typeface="Arial"/>
+                <a:latin typeface="Roboto"/>
               </a:rPr>
               <a:t>Job gross margin by type of job, October 2025 · Gross margin $ · Type of job: All jobs</a:t>
             </a:r>
@@ -12153,12 +13068,17 @@
           </a:bodyPr>
           <a:lstStyle/>
           <a:p>
+            <a:pPr>
+              <a:defRPr>
+                <a:latin typeface="Roboto"/>
+              </a:defRPr>
+            </a:pPr>
             <a:r>
               <a:rPr sz="1200" b="0">
                 <a:solidFill>
                   <a:srgbClr val="5F6F63"/>
                 </a:solidFill>
-                <a:latin typeface="Arial"/>
+                <a:latin typeface="Roboto"/>
               </a:rPr>
               <a:t>Revenue less materials, subcontractors and technician time at $68/hour.</a:t>
             </a:r>
@@ -12205,12 +13125,17 @@
           </a:bodyPr>
           <a:lstStyle/>
           <a:p>
+            <a:pPr>
+              <a:defRPr>
+                <a:latin typeface="Roboto"/>
+              </a:defRPr>
+            </a:pPr>
             <a:r>
               <a:rPr sz="900" b="0">
                 <a:solidFill>
                   <a:srgbClr val="5F6F63"/>
                 </a:solidFill>
-                <a:latin typeface="Arial"/>
+                <a:latin typeface="Roboto"/>
               </a:rPr>
               <a:t>job-margins.pptx</a:t>
             </a:r>
@@ -12239,13 +13164,17 @@
           </a:bodyPr>
           <a:lstStyle/>
           <a:p>
-            <a:pPr algn="ctr"/>
+            <a:pPr algn="ctr">
+              <a:defRPr>
+                <a:latin typeface="Roboto"/>
+              </a:defRPr>
+            </a:pPr>
             <a:r>
               <a:rPr sz="900" b="0">
                 <a:solidFill>
                   <a:srgbClr val="5F6F63"/>
                 </a:solidFill>
-                <a:latin typeface="Arial"/>
+                <a:latin typeface="Roboto"/>
               </a:rPr>
               <a:t>Data retrieved 2pm, Tue 6 Oct 2026 · Sample data</a:t>
             </a:r>
@@ -12274,13 +13203,17 @@
           </a:bodyPr>
           <a:lstStyle/>
           <a:p>
-            <a:pPr algn="r"/>
+            <a:pPr algn="r">
+              <a:defRPr>
+                <a:latin typeface="Roboto"/>
+              </a:defRPr>
+            </a:pPr>
             <a:r>
               <a:rPr sz="900" b="0">
                 <a:solidFill>
                   <a:srgbClr val="5F6F63"/>
                 </a:solidFill>
-                <a:latin typeface="Arial"/>
+                <a:latin typeface="Roboto"/>
               </a:rPr>
               <a:t>Slide 6 of 21</a:t>
             </a:r>
@@ -12344,7 +13277,11 @@
           <a:bodyPr rtlCol="0" anchor="ctr"/>
           <a:lstStyle/>
           <a:p>
-            <a:pPr algn="ctr"/>
+            <a:pPr algn="ctr">
+              <a:defRPr>
+                <a:latin typeface="Roboto"/>
+              </a:defRPr>
+            </a:pPr>
           </a:p>
         </p:txBody>
       </p:sp>
@@ -12370,12 +13307,17 @@
           </a:bodyPr>
           <a:lstStyle/>
           <a:p>
+            <a:pPr>
+              <a:defRPr>
+                <a:latin typeface="Roboto"/>
+              </a:defRPr>
+            </a:pPr>
             <a:r>
               <a:rPr sz="1000" b="0">
                 <a:solidFill>
                   <a:srgbClr val="5F6F63"/>
                 </a:solidFill>
-                <a:latin typeface="Arial"/>
+                <a:latin typeface="Roboto"/>
               </a:rPr>
               <a:t>Sample Electrical &amp; Air Pty Ltd · Which jobs actually make money?</a:t>
             </a:r>
@@ -12404,12 +13346,17 @@
           </a:bodyPr>
           <a:lstStyle/>
           <a:p>
+            <a:pPr>
+              <a:defRPr>
+                <a:latin typeface="Roboto"/>
+              </a:defRPr>
+            </a:pPr>
             <a:r>
               <a:rPr sz="2400" b="1">
                 <a:solidFill>
                   <a:srgbClr val="25342A"/>
                 </a:solidFill>
-                <a:latin typeface="Arial"/>
+                <a:latin typeface="Roboto"/>
               </a:rPr>
               <a:t>What it shows · Type of job: All jobs</a:t>
             </a:r>
@@ -12457,7 +13404,11 @@
           <a:bodyPr rtlCol="0" anchor="ctr"/>
           <a:lstStyle/>
           <a:p>
-            <a:pPr algn="ctr"/>
+            <a:pPr algn="ctr">
+              <a:defRPr>
+                <a:latin typeface="Roboto"/>
+              </a:defRPr>
+            </a:pPr>
           </a:p>
         </p:txBody>
       </p:sp>
@@ -12483,12 +13434,17 @@
           </a:bodyPr>
           <a:lstStyle/>
           <a:p>
+            <a:pPr>
+              <a:defRPr>
+                <a:latin typeface="Roboto"/>
+              </a:defRPr>
+            </a:pPr>
             <a:r>
               <a:rPr sz="1100" b="1">
                 <a:solidFill>
                   <a:srgbClr val="5F6F63"/>
                 </a:solidFill>
-                <a:latin typeface="Arial"/>
+                <a:latin typeface="Roboto"/>
               </a:rPr>
               <a:t>WHAT IT SHOWS</a:t>
             </a:r>
@@ -12517,12 +13473,17 @@
           </a:bodyPr>
           <a:lstStyle/>
           <a:p>
+            <a:pPr>
+              <a:defRPr>
+                <a:latin typeface="Roboto"/>
+              </a:defRPr>
+            </a:pPr>
             <a:r>
               <a:rPr sz="1600" b="0">
                 <a:solidFill>
                   <a:srgbClr val="25342A"/>
                 </a:solidFill>
-                <a:latin typeface="Arial"/>
+                <a:latin typeface="Roboto"/>
               </a:rPr>
               <a:t>In October maintenance contracts made a 59.5% job gross margin, installations made a 26.1% job gross margin, call-outs and repairs made a 43.3% job gross margin (technician time at $68 an hour, wages and all on-costs). Jobs need 52.5% just to cover overheads.</a:t>
             </a:r>
@@ -12570,7 +13531,11 @@
           <a:bodyPr rtlCol="0" anchor="ctr"/>
           <a:lstStyle/>
           <a:p>
-            <a:pPr algn="ctr"/>
+            <a:pPr algn="ctr">
+              <a:defRPr>
+                <a:latin typeface="Roboto"/>
+              </a:defRPr>
+            </a:pPr>
           </a:p>
         </p:txBody>
       </p:sp>
@@ -12596,12 +13561,17 @@
           </a:bodyPr>
           <a:lstStyle/>
           <a:p>
+            <a:pPr>
+              <a:defRPr>
+                <a:latin typeface="Roboto"/>
+              </a:defRPr>
+            </a:pPr>
             <a:r>
               <a:rPr sz="1100" b="1">
                 <a:solidFill>
                   <a:srgbClr val="5F6F63"/>
                 </a:solidFill>
-                <a:latin typeface="Arial"/>
+                <a:latin typeface="Roboto"/>
               </a:rPr>
               <a:t>WHAT YOU'D DO ABOUT IT</a:t>
             </a:r>
@@ -12630,12 +13600,17 @@
           </a:bodyPr>
           <a:lstStyle/>
           <a:p>
+            <a:pPr>
+              <a:defRPr>
+                <a:latin typeface="Roboto"/>
+              </a:defRPr>
+            </a:pPr>
             <a:r>
               <a:rPr sz="1600" b="0">
                 <a:solidFill>
                   <a:srgbClr val="25342A"/>
                 </a:solidFill>
-                <a:latin typeface="Arial"/>
+                <a:latin typeface="Roboto"/>
               </a:rPr>
               <a:t>Maintenance contracts: 59.5% gross margin, the most profitable work you do. Installations: 26.1% gross margin, below the 52.5% needed to cover overheads.</a:t>
             </a:r>
@@ -12664,12 +13639,17 @@
           </a:bodyPr>
           <a:lstStyle/>
           <a:p>
+            <a:pPr>
+              <a:defRPr>
+                <a:latin typeface="Roboto"/>
+              </a:defRPr>
+            </a:pPr>
             <a:r>
               <a:rPr sz="900" b="0">
                 <a:solidFill>
                   <a:srgbClr val="5F6F63"/>
                 </a:solidFill>
-                <a:latin typeface="Arial"/>
+                <a:latin typeface="Roboto"/>
               </a:rPr>
               <a:t>job-margins.pptx</a:t>
             </a:r>
@@ -12698,13 +13678,17 @@
           </a:bodyPr>
           <a:lstStyle/>
           <a:p>
-            <a:pPr algn="ctr"/>
+            <a:pPr algn="ctr">
+              <a:defRPr>
+                <a:latin typeface="Roboto"/>
+              </a:defRPr>
+            </a:pPr>
             <a:r>
               <a:rPr sz="900" b="0">
                 <a:solidFill>
                   <a:srgbClr val="5F6F63"/>
                 </a:solidFill>
-                <a:latin typeface="Arial"/>
+                <a:latin typeface="Roboto"/>
               </a:rPr>
               <a:t>Data retrieved 2pm, Tue 6 Oct 2026 · Sample data</a:t>
             </a:r>
@@ -12733,13 +13717,17 @@
           </a:bodyPr>
           <a:lstStyle/>
           <a:p>
-            <a:pPr algn="r"/>
+            <a:pPr algn="r">
+              <a:defRPr>
+                <a:latin typeface="Roboto"/>
+              </a:defRPr>
+            </a:pPr>
             <a:r>
               <a:rPr sz="900" b="0">
                 <a:solidFill>
                   <a:srgbClr val="5F6F63"/>
                 </a:solidFill>
-                <a:latin typeface="Arial"/>
+                <a:latin typeface="Roboto"/>
               </a:rPr>
               <a:t>Slide 7 of 21</a:t>
             </a:r>
@@ -12803,7 +13791,11 @@
           <a:bodyPr rtlCol="0" anchor="ctr"/>
           <a:lstStyle/>
           <a:p>
-            <a:pPr algn="ctr"/>
+            <a:pPr algn="ctr">
+              <a:defRPr>
+                <a:latin typeface="Roboto"/>
+              </a:defRPr>
+            </a:pPr>
           </a:p>
         </p:txBody>
       </p:sp>
@@ -12829,12 +13821,17 @@
           </a:bodyPr>
           <a:lstStyle/>
           <a:p>
+            <a:pPr>
+              <a:defRPr>
+                <a:latin typeface="Roboto"/>
+              </a:defRPr>
+            </a:pPr>
             <a:r>
               <a:rPr sz="1000" b="0">
                 <a:solidFill>
                   <a:srgbClr val="5F6F63"/>
                 </a:solidFill>
-                <a:latin typeface="Arial"/>
+                <a:latin typeface="Roboto"/>
               </a:rPr>
               <a:t>Sample Electrical &amp; Air Pty Ltd · Which jobs actually make money?</a:t>
             </a:r>
@@ -12863,12 +13860,17 @@
           </a:bodyPr>
           <a:lstStyle/>
           <a:p>
+            <a:pPr>
+              <a:defRPr>
+                <a:latin typeface="Roboto"/>
+              </a:defRPr>
+            </a:pPr>
             <a:r>
               <a:rPr sz="2400" b="1">
                 <a:solidFill>
                   <a:srgbClr val="25342A"/>
                 </a:solidFill>
-                <a:latin typeface="Arial"/>
+                <a:latin typeface="Roboto"/>
               </a:rPr>
               <a:t>Headline numbers · Type of job: Maintenance contracts</a:t>
             </a:r>
@@ -12916,7 +13918,11 @@
           <a:bodyPr rtlCol="0" anchor="ctr"/>
           <a:lstStyle/>
           <a:p>
-            <a:pPr algn="ctr"/>
+            <a:pPr algn="ctr">
+              <a:defRPr>
+                <a:latin typeface="Roboto"/>
+              </a:defRPr>
+            </a:pPr>
           </a:p>
         </p:txBody>
       </p:sp>
@@ -12942,12 +13948,17 @@
           </a:bodyPr>
           <a:lstStyle/>
           <a:p>
+            <a:pPr>
+              <a:defRPr>
+                <a:latin typeface="Roboto"/>
+              </a:defRPr>
+            </a:pPr>
             <a:r>
               <a:rPr sz="1200" b="0">
                 <a:solidFill>
                   <a:srgbClr val="5F6F63"/>
                 </a:solidFill>
-                <a:latin typeface="Arial"/>
+                <a:latin typeface="Roboto"/>
               </a:rPr>
               <a:t>Job gross margin, October · Maintenance contracts</a:t>
             </a:r>
@@ -12976,12 +13987,17 @@
           </a:bodyPr>
           <a:lstStyle/>
           <a:p>
+            <a:pPr>
+              <a:defRPr>
+                <a:latin typeface="Roboto"/>
+              </a:defRPr>
+            </a:pPr>
             <a:r>
               <a:rPr sz="3000" b="1">
                 <a:solidFill>
                   <a:srgbClr val="2F7A5D"/>
                 </a:solidFill>
-                <a:latin typeface="Arial"/>
+                <a:latin typeface="Roboto"/>
               </a:rPr>
               <a:t>59.5%</a:t>
             </a:r>
@@ -13010,12 +14026,17 @@
           </a:bodyPr>
           <a:lstStyle/>
           <a:p>
+            <a:pPr>
+              <a:defRPr>
+                <a:latin typeface="Roboto"/>
+              </a:defRPr>
+            </a:pPr>
             <a:r>
               <a:rPr sz="1100" b="0">
                 <a:solidFill>
                   <a:srgbClr val="5F6F63"/>
                 </a:solidFill>
-                <a:latin typeface="Arial"/>
+                <a:latin typeface="Roboto"/>
               </a:rPr>
               <a:t>September 59.5%</a:t>
             </a:r>
@@ -13044,12 +14065,17 @@
           </a:bodyPr>
           <a:lstStyle/>
           <a:p>
+            <a:pPr>
+              <a:defRPr>
+                <a:latin typeface="Roboto"/>
+              </a:defRPr>
+            </a:pPr>
             <a:r>
               <a:rPr sz="900" b="0">
                 <a:solidFill>
                   <a:srgbClr val="5F6F63"/>
                 </a:solidFill>
-                <a:latin typeface="Arial"/>
+                <a:latin typeface="Roboto"/>
               </a:rPr>
               <a:t>job-margins.pptx</a:t>
             </a:r>
@@ -13078,13 +14104,17 @@
           </a:bodyPr>
           <a:lstStyle/>
           <a:p>
-            <a:pPr algn="ctr"/>
+            <a:pPr algn="ctr">
+              <a:defRPr>
+                <a:latin typeface="Roboto"/>
+              </a:defRPr>
+            </a:pPr>
             <a:r>
               <a:rPr sz="900" b="0">
                 <a:solidFill>
                   <a:srgbClr val="5F6F63"/>
                 </a:solidFill>
-                <a:latin typeface="Arial"/>
+                <a:latin typeface="Roboto"/>
               </a:rPr>
               <a:t>Data retrieved 2pm, Tue 6 Oct 2026 · Sample data</a:t>
             </a:r>
@@ -13113,13 +14143,17 @@
           </a:bodyPr>
           <a:lstStyle/>
           <a:p>
-            <a:pPr algn="r"/>
+            <a:pPr algn="r">
+              <a:defRPr>
+                <a:latin typeface="Roboto"/>
+              </a:defRPr>
+            </a:pPr>
             <a:r>
               <a:rPr sz="900" b="0">
                 <a:solidFill>
                   <a:srgbClr val="5F6F63"/>
                 </a:solidFill>
-                <a:latin typeface="Arial"/>
+                <a:latin typeface="Roboto"/>
               </a:rPr>
               <a:t>Slide 8 of 21</a:t>
             </a:r>
@@ -13183,7 +14217,11 @@
           <a:bodyPr rtlCol="0" anchor="ctr"/>
           <a:lstStyle/>
           <a:p>
-            <a:pPr algn="ctr"/>
+            <a:pPr algn="ctr">
+              <a:defRPr>
+                <a:latin typeface="Roboto"/>
+              </a:defRPr>
+            </a:pPr>
           </a:p>
         </p:txBody>
       </p:sp>
@@ -13209,12 +14247,17 @@
           </a:bodyPr>
           <a:lstStyle/>
           <a:p>
+            <a:pPr>
+              <a:defRPr>
+                <a:latin typeface="Roboto"/>
+              </a:defRPr>
+            </a:pPr>
             <a:r>
               <a:rPr sz="1000" b="0">
                 <a:solidFill>
                   <a:srgbClr val="5F6F63"/>
                 </a:solidFill>
-                <a:latin typeface="Arial"/>
+                <a:latin typeface="Roboto"/>
               </a:rPr>
               <a:t>Sample Electrical &amp; Air Pty Ltd · Which jobs actually make money?</a:t>
             </a:r>
@@ -13243,12 +14286,17 @@
           </a:bodyPr>
           <a:lstStyle/>
           <a:p>
+            <a:pPr>
+              <a:defRPr>
+                <a:latin typeface="Roboto"/>
+              </a:defRPr>
+            </a:pPr>
             <a:r>
               <a:rPr sz="2400" b="1">
                 <a:solidFill>
                   <a:srgbClr val="25342A"/>
                 </a:solidFill>
-                <a:latin typeface="Arial"/>
+                <a:latin typeface="Roboto"/>
               </a:rPr>
               <a:t>Job gross margin on each maintenance contract, October 2025 · Gross margin % · Type of job: Maintenance contracts</a:t>
             </a:r>
@@ -13277,12 +14325,17 @@
           </a:bodyPr>
           <a:lstStyle/>
           <a:p>
+            <a:pPr>
+              <a:defRPr>
+                <a:latin typeface="Roboto"/>
+              </a:defRPr>
+            </a:pPr>
             <a:r>
               <a:rPr sz="1200" b="0">
                 <a:solidFill>
                   <a:srgbClr val="5F6F63"/>
                 </a:solidFill>
-                <a:latin typeface="Arial"/>
+                <a:latin typeface="Roboto"/>
               </a:rPr>
               <a:t>The month's fee less materials and technician time at $68/hour.</a:t>
             </a:r>
@@ -13329,12 +14382,17 @@
           </a:bodyPr>
           <a:lstStyle/>
           <a:p>
+            <a:pPr>
+              <a:defRPr>
+                <a:latin typeface="Roboto"/>
+              </a:defRPr>
+            </a:pPr>
             <a:r>
               <a:rPr sz="1000" b="0">
                 <a:solidFill>
                   <a:srgbClr val="5F6F63"/>
                 </a:solidFill>
-                <a:latin typeface="Arial"/>
+                <a:latin typeface="Roboto"/>
               </a:rPr>
               <a:t>Target 35.0%  ·  grey = below target</a:t>
             </a:r>
@@ -13363,12 +14421,17 @@
           </a:bodyPr>
           <a:lstStyle/>
           <a:p>
+            <a:pPr>
+              <a:defRPr>
+                <a:latin typeface="Roboto"/>
+              </a:defRPr>
+            </a:pPr>
             <a:r>
               <a:rPr sz="900" b="0">
                 <a:solidFill>
                   <a:srgbClr val="5F6F63"/>
                 </a:solidFill>
-                <a:latin typeface="Arial"/>
+                <a:latin typeface="Roboto"/>
               </a:rPr>
               <a:t>job-margins.pptx</a:t>
             </a:r>
@@ -13397,13 +14460,17 @@
           </a:bodyPr>
           <a:lstStyle/>
           <a:p>
-            <a:pPr algn="ctr"/>
+            <a:pPr algn="ctr">
+              <a:defRPr>
+                <a:latin typeface="Roboto"/>
+              </a:defRPr>
+            </a:pPr>
             <a:r>
               <a:rPr sz="900" b="0">
                 <a:solidFill>
                   <a:srgbClr val="5F6F63"/>
                 </a:solidFill>
-                <a:latin typeface="Arial"/>
+                <a:latin typeface="Roboto"/>
               </a:rPr>
               <a:t>Data retrieved 2pm, Tue 6 Oct 2026 · Sample data</a:t>
             </a:r>
@@ -13432,13 +14499,17 @@
           </a:bodyPr>
           <a:lstStyle/>
           <a:p>
-            <a:pPr algn="r"/>
+            <a:pPr algn="r">
+              <a:defRPr>
+                <a:latin typeface="Roboto"/>
+              </a:defRPr>
+            </a:pPr>
             <a:r>
               <a:rPr sz="900" b="0">
                 <a:solidFill>
                   <a:srgbClr val="5F6F63"/>
                 </a:solidFill>
-                <a:latin typeface="Arial"/>
+                <a:latin typeface="Roboto"/>
               </a:rPr>
               <a:t>Slide 9 of 21</a:t>
             </a:r>

--- a/media/exports/reports/2025-10/job-margins.pptx
+++ b/media/exports/reports/2025-10/job-margins.pptx
@@ -154,7 +154,7 @@
             <c:idx val="0"/>
             <c:spPr>
               <a:solidFill>
-                <a:srgbClr val="A7B0B8"/>
+                <a:srgbClr val="7D8790"/>
               </a:solidFill>
             </c:spPr>
           </c:dPt>
@@ -556,7 +556,7 @@
             <c:idx val="0"/>
             <c:spPr>
               <a:solidFill>
-                <a:srgbClr val="A7B0B8"/>
+                <a:srgbClr val="7D8790"/>
               </a:solidFill>
             </c:spPr>
           </c:dPt>
@@ -1318,7 +1318,7 @@
             <c:idx val="0"/>
             <c:spPr>
               <a:solidFill>
-                <a:srgbClr val="A7B0B8"/>
+                <a:srgbClr val="7D8790"/>
               </a:solidFill>
             </c:spPr>
           </c:dPt>
@@ -1326,7 +1326,7 @@
             <c:idx val="1"/>
             <c:spPr>
               <a:solidFill>
-                <a:srgbClr val="A7B0B8"/>
+                <a:srgbClr val="7D8790"/>
               </a:solidFill>
             </c:spPr>
           </c:dPt>
@@ -1488,7 +1488,7 @@
             <c:idx val="0"/>
             <c:spPr>
               <a:solidFill>
-                <a:srgbClr val="A7B0B8"/>
+                <a:srgbClr val="7D8790"/>
               </a:solidFill>
             </c:spPr>
           </c:dPt>
@@ -1496,7 +1496,7 @@
             <c:idx val="1"/>
             <c:spPr>
               <a:solidFill>
-                <a:srgbClr val="A7B0B8"/>
+                <a:srgbClr val="7D8790"/>
               </a:solidFill>
             </c:spPr>
           </c:dPt>

--- a/media/exports/reports/2025-10/job-margins.pptx
+++ b/media/exports/reports/2025-10/job-margins.pptx
@@ -5514,7 +5514,7 @@
                 </a:solidFill>
                 <a:latin typeface="Roboto"/>
               </a:rPr>
-              <a:t>Period: October 2025. Every job's gross margin: revenue less materials, subcontractors and technician time at $68 an hour (fully loaded: wages and all on-costs). Before overheads, so this is not profit. Pick a type of job and every number, chart and note on the page follows it.</a:t>
+              <a:t>Period: October 2025. Every job's gross margin: revenue less materials, subcontractors and technician time at $68 an hour (fully loaded: wages and all on-costs). Pick a type of job and every number, chart and note on the page follows it.</a:t>
             </a:r>
           </a:p>
         </p:txBody>
@@ -5900,7 +5900,7 @@
                 </a:solidFill>
                 <a:latin typeface="Roboto"/>
               </a:rPr>
-              <a:t>The month's fee less materials and technician time at $68/hour.</a:t>
+              <a:t>The month's fee less materials and technician time at $68/hour. Target 35.0% is what to price for; break-even 52.5% only covers overheads and time not charged.</a:t>
             </a:r>
           </a:p>
         </p:txBody>
@@ -6432,7 +6432,7 @@
                 </a:solidFill>
                 <a:latin typeface="Roboto"/>
               </a:rPr>
-              <a:t>The Kangaroo Point townhouses contract: 58.2% gross margin, 5.8 points clear of the 52.5% overheads need. Maintenance contracts overall: 59.5% gross margin.</a:t>
+              <a:t>The thinnest, Kangaroo Point townhouses: 58.2% gross margin, 23.3 points over the 35.0% target ($558 ahead on $2,400 in October). All maintenance contracts: 59.5% gross margin, 24.5 points over the 35.0% target ($8,754 ahead on $35,800 in October).</a:t>
             </a:r>
           </a:p>
         </p:txBody>
@@ -6706,7 +6706,7 @@
         <p:spPr>
           <a:xfrm>
             <a:off x="457200" y="1645920"/>
-            <a:ext cx="11277295" cy="2011680"/>
+            <a:ext cx="3576218" cy="2011680"/>
           </a:xfrm>
           <a:prstGeom prst="rect">
             <a:avLst/>
@@ -6755,7 +6755,7 @@
         <p:spPr>
           <a:xfrm>
             <a:off x="640080" y="1783080"/>
-            <a:ext cx="10911535" cy="457200"/>
+            <a:ext cx="3210458" cy="457200"/>
           </a:xfrm>
           <a:prstGeom prst="rect">
             <a:avLst/>
@@ -6794,7 +6794,7 @@
         <p:spPr>
           <a:xfrm>
             <a:off x="640080" y="2240280"/>
-            <a:ext cx="10911535" cy="731520"/>
+            <a:ext cx="3210458" cy="731520"/>
           </a:xfrm>
           <a:prstGeom prst="rect">
             <a:avLst/>
@@ -6833,7 +6833,7 @@
         <p:spPr>
           <a:xfrm>
             <a:off x="640080" y="3017520"/>
-            <a:ext cx="10911535" cy="548640"/>
+            <a:ext cx="3210458" cy="548640"/>
           </a:xfrm>
           <a:prstGeom prst="rect">
             <a:avLst/>
@@ -6858,14 +6858,346 @@
                 </a:solidFill>
                 <a:latin typeface="Roboto"/>
               </a:rPr>
-              <a:t>September 26.2%</a:t>
-            </a:r>
-          </a:p>
-        </p:txBody>
-      </p:sp>
-      <p:sp>
-        <p:nvSpPr>
-          <p:cNvPr id="9" name="TextBox 8"/>
+              <a:t>target 35.0%</a:t>
+            </a:r>
+          </a:p>
+        </p:txBody>
+      </p:sp>
+      <p:sp>
+        <p:nvSpPr>
+          <p:cNvPr id="9" name="Rectangle 8"/>
+          <p:cNvSpPr/>
+          <p:nvPr/>
+        </p:nvSpPr>
+        <p:spPr>
+          <a:xfrm>
+            <a:off x="4307738" y="1645920"/>
+            <a:ext cx="3576218" cy="2011680"/>
+          </a:xfrm>
+          <a:prstGeom prst="rect">
+            <a:avLst/>
+          </a:prstGeom>
+          <a:solidFill>
+            <a:srgbClr val="F7FAF7"/>
+          </a:solidFill>
+          <a:ln>
+            <a:solidFill>
+              <a:srgbClr val="DCE8DC"/>
+            </a:solidFill>
+          </a:ln>
+        </p:spPr>
+        <p:style>
+          <a:lnRef idx="1">
+            <a:schemeClr val="accent1"/>
+          </a:lnRef>
+          <a:fillRef idx="3">
+            <a:schemeClr val="accent1"/>
+          </a:fillRef>
+          <a:effectRef idx="2">
+            <a:schemeClr val="accent1"/>
+          </a:effectRef>
+          <a:fontRef idx="minor">
+            <a:schemeClr val="lt1"/>
+          </a:fontRef>
+        </p:style>
+        <p:txBody>
+          <a:bodyPr rtlCol="0" anchor="ctr"/>
+          <a:lstStyle/>
+          <a:p>
+            <a:pPr algn="ctr">
+              <a:defRPr>
+                <a:latin typeface="Roboto"/>
+              </a:defRPr>
+            </a:pPr>
+          </a:p>
+        </p:txBody>
+      </p:sp>
+      <p:sp>
+        <p:nvSpPr>
+          <p:cNvPr id="10" name="TextBox 9"/>
+          <p:cNvSpPr txBox="1"/>
+          <p:nvPr/>
+        </p:nvSpPr>
+        <p:spPr>
+          <a:xfrm>
+            <a:off x="4490618" y="1783080"/>
+            <a:ext cx="3210458" cy="457200"/>
+          </a:xfrm>
+          <a:prstGeom prst="rect">
+            <a:avLst/>
+          </a:prstGeom>
+          <a:noFill/>
+        </p:spPr>
+        <p:txBody>
+          <a:bodyPr wrap="square">
+            <a:spAutoFit/>
+          </a:bodyPr>
+          <a:lstStyle/>
+          <a:p>
+            <a:pPr>
+              <a:defRPr>
+                <a:latin typeface="Roboto"/>
+              </a:defRPr>
+            </a:pPr>
+            <a:r>
+              <a:rPr sz="1200" b="0">
+                <a:solidFill>
+                  <a:srgbClr val="5F6F63"/>
+                </a:solidFill>
+                <a:latin typeface="Roboto"/>
+              </a:rPr>
+              <a:t>Job gross margin, September · Installations</a:t>
+            </a:r>
+          </a:p>
+        </p:txBody>
+      </p:sp>
+      <p:sp>
+        <p:nvSpPr>
+          <p:cNvPr id="11" name="TextBox 10"/>
+          <p:cNvSpPr txBox="1"/>
+          <p:nvPr/>
+        </p:nvSpPr>
+        <p:spPr>
+          <a:xfrm>
+            <a:off x="4490618" y="2240280"/>
+            <a:ext cx="3210458" cy="731520"/>
+          </a:xfrm>
+          <a:prstGeom prst="rect">
+            <a:avLst/>
+          </a:prstGeom>
+          <a:noFill/>
+        </p:spPr>
+        <p:txBody>
+          <a:bodyPr wrap="square">
+            <a:spAutoFit/>
+          </a:bodyPr>
+          <a:lstStyle/>
+          <a:p>
+            <a:pPr>
+              <a:defRPr>
+                <a:latin typeface="Roboto"/>
+              </a:defRPr>
+            </a:pPr>
+            <a:r>
+              <a:rPr sz="3000" b="1">
+                <a:solidFill>
+                  <a:srgbClr val="2F7A5D"/>
+                </a:solidFill>
+                <a:latin typeface="Roboto"/>
+              </a:rPr>
+              <a:t>26.2%</a:t>
+            </a:r>
+          </a:p>
+        </p:txBody>
+      </p:sp>
+      <p:sp>
+        <p:nvSpPr>
+          <p:cNvPr id="12" name="TextBox 11"/>
+          <p:cNvSpPr txBox="1"/>
+          <p:nvPr/>
+        </p:nvSpPr>
+        <p:spPr>
+          <a:xfrm>
+            <a:off x="4490618" y="3017520"/>
+            <a:ext cx="3210458" cy="548640"/>
+          </a:xfrm>
+          <a:prstGeom prst="rect">
+            <a:avLst/>
+          </a:prstGeom>
+          <a:noFill/>
+        </p:spPr>
+        <p:txBody>
+          <a:bodyPr wrap="square">
+            <a:spAutoFit/>
+          </a:bodyPr>
+          <a:lstStyle/>
+          <a:p>
+            <a:pPr>
+              <a:defRPr>
+                <a:latin typeface="Roboto"/>
+              </a:defRPr>
+            </a:pPr>
+            <a:r>
+              <a:rPr sz="1100" b="0">
+                <a:solidFill>
+                  <a:srgbClr val="5F6F63"/>
+                </a:solidFill>
+                <a:latin typeface="Roboto"/>
+              </a:rPr>
+              <a:t>target 35.0%</a:t>
+            </a:r>
+          </a:p>
+        </p:txBody>
+      </p:sp>
+      <p:sp>
+        <p:nvSpPr>
+          <p:cNvPr id="13" name="Rectangle 12"/>
+          <p:cNvSpPr/>
+          <p:nvPr/>
+        </p:nvSpPr>
+        <p:spPr>
+          <a:xfrm>
+            <a:off x="8158276" y="1645920"/>
+            <a:ext cx="3576218" cy="2011680"/>
+          </a:xfrm>
+          <a:prstGeom prst="rect">
+            <a:avLst/>
+          </a:prstGeom>
+          <a:solidFill>
+            <a:srgbClr val="F7FAF7"/>
+          </a:solidFill>
+          <a:ln>
+            <a:solidFill>
+              <a:srgbClr val="DCE8DC"/>
+            </a:solidFill>
+          </a:ln>
+        </p:spPr>
+        <p:style>
+          <a:lnRef idx="1">
+            <a:schemeClr val="accent1"/>
+          </a:lnRef>
+          <a:fillRef idx="3">
+            <a:schemeClr val="accent1"/>
+          </a:fillRef>
+          <a:effectRef idx="2">
+            <a:schemeClr val="accent1"/>
+          </a:effectRef>
+          <a:fontRef idx="minor">
+            <a:schemeClr val="lt1"/>
+          </a:fontRef>
+        </p:style>
+        <p:txBody>
+          <a:bodyPr rtlCol="0" anchor="ctr"/>
+          <a:lstStyle/>
+          <a:p>
+            <a:pPr algn="ctr">
+              <a:defRPr>
+                <a:latin typeface="Roboto"/>
+              </a:defRPr>
+            </a:pPr>
+          </a:p>
+        </p:txBody>
+      </p:sp>
+      <p:sp>
+        <p:nvSpPr>
+          <p:cNvPr id="14" name="TextBox 13"/>
+          <p:cNvSpPr txBox="1"/>
+          <p:nvPr/>
+        </p:nvSpPr>
+        <p:spPr>
+          <a:xfrm>
+            <a:off x="8341156" y="1783080"/>
+            <a:ext cx="3210458" cy="457200"/>
+          </a:xfrm>
+          <a:prstGeom prst="rect">
+            <a:avLst/>
+          </a:prstGeom>
+          <a:noFill/>
+        </p:spPr>
+        <p:txBody>
+          <a:bodyPr wrap="square">
+            <a:spAutoFit/>
+          </a:bodyPr>
+          <a:lstStyle/>
+          <a:p>
+            <a:pPr>
+              <a:defRPr>
+                <a:latin typeface="Roboto"/>
+              </a:defRPr>
+            </a:pPr>
+            <a:r>
+              <a:rPr sz="1200" b="0">
+                <a:solidFill>
+                  <a:srgbClr val="5F6F63"/>
+                </a:solidFill>
+                <a:latin typeface="Roboto"/>
+              </a:rPr>
+              <a:t>Gross margin jobs need to break even</a:t>
+            </a:r>
+          </a:p>
+        </p:txBody>
+      </p:sp>
+      <p:sp>
+        <p:nvSpPr>
+          <p:cNvPr id="15" name="TextBox 14"/>
+          <p:cNvSpPr txBox="1"/>
+          <p:nvPr/>
+        </p:nvSpPr>
+        <p:spPr>
+          <a:xfrm>
+            <a:off x="8341156" y="2240280"/>
+            <a:ext cx="3210458" cy="731520"/>
+          </a:xfrm>
+          <a:prstGeom prst="rect">
+            <a:avLst/>
+          </a:prstGeom>
+          <a:noFill/>
+        </p:spPr>
+        <p:txBody>
+          <a:bodyPr wrap="square">
+            <a:spAutoFit/>
+          </a:bodyPr>
+          <a:lstStyle/>
+          <a:p>
+            <a:pPr>
+              <a:defRPr>
+                <a:latin typeface="Roboto"/>
+              </a:defRPr>
+            </a:pPr>
+            <a:r>
+              <a:rPr sz="3000" b="1">
+                <a:solidFill>
+                  <a:srgbClr val="2F7A5D"/>
+                </a:solidFill>
+                <a:latin typeface="Roboto"/>
+              </a:rPr>
+              <a:t>52.5%</a:t>
+            </a:r>
+          </a:p>
+        </p:txBody>
+      </p:sp>
+      <p:sp>
+        <p:nvSpPr>
+          <p:cNvPr id="16" name="TextBox 15"/>
+          <p:cNvSpPr txBox="1"/>
+          <p:nvPr/>
+        </p:nvSpPr>
+        <p:spPr>
+          <a:xfrm>
+            <a:off x="8341156" y="3017520"/>
+            <a:ext cx="3210458" cy="548640"/>
+          </a:xfrm>
+          <a:prstGeom prst="rect">
+            <a:avLst/>
+          </a:prstGeom>
+          <a:noFill/>
+        </p:spPr>
+        <p:txBody>
+          <a:bodyPr wrap="square">
+            <a:spAutoFit/>
+          </a:bodyPr>
+          <a:lstStyle/>
+          <a:p>
+            <a:pPr>
+              <a:defRPr>
+                <a:latin typeface="Roboto"/>
+              </a:defRPr>
+            </a:pPr>
+            <a:r>
+              <a:rPr sz="1100" b="0">
+                <a:solidFill>
+                  <a:srgbClr val="5F6F63"/>
+                </a:solidFill>
+                <a:latin typeface="Roboto"/>
+              </a:rPr>
+              <a:t>covers overheads and time not charged (October)</a:t>
+            </a:r>
+          </a:p>
+        </p:txBody>
+      </p:sp>
+      <p:sp>
+        <p:nvSpPr>
+          <p:cNvPr id="17" name="TextBox 16"/>
           <p:cNvSpPr txBox="1"/>
           <p:nvPr/>
         </p:nvSpPr>
@@ -6904,7 +7236,7 @@
       </p:sp>
       <p:sp>
         <p:nvSpPr>
-          <p:cNvPr id="10" name="TextBox 9"/>
+          <p:cNvPr id="18" name="TextBox 17"/>
           <p:cNvSpPr txBox="1"/>
           <p:nvPr/>
         </p:nvSpPr>
@@ -6943,7 +7275,7 @@
       </p:sp>
       <p:sp>
         <p:nvSpPr>
-          <p:cNvPr id="11" name="TextBox 10"/>
+          <p:cNvPr id="19" name="TextBox 18"/>
           <p:cNvSpPr txBox="1"/>
           <p:nvPr/>
         </p:nvSpPr>
@@ -7157,7 +7489,7 @@
                 </a:solidFill>
                 <a:latin typeface="Roboto"/>
               </a:rPr>
-              <a:t>Whole job, recognised when invoiced: revenue less materials, subcontractors and technician time at $68/hour. Before overheads: not profit. One 35.0% target for every job for now.</a:t>
+              <a:t>Whole job, recognised when invoiced: revenue less materials, subcontractors and technician time at $68/hour. One target for every job for now. Target 35.0% is what to price for; break-even 52.5% only covers overheads and time not charged.</a:t>
             </a:r>
           </a:p>
         </p:txBody>
@@ -7513,7 +7845,7 @@
                 </a:solidFill>
                 <a:latin typeface="Roboto"/>
               </a:rPr>
-              <a:t>Whole job, recognised when invoiced: revenue less materials, subcontractors and technician time at $68/hour. Before overheads: not profit. One 35.0% target for every job for now.</a:t>
+              <a:t>Whole job, recognised when invoiced: revenue less materials, subcontractors and technician time at $68/hour. One target for every job for now. Target 35.0% is what to price for; break-even 52.5% only covers overheads and time not charged.</a:t>
             </a:r>
           </a:p>
         </p:txBody>
@@ -8045,7 +8377,7 @@
                 </a:solidFill>
                 <a:latin typeface="Roboto"/>
               </a:rPr>
-              <a:t>Below the 52.5% overheads need: Aspley cafe data cabling (37.8%), Coorparoo shop air-con install (32.5%), Salisbury shop solar and battery (17.3%). Most profitable: Aspley cafe data cabling (37.8%).</a:t>
+              <a:t>2 installations under the 35.0% target, worth about $6,744 between them on $54,000 of revenue. The biggest gap, Salisbury shop solar and battery: 17.3% gross margin, 17.7 points under the 35.0% target: about $6,285 on $35,500 of revenue in October. It's below the 52.5% needed to cover overheads, too.</a:t>
             </a:r>
           </a:p>
         </p:txBody>
@@ -8319,7 +8651,7 @@
         <p:spPr>
           <a:xfrm>
             <a:off x="457200" y="1645920"/>
-            <a:ext cx="3576218" cy="2011680"/>
+            <a:ext cx="2036003" cy="2011680"/>
           </a:xfrm>
           <a:prstGeom prst="rect">
             <a:avLst/>
@@ -8368,7 +8700,7 @@
         <p:spPr>
           <a:xfrm>
             <a:off x="640080" y="1783080"/>
-            <a:ext cx="3210458" cy="457200"/>
+            <a:ext cx="1670243" cy="457200"/>
           </a:xfrm>
           <a:prstGeom prst="rect">
             <a:avLst/>
@@ -8407,7 +8739,7 @@
         <p:spPr>
           <a:xfrm>
             <a:off x="640080" y="2240280"/>
-            <a:ext cx="3210458" cy="731520"/>
+            <a:ext cx="1670243" cy="731520"/>
           </a:xfrm>
           <a:prstGeom prst="rect">
             <a:avLst/>
@@ -8446,7 +8778,7 @@
         <p:spPr>
           <a:xfrm>
             <a:off x="640080" y="3017520"/>
-            <a:ext cx="3210458" cy="548640"/>
+            <a:ext cx="1670243" cy="548640"/>
           </a:xfrm>
           <a:prstGeom prst="rect">
             <a:avLst/>
@@ -8471,7 +8803,7 @@
                 </a:solidFill>
                 <a:latin typeface="Roboto"/>
               </a:rPr>
-              <a:t>September 44.0%</a:t>
+              <a:t>target 35.0%</a:t>
             </a:r>
           </a:p>
         </p:txBody>
@@ -8484,8 +8816,8 @@
         </p:nvSpPr>
         <p:spPr>
           <a:xfrm>
-            <a:off x="4307738" y="1645920"/>
-            <a:ext cx="3576218" cy="2011680"/>
+            <a:off x="2767523" y="1645920"/>
+            <a:ext cx="2036003" cy="2011680"/>
           </a:xfrm>
           <a:prstGeom prst="rect">
             <a:avLst/>
@@ -8533,8 +8865,8 @@
         </p:nvSpPr>
         <p:spPr>
           <a:xfrm>
-            <a:off x="4490618" y="1783080"/>
-            <a:ext cx="3210458" cy="457200"/>
+            <a:off x="2950403" y="1783080"/>
+            <a:ext cx="1670243" cy="457200"/>
           </a:xfrm>
           <a:prstGeom prst="rect">
             <a:avLst/>
@@ -8559,7 +8891,7 @@
                 </a:solidFill>
                 <a:latin typeface="Roboto"/>
               </a:rPr>
-              <a:t>Technician time charged, October</a:t>
+              <a:t>Job gross margin, September · Call-outs and repairs</a:t>
             </a:r>
           </a:p>
         </p:txBody>
@@ -8572,8 +8904,8 @@
         </p:nvSpPr>
         <p:spPr>
           <a:xfrm>
-            <a:off x="4490618" y="2240280"/>
-            <a:ext cx="3210458" cy="731520"/>
+            <a:off x="2950403" y="2240280"/>
+            <a:ext cx="1670243" cy="731520"/>
           </a:xfrm>
           <a:prstGeom prst="rect">
             <a:avLst/>
@@ -8598,7 +8930,7 @@
                 </a:solidFill>
                 <a:latin typeface="Roboto"/>
               </a:rPr>
-              <a:t>$15,005</a:t>
+              <a:t>44.0%</a:t>
             </a:r>
           </a:p>
         </p:txBody>
@@ -8611,8 +8943,8 @@
         </p:nvSpPr>
         <p:spPr>
           <a:xfrm>
-            <a:off x="4490618" y="3017520"/>
-            <a:ext cx="3210458" cy="548640"/>
+            <a:off x="2950403" y="3017520"/>
+            <a:ext cx="1670243" cy="548640"/>
           </a:xfrm>
           <a:prstGeom prst="rect">
             <a:avLst/>
@@ -8637,7 +8969,7 @@
                 </a:solidFill>
                 <a:latin typeface="Roboto"/>
               </a:rPr>
-              <a:t>67.3% of call-out revenue</a:t>
+              <a:t>target 35.0%</a:t>
             </a:r>
           </a:p>
         </p:txBody>
@@ -8650,8 +8982,8 @@
         </p:nvSpPr>
         <p:spPr>
           <a:xfrm>
-            <a:off x="8158276" y="1645920"/>
-            <a:ext cx="3576218" cy="2011680"/>
+            <a:off x="5077846" y="1645920"/>
+            <a:ext cx="2036003" cy="2011680"/>
           </a:xfrm>
           <a:prstGeom prst="rect">
             <a:avLst/>
@@ -8699,8 +9031,8 @@
         </p:nvSpPr>
         <p:spPr>
           <a:xfrm>
-            <a:off x="8341156" y="1783080"/>
-            <a:ext cx="3210458" cy="457200"/>
+            <a:off x="5260726" y="1783080"/>
+            <a:ext cx="1670243" cy="457200"/>
           </a:xfrm>
           <a:prstGeom prst="rect">
             <a:avLst/>
@@ -8725,6 +9057,338 @@
                 </a:solidFill>
                 <a:latin typeface="Roboto"/>
               </a:rPr>
+              <a:t>Gross margin jobs need to break even</a:t>
+            </a:r>
+          </a:p>
+        </p:txBody>
+      </p:sp>
+      <p:sp>
+        <p:nvSpPr>
+          <p:cNvPr id="15" name="TextBox 14"/>
+          <p:cNvSpPr txBox="1"/>
+          <p:nvPr/>
+        </p:nvSpPr>
+        <p:spPr>
+          <a:xfrm>
+            <a:off x="5260726" y="2240280"/>
+            <a:ext cx="1670243" cy="731520"/>
+          </a:xfrm>
+          <a:prstGeom prst="rect">
+            <a:avLst/>
+          </a:prstGeom>
+          <a:noFill/>
+        </p:spPr>
+        <p:txBody>
+          <a:bodyPr wrap="square">
+            <a:spAutoFit/>
+          </a:bodyPr>
+          <a:lstStyle/>
+          <a:p>
+            <a:pPr>
+              <a:defRPr>
+                <a:latin typeface="Roboto"/>
+              </a:defRPr>
+            </a:pPr>
+            <a:r>
+              <a:rPr sz="3000" b="1">
+                <a:solidFill>
+                  <a:srgbClr val="2F7A5D"/>
+                </a:solidFill>
+                <a:latin typeface="Roboto"/>
+              </a:rPr>
+              <a:t>52.5%</a:t>
+            </a:r>
+          </a:p>
+        </p:txBody>
+      </p:sp>
+      <p:sp>
+        <p:nvSpPr>
+          <p:cNvPr id="16" name="TextBox 15"/>
+          <p:cNvSpPr txBox="1"/>
+          <p:nvPr/>
+        </p:nvSpPr>
+        <p:spPr>
+          <a:xfrm>
+            <a:off x="5260726" y="3017520"/>
+            <a:ext cx="1670243" cy="548640"/>
+          </a:xfrm>
+          <a:prstGeom prst="rect">
+            <a:avLst/>
+          </a:prstGeom>
+          <a:noFill/>
+        </p:spPr>
+        <p:txBody>
+          <a:bodyPr wrap="square">
+            <a:spAutoFit/>
+          </a:bodyPr>
+          <a:lstStyle/>
+          <a:p>
+            <a:pPr>
+              <a:defRPr>
+                <a:latin typeface="Roboto"/>
+              </a:defRPr>
+            </a:pPr>
+            <a:r>
+              <a:rPr sz="1100" b="0">
+                <a:solidFill>
+                  <a:srgbClr val="5F6F63"/>
+                </a:solidFill>
+                <a:latin typeface="Roboto"/>
+              </a:rPr>
+              <a:t>covers overheads and time not charged (October)</a:t>
+            </a:r>
+          </a:p>
+        </p:txBody>
+      </p:sp>
+      <p:sp>
+        <p:nvSpPr>
+          <p:cNvPr id="17" name="Rectangle 16"/>
+          <p:cNvSpPr/>
+          <p:nvPr/>
+        </p:nvSpPr>
+        <p:spPr>
+          <a:xfrm>
+            <a:off x="7388169" y="1645920"/>
+            <a:ext cx="2036003" cy="2011680"/>
+          </a:xfrm>
+          <a:prstGeom prst="rect">
+            <a:avLst/>
+          </a:prstGeom>
+          <a:solidFill>
+            <a:srgbClr val="F7FAF7"/>
+          </a:solidFill>
+          <a:ln>
+            <a:solidFill>
+              <a:srgbClr val="DCE8DC"/>
+            </a:solidFill>
+          </a:ln>
+        </p:spPr>
+        <p:style>
+          <a:lnRef idx="1">
+            <a:schemeClr val="accent1"/>
+          </a:lnRef>
+          <a:fillRef idx="3">
+            <a:schemeClr val="accent1"/>
+          </a:fillRef>
+          <a:effectRef idx="2">
+            <a:schemeClr val="accent1"/>
+          </a:effectRef>
+          <a:fontRef idx="minor">
+            <a:schemeClr val="lt1"/>
+          </a:fontRef>
+        </p:style>
+        <p:txBody>
+          <a:bodyPr rtlCol="0" anchor="ctr"/>
+          <a:lstStyle/>
+          <a:p>
+            <a:pPr algn="ctr">
+              <a:defRPr>
+                <a:latin typeface="Roboto"/>
+              </a:defRPr>
+            </a:pPr>
+          </a:p>
+        </p:txBody>
+      </p:sp>
+      <p:sp>
+        <p:nvSpPr>
+          <p:cNvPr id="18" name="TextBox 17"/>
+          <p:cNvSpPr txBox="1"/>
+          <p:nvPr/>
+        </p:nvSpPr>
+        <p:spPr>
+          <a:xfrm>
+            <a:off x="7571049" y="1783080"/>
+            <a:ext cx="1670243" cy="457200"/>
+          </a:xfrm>
+          <a:prstGeom prst="rect">
+            <a:avLst/>
+          </a:prstGeom>
+          <a:noFill/>
+        </p:spPr>
+        <p:txBody>
+          <a:bodyPr wrap="square">
+            <a:spAutoFit/>
+          </a:bodyPr>
+          <a:lstStyle/>
+          <a:p>
+            <a:pPr>
+              <a:defRPr>
+                <a:latin typeface="Roboto"/>
+              </a:defRPr>
+            </a:pPr>
+            <a:r>
+              <a:rPr sz="1200" b="0">
+                <a:solidFill>
+                  <a:srgbClr val="5F6F63"/>
+                </a:solidFill>
+                <a:latin typeface="Roboto"/>
+              </a:rPr>
+              <a:t>Technician time charged, October</a:t>
+            </a:r>
+          </a:p>
+        </p:txBody>
+      </p:sp>
+      <p:sp>
+        <p:nvSpPr>
+          <p:cNvPr id="19" name="TextBox 18"/>
+          <p:cNvSpPr txBox="1"/>
+          <p:nvPr/>
+        </p:nvSpPr>
+        <p:spPr>
+          <a:xfrm>
+            <a:off x="7571049" y="2240280"/>
+            <a:ext cx="1670243" cy="731520"/>
+          </a:xfrm>
+          <a:prstGeom prst="rect">
+            <a:avLst/>
+          </a:prstGeom>
+          <a:noFill/>
+        </p:spPr>
+        <p:txBody>
+          <a:bodyPr wrap="square">
+            <a:spAutoFit/>
+          </a:bodyPr>
+          <a:lstStyle/>
+          <a:p>
+            <a:pPr>
+              <a:defRPr>
+                <a:latin typeface="Roboto"/>
+              </a:defRPr>
+            </a:pPr>
+            <a:r>
+              <a:rPr sz="3000" b="1">
+                <a:solidFill>
+                  <a:srgbClr val="2F7A5D"/>
+                </a:solidFill>
+                <a:latin typeface="Roboto"/>
+              </a:rPr>
+              <a:t>$15,005</a:t>
+            </a:r>
+          </a:p>
+        </p:txBody>
+      </p:sp>
+      <p:sp>
+        <p:nvSpPr>
+          <p:cNvPr id="20" name="TextBox 19"/>
+          <p:cNvSpPr txBox="1"/>
+          <p:nvPr/>
+        </p:nvSpPr>
+        <p:spPr>
+          <a:xfrm>
+            <a:off x="7571049" y="3017520"/>
+            <a:ext cx="1670243" cy="548640"/>
+          </a:xfrm>
+          <a:prstGeom prst="rect">
+            <a:avLst/>
+          </a:prstGeom>
+          <a:noFill/>
+        </p:spPr>
+        <p:txBody>
+          <a:bodyPr wrap="square">
+            <a:spAutoFit/>
+          </a:bodyPr>
+          <a:lstStyle/>
+          <a:p>
+            <a:pPr>
+              <a:defRPr>
+                <a:latin typeface="Roboto"/>
+              </a:defRPr>
+            </a:pPr>
+            <a:r>
+              <a:rPr sz="1100" b="0">
+                <a:solidFill>
+                  <a:srgbClr val="5F6F63"/>
+                </a:solidFill>
+                <a:latin typeface="Roboto"/>
+              </a:rPr>
+              <a:t>67.3% of call-out revenue</a:t>
+            </a:r>
+          </a:p>
+        </p:txBody>
+      </p:sp>
+      <p:sp>
+        <p:nvSpPr>
+          <p:cNvPr id="21" name="Rectangle 20"/>
+          <p:cNvSpPr/>
+          <p:nvPr/>
+        </p:nvSpPr>
+        <p:spPr>
+          <a:xfrm>
+            <a:off x="9698492" y="1645920"/>
+            <a:ext cx="2036003" cy="2011680"/>
+          </a:xfrm>
+          <a:prstGeom prst="rect">
+            <a:avLst/>
+          </a:prstGeom>
+          <a:solidFill>
+            <a:srgbClr val="F7FAF7"/>
+          </a:solidFill>
+          <a:ln>
+            <a:solidFill>
+              <a:srgbClr val="DCE8DC"/>
+            </a:solidFill>
+          </a:ln>
+        </p:spPr>
+        <p:style>
+          <a:lnRef idx="1">
+            <a:schemeClr val="accent1"/>
+          </a:lnRef>
+          <a:fillRef idx="3">
+            <a:schemeClr val="accent1"/>
+          </a:fillRef>
+          <a:effectRef idx="2">
+            <a:schemeClr val="accent1"/>
+          </a:effectRef>
+          <a:fontRef idx="minor">
+            <a:schemeClr val="lt1"/>
+          </a:fontRef>
+        </p:style>
+        <p:txBody>
+          <a:bodyPr rtlCol="0" anchor="ctr"/>
+          <a:lstStyle/>
+          <a:p>
+            <a:pPr algn="ctr">
+              <a:defRPr>
+                <a:latin typeface="Roboto"/>
+              </a:defRPr>
+            </a:pPr>
+          </a:p>
+        </p:txBody>
+      </p:sp>
+      <p:sp>
+        <p:nvSpPr>
+          <p:cNvPr id="22" name="TextBox 21"/>
+          <p:cNvSpPr txBox="1"/>
+          <p:nvPr/>
+        </p:nvSpPr>
+        <p:spPr>
+          <a:xfrm>
+            <a:off x="9881372" y="1783080"/>
+            <a:ext cx="1670243" cy="457200"/>
+          </a:xfrm>
+          <a:prstGeom prst="rect">
+            <a:avLst/>
+          </a:prstGeom>
+          <a:noFill/>
+        </p:spPr>
+        <p:txBody>
+          <a:bodyPr wrap="square">
+            <a:spAutoFit/>
+          </a:bodyPr>
+          <a:lstStyle/>
+          <a:p>
+            <a:pPr>
+              <a:defRPr>
+                <a:latin typeface="Roboto"/>
+              </a:defRPr>
+            </a:pPr>
+            <a:r>
+              <a:rPr sz="1200" b="0">
+                <a:solidFill>
+                  <a:srgbClr val="5F6F63"/>
+                </a:solidFill>
+                <a:latin typeface="Roboto"/>
+              </a:rPr>
               <a:t>Materials charged, October</a:t>
             </a:r>
           </a:p>
@@ -8732,14 +9396,14 @@
       </p:sp>
       <p:sp>
         <p:nvSpPr>
-          <p:cNvPr id="15" name="TextBox 14"/>
-          <p:cNvSpPr txBox="1"/>
-          <p:nvPr/>
-        </p:nvSpPr>
-        <p:spPr>
-          <a:xfrm>
-            <a:off x="8341156" y="2240280"/>
-            <a:ext cx="3210458" cy="731520"/>
+          <p:cNvPr id="23" name="TextBox 22"/>
+          <p:cNvSpPr txBox="1"/>
+          <p:nvPr/>
+        </p:nvSpPr>
+        <p:spPr>
+          <a:xfrm>
+            <a:off x="9881372" y="2240280"/>
+            <a:ext cx="1670243" cy="731520"/>
           </a:xfrm>
           <a:prstGeom prst="rect">
             <a:avLst/>
@@ -8771,14 +9435,14 @@
       </p:sp>
       <p:sp>
         <p:nvSpPr>
-          <p:cNvPr id="16" name="TextBox 15"/>
-          <p:cNvSpPr txBox="1"/>
-          <p:nvPr/>
-        </p:nvSpPr>
-        <p:spPr>
-          <a:xfrm>
-            <a:off x="8341156" y="3017520"/>
-            <a:ext cx="3210458" cy="548640"/>
+          <p:cNvPr id="24" name="TextBox 23"/>
+          <p:cNvSpPr txBox="1"/>
+          <p:nvPr/>
+        </p:nvSpPr>
+        <p:spPr>
+          <a:xfrm>
+            <a:off x="9881372" y="3017520"/>
+            <a:ext cx="1670243" cy="548640"/>
           </a:xfrm>
           <a:prstGeom prst="rect">
             <a:avLst/>
@@ -8810,7 +9474,7 @@
       </p:sp>
       <p:sp>
         <p:nvSpPr>
-          <p:cNvPr id="17" name="TextBox 16"/>
+          <p:cNvPr id="25" name="TextBox 24"/>
           <p:cNvSpPr txBox="1"/>
           <p:nvPr/>
         </p:nvSpPr>
@@ -8849,7 +9513,7 @@
       </p:sp>
       <p:sp>
         <p:nvSpPr>
-          <p:cNvPr id="18" name="TextBox 17"/>
+          <p:cNvPr id="26" name="TextBox 25"/>
           <p:cNvSpPr txBox="1"/>
           <p:nvPr/>
         </p:nvSpPr>
@@ -8888,7 +9552,7 @@
       </p:sp>
       <p:sp>
         <p:nvSpPr>
-          <p:cNvPr id="19" name="TextBox 18"/>
+          <p:cNvPr id="27" name="TextBox 26"/>
           <p:cNvSpPr txBox="1"/>
           <p:nvPr/>
         </p:nvSpPr>
@@ -9102,7 +9766,7 @@
                 </a:solidFill>
                 <a:latin typeface="Roboto"/>
               </a:rPr>
-              <a:t>Charged at $145/hour plus materials at cost × 1.3; technician time at $68/hour.</a:t>
+              <a:t>Charged at $145/hour plus materials at cost × 1.3; technician time at $68/hour. Target 35.0% is what to price for; break-even 52.5% only covers overheads and time not charged.</a:t>
             </a:r>
           </a:p>
         </p:txBody>
@@ -9458,7 +10122,7 @@
                 </a:solidFill>
                 <a:latin typeface="Roboto"/>
               </a:rPr>
-              <a:t>Charged at $145/hour plus materials at cost × 1.3; technician time at $68/hour.</a:t>
+              <a:t>Charged at $145/hour plus materials at cost × 1.3; technician time at $68/hour. Target 35.0% is what to price for; break-even 52.5% only covers overheads and time not charged.</a:t>
             </a:r>
           </a:p>
         </p:txBody>
@@ -9990,7 +10654,7 @@
                 </a:solidFill>
                 <a:latin typeface="Roboto"/>
               </a:rPr>
-              <a:t>Call-outs: 43.3% gross margin, below the 52.5% needed to cover overheads.</a:t>
+              <a:t>All call-outs: 43.3% gross margin, 8.3 points over the 35.0% target ($1,846 ahead on $22,298 in October).</a:t>
             </a:r>
           </a:p>
         </p:txBody>
@@ -12273,7 +12937,7 @@
         <p:spPr>
           <a:xfrm>
             <a:off x="457200" y="1645920"/>
-            <a:ext cx="11277295" cy="2011680"/>
+            <a:ext cx="3576218" cy="2011680"/>
           </a:xfrm>
           <a:prstGeom prst="rect">
             <a:avLst/>
@@ -12322,7 +12986,7 @@
         <p:spPr>
           <a:xfrm>
             <a:off x="640080" y="1783080"/>
-            <a:ext cx="10911535" cy="457200"/>
+            <a:ext cx="3210458" cy="457200"/>
           </a:xfrm>
           <a:prstGeom prst="rect">
             <a:avLst/>
@@ -12361,7 +13025,7 @@
         <p:spPr>
           <a:xfrm>
             <a:off x="640080" y="2240280"/>
-            <a:ext cx="10911535" cy="731520"/>
+            <a:ext cx="3210458" cy="731520"/>
           </a:xfrm>
           <a:prstGeom prst="rect">
             <a:avLst/>
@@ -12400,7 +13064,7 @@
         <p:spPr>
           <a:xfrm>
             <a:off x="640080" y="3017520"/>
-            <a:ext cx="10911535" cy="548640"/>
+            <a:ext cx="3210458" cy="548640"/>
           </a:xfrm>
           <a:prstGeom prst="rect">
             <a:avLst/>
@@ -12425,14 +13089,346 @@
                 </a:solidFill>
                 <a:latin typeface="Roboto"/>
               </a:rPr>
-              <a:t>September 37.6%</a:t>
-            </a:r>
-          </a:p>
-        </p:txBody>
-      </p:sp>
-      <p:sp>
-        <p:nvSpPr>
-          <p:cNvPr id="9" name="TextBox 8"/>
+              <a:t>target 35.0%</a:t>
+            </a:r>
+          </a:p>
+        </p:txBody>
+      </p:sp>
+      <p:sp>
+        <p:nvSpPr>
+          <p:cNvPr id="9" name="Rectangle 8"/>
+          <p:cNvSpPr/>
+          <p:nvPr/>
+        </p:nvSpPr>
+        <p:spPr>
+          <a:xfrm>
+            <a:off x="4307738" y="1645920"/>
+            <a:ext cx="3576218" cy="2011680"/>
+          </a:xfrm>
+          <a:prstGeom prst="rect">
+            <a:avLst/>
+          </a:prstGeom>
+          <a:solidFill>
+            <a:srgbClr val="F7FAF7"/>
+          </a:solidFill>
+          <a:ln>
+            <a:solidFill>
+              <a:srgbClr val="DCE8DC"/>
+            </a:solidFill>
+          </a:ln>
+        </p:spPr>
+        <p:style>
+          <a:lnRef idx="1">
+            <a:schemeClr val="accent1"/>
+          </a:lnRef>
+          <a:fillRef idx="3">
+            <a:schemeClr val="accent1"/>
+          </a:fillRef>
+          <a:effectRef idx="2">
+            <a:schemeClr val="accent1"/>
+          </a:effectRef>
+          <a:fontRef idx="minor">
+            <a:schemeClr val="lt1"/>
+          </a:fontRef>
+        </p:style>
+        <p:txBody>
+          <a:bodyPr rtlCol="0" anchor="ctr"/>
+          <a:lstStyle/>
+          <a:p>
+            <a:pPr algn="ctr">
+              <a:defRPr>
+                <a:latin typeface="Roboto"/>
+              </a:defRPr>
+            </a:pPr>
+          </a:p>
+        </p:txBody>
+      </p:sp>
+      <p:sp>
+        <p:nvSpPr>
+          <p:cNvPr id="10" name="TextBox 9"/>
+          <p:cNvSpPr txBox="1"/>
+          <p:nvPr/>
+        </p:nvSpPr>
+        <p:spPr>
+          <a:xfrm>
+            <a:off x="4490618" y="1783080"/>
+            <a:ext cx="3210458" cy="457200"/>
+          </a:xfrm>
+          <a:prstGeom prst="rect">
+            <a:avLst/>
+          </a:prstGeom>
+          <a:noFill/>
+        </p:spPr>
+        <p:txBody>
+          <a:bodyPr wrap="square">
+            <a:spAutoFit/>
+          </a:bodyPr>
+          <a:lstStyle/>
+          <a:p>
+            <a:pPr>
+              <a:defRPr>
+                <a:latin typeface="Roboto"/>
+              </a:defRPr>
+            </a:pPr>
+            <a:r>
+              <a:rPr sz="1200" b="0">
+                <a:solidFill>
+                  <a:srgbClr val="5F6F63"/>
+                </a:solidFill>
+                <a:latin typeface="Roboto"/>
+              </a:rPr>
+              <a:t>Job gross margin, September · All jobs</a:t>
+            </a:r>
+          </a:p>
+        </p:txBody>
+      </p:sp>
+      <p:sp>
+        <p:nvSpPr>
+          <p:cNvPr id="11" name="TextBox 10"/>
+          <p:cNvSpPr txBox="1"/>
+          <p:nvPr/>
+        </p:nvSpPr>
+        <p:spPr>
+          <a:xfrm>
+            <a:off x="4490618" y="2240280"/>
+            <a:ext cx="3210458" cy="731520"/>
+          </a:xfrm>
+          <a:prstGeom prst="rect">
+            <a:avLst/>
+          </a:prstGeom>
+          <a:noFill/>
+        </p:spPr>
+        <p:txBody>
+          <a:bodyPr wrap="square">
+            <a:spAutoFit/>
+          </a:bodyPr>
+          <a:lstStyle/>
+          <a:p>
+            <a:pPr>
+              <a:defRPr>
+                <a:latin typeface="Roboto"/>
+              </a:defRPr>
+            </a:pPr>
+            <a:r>
+              <a:rPr sz="3000" b="1">
+                <a:solidFill>
+                  <a:srgbClr val="2F7A5D"/>
+                </a:solidFill>
+                <a:latin typeface="Roboto"/>
+              </a:rPr>
+              <a:t>37.6%</a:t>
+            </a:r>
+          </a:p>
+        </p:txBody>
+      </p:sp>
+      <p:sp>
+        <p:nvSpPr>
+          <p:cNvPr id="12" name="TextBox 11"/>
+          <p:cNvSpPr txBox="1"/>
+          <p:nvPr/>
+        </p:nvSpPr>
+        <p:spPr>
+          <a:xfrm>
+            <a:off x="4490618" y="3017520"/>
+            <a:ext cx="3210458" cy="548640"/>
+          </a:xfrm>
+          <a:prstGeom prst="rect">
+            <a:avLst/>
+          </a:prstGeom>
+          <a:noFill/>
+        </p:spPr>
+        <p:txBody>
+          <a:bodyPr wrap="square">
+            <a:spAutoFit/>
+          </a:bodyPr>
+          <a:lstStyle/>
+          <a:p>
+            <a:pPr>
+              <a:defRPr>
+                <a:latin typeface="Roboto"/>
+              </a:defRPr>
+            </a:pPr>
+            <a:r>
+              <a:rPr sz="1100" b="0">
+                <a:solidFill>
+                  <a:srgbClr val="5F6F63"/>
+                </a:solidFill>
+                <a:latin typeface="Roboto"/>
+              </a:rPr>
+              <a:t>target 35.0%</a:t>
+            </a:r>
+          </a:p>
+        </p:txBody>
+      </p:sp>
+      <p:sp>
+        <p:nvSpPr>
+          <p:cNvPr id="13" name="Rectangle 12"/>
+          <p:cNvSpPr/>
+          <p:nvPr/>
+        </p:nvSpPr>
+        <p:spPr>
+          <a:xfrm>
+            <a:off x="8158276" y="1645920"/>
+            <a:ext cx="3576218" cy="2011680"/>
+          </a:xfrm>
+          <a:prstGeom prst="rect">
+            <a:avLst/>
+          </a:prstGeom>
+          <a:solidFill>
+            <a:srgbClr val="F7FAF7"/>
+          </a:solidFill>
+          <a:ln>
+            <a:solidFill>
+              <a:srgbClr val="DCE8DC"/>
+            </a:solidFill>
+          </a:ln>
+        </p:spPr>
+        <p:style>
+          <a:lnRef idx="1">
+            <a:schemeClr val="accent1"/>
+          </a:lnRef>
+          <a:fillRef idx="3">
+            <a:schemeClr val="accent1"/>
+          </a:fillRef>
+          <a:effectRef idx="2">
+            <a:schemeClr val="accent1"/>
+          </a:effectRef>
+          <a:fontRef idx="minor">
+            <a:schemeClr val="lt1"/>
+          </a:fontRef>
+        </p:style>
+        <p:txBody>
+          <a:bodyPr rtlCol="0" anchor="ctr"/>
+          <a:lstStyle/>
+          <a:p>
+            <a:pPr algn="ctr">
+              <a:defRPr>
+                <a:latin typeface="Roboto"/>
+              </a:defRPr>
+            </a:pPr>
+          </a:p>
+        </p:txBody>
+      </p:sp>
+      <p:sp>
+        <p:nvSpPr>
+          <p:cNvPr id="14" name="TextBox 13"/>
+          <p:cNvSpPr txBox="1"/>
+          <p:nvPr/>
+        </p:nvSpPr>
+        <p:spPr>
+          <a:xfrm>
+            <a:off x="8341156" y="1783080"/>
+            <a:ext cx="3210458" cy="457200"/>
+          </a:xfrm>
+          <a:prstGeom prst="rect">
+            <a:avLst/>
+          </a:prstGeom>
+          <a:noFill/>
+        </p:spPr>
+        <p:txBody>
+          <a:bodyPr wrap="square">
+            <a:spAutoFit/>
+          </a:bodyPr>
+          <a:lstStyle/>
+          <a:p>
+            <a:pPr>
+              <a:defRPr>
+                <a:latin typeface="Roboto"/>
+              </a:defRPr>
+            </a:pPr>
+            <a:r>
+              <a:rPr sz="1200" b="0">
+                <a:solidFill>
+                  <a:srgbClr val="5F6F63"/>
+                </a:solidFill>
+                <a:latin typeface="Roboto"/>
+              </a:rPr>
+              <a:t>Gross margin jobs need to break even</a:t>
+            </a:r>
+          </a:p>
+        </p:txBody>
+      </p:sp>
+      <p:sp>
+        <p:nvSpPr>
+          <p:cNvPr id="15" name="TextBox 14"/>
+          <p:cNvSpPr txBox="1"/>
+          <p:nvPr/>
+        </p:nvSpPr>
+        <p:spPr>
+          <a:xfrm>
+            <a:off x="8341156" y="2240280"/>
+            <a:ext cx="3210458" cy="731520"/>
+          </a:xfrm>
+          <a:prstGeom prst="rect">
+            <a:avLst/>
+          </a:prstGeom>
+          <a:noFill/>
+        </p:spPr>
+        <p:txBody>
+          <a:bodyPr wrap="square">
+            <a:spAutoFit/>
+          </a:bodyPr>
+          <a:lstStyle/>
+          <a:p>
+            <a:pPr>
+              <a:defRPr>
+                <a:latin typeface="Roboto"/>
+              </a:defRPr>
+            </a:pPr>
+            <a:r>
+              <a:rPr sz="3000" b="1">
+                <a:solidFill>
+                  <a:srgbClr val="2F7A5D"/>
+                </a:solidFill>
+                <a:latin typeface="Roboto"/>
+              </a:rPr>
+              <a:t>52.5%</a:t>
+            </a:r>
+          </a:p>
+        </p:txBody>
+      </p:sp>
+      <p:sp>
+        <p:nvSpPr>
+          <p:cNvPr id="16" name="TextBox 15"/>
+          <p:cNvSpPr txBox="1"/>
+          <p:nvPr/>
+        </p:nvSpPr>
+        <p:spPr>
+          <a:xfrm>
+            <a:off x="8341156" y="3017520"/>
+            <a:ext cx="3210458" cy="548640"/>
+          </a:xfrm>
+          <a:prstGeom prst="rect">
+            <a:avLst/>
+          </a:prstGeom>
+          <a:noFill/>
+        </p:spPr>
+        <p:txBody>
+          <a:bodyPr wrap="square">
+            <a:spAutoFit/>
+          </a:bodyPr>
+          <a:lstStyle/>
+          <a:p>
+            <a:pPr>
+              <a:defRPr>
+                <a:latin typeface="Roboto"/>
+              </a:defRPr>
+            </a:pPr>
+            <a:r>
+              <a:rPr sz="1100" b="0">
+                <a:solidFill>
+                  <a:srgbClr val="5F6F63"/>
+                </a:solidFill>
+                <a:latin typeface="Roboto"/>
+              </a:rPr>
+              <a:t>covers overheads and time not charged (October)</a:t>
+            </a:r>
+          </a:p>
+        </p:txBody>
+      </p:sp>
+      <p:sp>
+        <p:nvSpPr>
+          <p:cNvPr id="17" name="TextBox 16"/>
           <p:cNvSpPr txBox="1"/>
           <p:nvPr/>
         </p:nvSpPr>
@@ -12471,7 +13467,7 @@
       </p:sp>
       <p:sp>
         <p:nvSpPr>
-          <p:cNvPr id="10" name="TextBox 9"/>
+          <p:cNvPr id="18" name="TextBox 17"/>
           <p:cNvSpPr txBox="1"/>
           <p:nvPr/>
         </p:nvSpPr>
@@ -12510,7 +13506,7 @@
       </p:sp>
       <p:sp>
         <p:nvSpPr>
-          <p:cNvPr id="11" name="TextBox 10"/>
+          <p:cNvPr id="19" name="TextBox 18"/>
           <p:cNvSpPr txBox="1"/>
           <p:nvPr/>
         </p:nvSpPr>
@@ -12724,7 +13720,7 @@
                 </a:solidFill>
                 <a:latin typeface="Roboto"/>
               </a:rPr>
-              <a:t>Revenue less materials, subcontractors and technician time at $68/hour.</a:t>
+              <a:t>Revenue less materials, subcontractors and technician time at $68/hour. Target 35.0% is what to price for; break-even 52.5% only covers overheads and time not charged.</a:t>
             </a:r>
           </a:p>
         </p:txBody>
@@ -13080,7 +14076,7 @@
                 </a:solidFill>
                 <a:latin typeface="Roboto"/>
               </a:rPr>
-              <a:t>Revenue less materials, subcontractors and technician time at $68/hour.</a:t>
+              <a:t>Revenue less materials, subcontractors and technician time at $68/hour. Target 35.0% is what to price for; break-even 52.5% only covers overheads and time not charged.</a:t>
             </a:r>
           </a:p>
         </p:txBody>
@@ -13612,7 +14608,7 @@
                 </a:solidFill>
                 <a:latin typeface="Roboto"/>
               </a:rPr>
-              <a:t>Maintenance contracts: 59.5% gross margin, the most profitable work you do. Installations: 26.1% gross margin, below the 52.5% needed to cover overheads.</a:t>
+              <a:t>Installations: 26.1% gross margin, 8.9 points under the 35.0% target: about $6,268 on $70,800 of revenue in October. It's below the 52.5% needed to cover overheads, too. Maintenance contracts: 59.5% gross margin, 24.5 points over the 35.0% target ($8,754 ahead on $35,800 in October).</a:t>
             </a:r>
           </a:p>
         </p:txBody>
@@ -13886,7 +14882,7 @@
         <p:spPr>
           <a:xfrm>
             <a:off x="457200" y="1645920"/>
-            <a:ext cx="11277295" cy="2011680"/>
+            <a:ext cx="3576218" cy="2011680"/>
           </a:xfrm>
           <a:prstGeom prst="rect">
             <a:avLst/>
@@ -13935,7 +14931,7 @@
         <p:spPr>
           <a:xfrm>
             <a:off x="640080" y="1783080"/>
-            <a:ext cx="10911535" cy="457200"/>
+            <a:ext cx="3210458" cy="457200"/>
           </a:xfrm>
           <a:prstGeom prst="rect">
             <a:avLst/>
@@ -13974,7 +14970,7 @@
         <p:spPr>
           <a:xfrm>
             <a:off x="640080" y="2240280"/>
-            <a:ext cx="10911535" cy="731520"/>
+            <a:ext cx="3210458" cy="731520"/>
           </a:xfrm>
           <a:prstGeom prst="rect">
             <a:avLst/>
@@ -14013,7 +15009,7 @@
         <p:spPr>
           <a:xfrm>
             <a:off x="640080" y="3017520"/>
-            <a:ext cx="10911535" cy="548640"/>
+            <a:ext cx="3210458" cy="548640"/>
           </a:xfrm>
           <a:prstGeom prst="rect">
             <a:avLst/>
@@ -14038,14 +15034,346 @@
                 </a:solidFill>
                 <a:latin typeface="Roboto"/>
               </a:rPr>
-              <a:t>September 59.5%</a:t>
-            </a:r>
-          </a:p>
-        </p:txBody>
-      </p:sp>
-      <p:sp>
-        <p:nvSpPr>
-          <p:cNvPr id="9" name="TextBox 8"/>
+              <a:t>target 35.0%</a:t>
+            </a:r>
+          </a:p>
+        </p:txBody>
+      </p:sp>
+      <p:sp>
+        <p:nvSpPr>
+          <p:cNvPr id="9" name="Rectangle 8"/>
+          <p:cNvSpPr/>
+          <p:nvPr/>
+        </p:nvSpPr>
+        <p:spPr>
+          <a:xfrm>
+            <a:off x="4307738" y="1645920"/>
+            <a:ext cx="3576218" cy="2011680"/>
+          </a:xfrm>
+          <a:prstGeom prst="rect">
+            <a:avLst/>
+          </a:prstGeom>
+          <a:solidFill>
+            <a:srgbClr val="F7FAF7"/>
+          </a:solidFill>
+          <a:ln>
+            <a:solidFill>
+              <a:srgbClr val="DCE8DC"/>
+            </a:solidFill>
+          </a:ln>
+        </p:spPr>
+        <p:style>
+          <a:lnRef idx="1">
+            <a:schemeClr val="accent1"/>
+          </a:lnRef>
+          <a:fillRef idx="3">
+            <a:schemeClr val="accent1"/>
+          </a:fillRef>
+          <a:effectRef idx="2">
+            <a:schemeClr val="accent1"/>
+          </a:effectRef>
+          <a:fontRef idx="minor">
+            <a:schemeClr val="lt1"/>
+          </a:fontRef>
+        </p:style>
+        <p:txBody>
+          <a:bodyPr rtlCol="0" anchor="ctr"/>
+          <a:lstStyle/>
+          <a:p>
+            <a:pPr algn="ctr">
+              <a:defRPr>
+                <a:latin typeface="Roboto"/>
+              </a:defRPr>
+            </a:pPr>
+          </a:p>
+        </p:txBody>
+      </p:sp>
+      <p:sp>
+        <p:nvSpPr>
+          <p:cNvPr id="10" name="TextBox 9"/>
+          <p:cNvSpPr txBox="1"/>
+          <p:nvPr/>
+        </p:nvSpPr>
+        <p:spPr>
+          <a:xfrm>
+            <a:off x="4490618" y="1783080"/>
+            <a:ext cx="3210458" cy="457200"/>
+          </a:xfrm>
+          <a:prstGeom prst="rect">
+            <a:avLst/>
+          </a:prstGeom>
+          <a:noFill/>
+        </p:spPr>
+        <p:txBody>
+          <a:bodyPr wrap="square">
+            <a:spAutoFit/>
+          </a:bodyPr>
+          <a:lstStyle/>
+          <a:p>
+            <a:pPr>
+              <a:defRPr>
+                <a:latin typeface="Roboto"/>
+              </a:defRPr>
+            </a:pPr>
+            <a:r>
+              <a:rPr sz="1200" b="0">
+                <a:solidFill>
+                  <a:srgbClr val="5F6F63"/>
+                </a:solidFill>
+                <a:latin typeface="Roboto"/>
+              </a:rPr>
+              <a:t>Job gross margin, September · Maintenance contracts</a:t>
+            </a:r>
+          </a:p>
+        </p:txBody>
+      </p:sp>
+      <p:sp>
+        <p:nvSpPr>
+          <p:cNvPr id="11" name="TextBox 10"/>
+          <p:cNvSpPr txBox="1"/>
+          <p:nvPr/>
+        </p:nvSpPr>
+        <p:spPr>
+          <a:xfrm>
+            <a:off x="4490618" y="2240280"/>
+            <a:ext cx="3210458" cy="731520"/>
+          </a:xfrm>
+          <a:prstGeom prst="rect">
+            <a:avLst/>
+          </a:prstGeom>
+          <a:noFill/>
+        </p:spPr>
+        <p:txBody>
+          <a:bodyPr wrap="square">
+            <a:spAutoFit/>
+          </a:bodyPr>
+          <a:lstStyle/>
+          <a:p>
+            <a:pPr>
+              <a:defRPr>
+                <a:latin typeface="Roboto"/>
+              </a:defRPr>
+            </a:pPr>
+            <a:r>
+              <a:rPr sz="3000" b="1">
+                <a:solidFill>
+                  <a:srgbClr val="2F7A5D"/>
+                </a:solidFill>
+                <a:latin typeface="Roboto"/>
+              </a:rPr>
+              <a:t>59.5%</a:t>
+            </a:r>
+          </a:p>
+        </p:txBody>
+      </p:sp>
+      <p:sp>
+        <p:nvSpPr>
+          <p:cNvPr id="12" name="TextBox 11"/>
+          <p:cNvSpPr txBox="1"/>
+          <p:nvPr/>
+        </p:nvSpPr>
+        <p:spPr>
+          <a:xfrm>
+            <a:off x="4490618" y="3017520"/>
+            <a:ext cx="3210458" cy="548640"/>
+          </a:xfrm>
+          <a:prstGeom prst="rect">
+            <a:avLst/>
+          </a:prstGeom>
+          <a:noFill/>
+        </p:spPr>
+        <p:txBody>
+          <a:bodyPr wrap="square">
+            <a:spAutoFit/>
+          </a:bodyPr>
+          <a:lstStyle/>
+          <a:p>
+            <a:pPr>
+              <a:defRPr>
+                <a:latin typeface="Roboto"/>
+              </a:defRPr>
+            </a:pPr>
+            <a:r>
+              <a:rPr sz="1100" b="0">
+                <a:solidFill>
+                  <a:srgbClr val="5F6F63"/>
+                </a:solidFill>
+                <a:latin typeface="Roboto"/>
+              </a:rPr>
+              <a:t>target 35.0%</a:t>
+            </a:r>
+          </a:p>
+        </p:txBody>
+      </p:sp>
+      <p:sp>
+        <p:nvSpPr>
+          <p:cNvPr id="13" name="Rectangle 12"/>
+          <p:cNvSpPr/>
+          <p:nvPr/>
+        </p:nvSpPr>
+        <p:spPr>
+          <a:xfrm>
+            <a:off x="8158276" y="1645920"/>
+            <a:ext cx="3576218" cy="2011680"/>
+          </a:xfrm>
+          <a:prstGeom prst="rect">
+            <a:avLst/>
+          </a:prstGeom>
+          <a:solidFill>
+            <a:srgbClr val="F7FAF7"/>
+          </a:solidFill>
+          <a:ln>
+            <a:solidFill>
+              <a:srgbClr val="DCE8DC"/>
+            </a:solidFill>
+          </a:ln>
+        </p:spPr>
+        <p:style>
+          <a:lnRef idx="1">
+            <a:schemeClr val="accent1"/>
+          </a:lnRef>
+          <a:fillRef idx="3">
+            <a:schemeClr val="accent1"/>
+          </a:fillRef>
+          <a:effectRef idx="2">
+            <a:schemeClr val="accent1"/>
+          </a:effectRef>
+          <a:fontRef idx="minor">
+            <a:schemeClr val="lt1"/>
+          </a:fontRef>
+        </p:style>
+        <p:txBody>
+          <a:bodyPr rtlCol="0" anchor="ctr"/>
+          <a:lstStyle/>
+          <a:p>
+            <a:pPr algn="ctr">
+              <a:defRPr>
+                <a:latin typeface="Roboto"/>
+              </a:defRPr>
+            </a:pPr>
+          </a:p>
+        </p:txBody>
+      </p:sp>
+      <p:sp>
+        <p:nvSpPr>
+          <p:cNvPr id="14" name="TextBox 13"/>
+          <p:cNvSpPr txBox="1"/>
+          <p:nvPr/>
+        </p:nvSpPr>
+        <p:spPr>
+          <a:xfrm>
+            <a:off x="8341156" y="1783080"/>
+            <a:ext cx="3210458" cy="457200"/>
+          </a:xfrm>
+          <a:prstGeom prst="rect">
+            <a:avLst/>
+          </a:prstGeom>
+          <a:noFill/>
+        </p:spPr>
+        <p:txBody>
+          <a:bodyPr wrap="square">
+            <a:spAutoFit/>
+          </a:bodyPr>
+          <a:lstStyle/>
+          <a:p>
+            <a:pPr>
+              <a:defRPr>
+                <a:latin typeface="Roboto"/>
+              </a:defRPr>
+            </a:pPr>
+            <a:r>
+              <a:rPr sz="1200" b="0">
+                <a:solidFill>
+                  <a:srgbClr val="5F6F63"/>
+                </a:solidFill>
+                <a:latin typeface="Roboto"/>
+              </a:rPr>
+              <a:t>Gross margin jobs need to break even</a:t>
+            </a:r>
+          </a:p>
+        </p:txBody>
+      </p:sp>
+      <p:sp>
+        <p:nvSpPr>
+          <p:cNvPr id="15" name="TextBox 14"/>
+          <p:cNvSpPr txBox="1"/>
+          <p:nvPr/>
+        </p:nvSpPr>
+        <p:spPr>
+          <a:xfrm>
+            <a:off x="8341156" y="2240280"/>
+            <a:ext cx="3210458" cy="731520"/>
+          </a:xfrm>
+          <a:prstGeom prst="rect">
+            <a:avLst/>
+          </a:prstGeom>
+          <a:noFill/>
+        </p:spPr>
+        <p:txBody>
+          <a:bodyPr wrap="square">
+            <a:spAutoFit/>
+          </a:bodyPr>
+          <a:lstStyle/>
+          <a:p>
+            <a:pPr>
+              <a:defRPr>
+                <a:latin typeface="Roboto"/>
+              </a:defRPr>
+            </a:pPr>
+            <a:r>
+              <a:rPr sz="3000" b="1">
+                <a:solidFill>
+                  <a:srgbClr val="2F7A5D"/>
+                </a:solidFill>
+                <a:latin typeface="Roboto"/>
+              </a:rPr>
+              <a:t>52.5%</a:t>
+            </a:r>
+          </a:p>
+        </p:txBody>
+      </p:sp>
+      <p:sp>
+        <p:nvSpPr>
+          <p:cNvPr id="16" name="TextBox 15"/>
+          <p:cNvSpPr txBox="1"/>
+          <p:nvPr/>
+        </p:nvSpPr>
+        <p:spPr>
+          <a:xfrm>
+            <a:off x="8341156" y="3017520"/>
+            <a:ext cx="3210458" cy="548640"/>
+          </a:xfrm>
+          <a:prstGeom prst="rect">
+            <a:avLst/>
+          </a:prstGeom>
+          <a:noFill/>
+        </p:spPr>
+        <p:txBody>
+          <a:bodyPr wrap="square">
+            <a:spAutoFit/>
+          </a:bodyPr>
+          <a:lstStyle/>
+          <a:p>
+            <a:pPr>
+              <a:defRPr>
+                <a:latin typeface="Roboto"/>
+              </a:defRPr>
+            </a:pPr>
+            <a:r>
+              <a:rPr sz="1100" b="0">
+                <a:solidFill>
+                  <a:srgbClr val="5F6F63"/>
+                </a:solidFill>
+                <a:latin typeface="Roboto"/>
+              </a:rPr>
+              <a:t>covers overheads and time not charged (October)</a:t>
+            </a:r>
+          </a:p>
+        </p:txBody>
+      </p:sp>
+      <p:sp>
+        <p:nvSpPr>
+          <p:cNvPr id="17" name="TextBox 16"/>
           <p:cNvSpPr txBox="1"/>
           <p:nvPr/>
         </p:nvSpPr>
@@ -14084,7 +15412,7 @@
       </p:sp>
       <p:sp>
         <p:nvSpPr>
-          <p:cNvPr id="10" name="TextBox 9"/>
+          <p:cNvPr id="18" name="TextBox 17"/>
           <p:cNvSpPr txBox="1"/>
           <p:nvPr/>
         </p:nvSpPr>
@@ -14123,7 +15451,7 @@
       </p:sp>
       <p:sp>
         <p:nvSpPr>
-          <p:cNvPr id="11" name="TextBox 10"/>
+          <p:cNvPr id="19" name="TextBox 18"/>
           <p:cNvSpPr txBox="1"/>
           <p:nvPr/>
         </p:nvSpPr>
@@ -14337,7 +15665,7 @@
                 </a:solidFill>
                 <a:latin typeface="Roboto"/>
               </a:rPr>
-              <a:t>The month's fee less materials and technician time at $68/hour.</a:t>
+              <a:t>The month's fee less materials and technician time at $68/hour. Target 35.0% is what to price for; break-even 52.5% only covers overheads and time not charged.</a:t>
             </a:r>
           </a:p>
         </p:txBody>

--- a/media/exports/reports/2025-10/job-margins.pptx
+++ b/media/exports/reports/2025-10/job-margins.pptx
@@ -196,13 +196,13 @@
                 <c:formatCode>0.0"%";[Red](0.0"%")</c:formatCode>
                 <c:ptCount val="3"/>
                 <c:pt idx="0">
-                  <c:v>26.1</c:v>
+                  <c:v>34.1</c:v>
                 </c:pt>
                 <c:pt idx="1">
-                  <c:v>43.3</c:v>
+                  <c:v>47.7</c:v>
                 </c:pt>
                 <c:pt idx="2">
-                  <c:v>59.5</c:v>
+                  <c:v>63.8</c:v>
                 </c:pt>
               </c:numCache>
             </c:numRef>
@@ -266,7 +266,7 @@
       <c:valAx>
         <c:axId val="-2113994440"/>
         <c:scaling>
-          <c:max val="68.425"/>
+          <c:max val="73.36999999999999"/>
           <c:min val="0.0"/>
         </c:scaling>
         <c:delete/>
@@ -452,16 +452,16 @@
                   <c:v>Chermside retail centre</c:v>
                 </c:pt>
                 <c:pt idx="6">
+                  <c:v>Southbank cafe group</c:v>
+                </c:pt>
+                <c:pt idx="7">
                   <c:v>Fortitude Valley hotel</c:v>
                 </c:pt>
-                <c:pt idx="7">
+                <c:pt idx="8">
                   <c:v>Riverside Apartments (strata)</c:v>
                 </c:pt>
-                <c:pt idx="8">
+                <c:pt idx="9">
                   <c:v>Newstead gym</c:v>
-                </c:pt>
-                <c:pt idx="9">
-                  <c:v>Southbank cafe group</c:v>
                 </c:pt>
                 <c:pt idx="10">
                   <c:v>Ashgrove aged care</c:v>
@@ -479,40 +479,40 @@
                 <c:formatCode>0.0"%";[Red](0.0"%")</c:formatCode>
                 <c:ptCount val="12"/>
                 <c:pt idx="0">
-                  <c:v>58.2</c:v>
+                  <c:v>62.9</c:v>
                 </c:pt>
                 <c:pt idx="1">
-                  <c:v>58.8</c:v>
+                  <c:v>63.1</c:v>
                 </c:pt>
                 <c:pt idx="2">
-                  <c:v>58.8</c:v>
+                  <c:v>63.1</c:v>
                 </c:pt>
                 <c:pt idx="3">
-                  <c:v>59.0</c:v>
+                  <c:v>63.4</c:v>
                 </c:pt>
                 <c:pt idx="4">
-                  <c:v>59.0</c:v>
+                  <c:v>63.6</c:v>
                 </c:pt>
                 <c:pt idx="5">
-                  <c:v>59.4</c:v>
+                  <c:v>63.8</c:v>
                 </c:pt>
                 <c:pt idx="6">
-                  <c:v>59.9</c:v>
+                  <c:v>64.0</c:v>
                 </c:pt>
                 <c:pt idx="7">
-                  <c:v>59.9</c:v>
+                  <c:v>64.2</c:v>
                 </c:pt>
                 <c:pt idx="8">
-                  <c:v>59.9</c:v>
+                  <c:v>64.3</c:v>
                 </c:pt>
                 <c:pt idx="9">
-                  <c:v>60.0</c:v>
+                  <c:v>64.3</c:v>
                 </c:pt>
                 <c:pt idx="10">
-                  <c:v>60.0</c:v>
+                  <c:v>64.4</c:v>
                 </c:pt>
                 <c:pt idx="11">
-                  <c:v>61.1</c:v>
+                  <c:v>65.1</c:v>
                 </c:pt>
               </c:numCache>
             </c:numRef>
@@ -576,7 +576,7 @@
       <c:valAx>
         <c:axId val="-2113994440"/>
         <c:scaling>
-          <c:max val="70.265"/>
+          <c:max val="74.86499999999998"/>
           <c:min val="0.0"/>
         </c:scaling>
         <c:delete/>
@@ -654,7 +654,7 @@
             <c:idx val="1"/>
             <c:spPr>
               <a:solidFill>
-                <a:srgbClr val="7D8790"/>
+                <a:srgbClr val="0E9F6E"/>
               </a:solidFill>
             </c:spPr>
           </c:dPt>
@@ -690,13 +690,13 @@
                 <c:formatCode>0.0"%";[Red](0.0"%")</c:formatCode>
                 <c:ptCount val="3"/>
                 <c:pt idx="0">
-                  <c:v>17.3</c:v>
+                  <c:v>26.2</c:v>
                 </c:pt>
                 <c:pt idx="1">
-                  <c:v>32.5</c:v>
+                  <c:v>39.7</c:v>
                 </c:pt>
                 <c:pt idx="2">
-                  <c:v>37.8</c:v>
+                  <c:v>44.4</c:v>
                 </c:pt>
               </c:numCache>
             </c:numRef>
@@ -760,7 +760,7 @@
       <c:valAx>
         <c:axId val="-2113994440"/>
         <c:scaling>
-          <c:max val="60.37499999999999"/>
+          <c:max val="71.3"/>
           <c:min val="0.0"/>
         </c:scaling>
         <c:delete/>
@@ -907,22 +907,22 @@
                 <c:formatCode>0.0"%";[Red](0.0"%")</c:formatCode>
                 <c:ptCount val="6"/>
                 <c:pt idx="0">
-                  <c:v>37.8</c:v>
+                  <c:v>41.4</c:v>
                 </c:pt>
                 <c:pt idx="1">
-                  <c:v>38.2</c:v>
+                  <c:v>42.0</c:v>
                 </c:pt>
                 <c:pt idx="2">
-                  <c:v>40.7</c:v>
+                  <c:v>44.7</c:v>
                 </c:pt>
                 <c:pt idx="3">
-                  <c:v>44.1</c:v>
+                  <c:v>48.6</c:v>
                 </c:pt>
                 <c:pt idx="4">
-                  <c:v>45.7</c:v>
+                  <c:v>50.3</c:v>
                 </c:pt>
                 <c:pt idx="5">
-                  <c:v>45.9</c:v>
+                  <c:v>50.5</c:v>
                 </c:pt>
               </c:numCache>
             </c:numRef>
@@ -986,7 +986,7 @@
       <c:valAx>
         <c:axId val="-2113994440"/>
         <c:scaling>
-          <c:max val="60.37499999999999"/>
+          <c:max val="71.3"/>
           <c:min val="0.0"/>
         </c:scaling>
         <c:delete/>
@@ -1119,43 +1119,43 @@
                 <c:formatCode>0.0"%";[Red](0.0"%")</c:formatCode>
                 <c:ptCount val="13"/>
                 <c:pt idx="0">
-                  <c:v>33.1</c:v>
+                  <c:v>40.1</c:v>
                 </c:pt>
                 <c:pt idx="1">
-                  <c:v>37.0</c:v>
+                  <c:v>43.5</c:v>
                 </c:pt>
                 <c:pt idx="2">
-                  <c:v>40.4</c:v>
+                  <c:v>46.5</c:v>
                 </c:pt>
                 <c:pt idx="3">
-                  <c:v>42.7</c:v>
+                  <c:v>48.5</c:v>
                 </c:pt>
                 <c:pt idx="4">
-                  <c:v>36.4</c:v>
+                  <c:v>42.9</c:v>
                 </c:pt>
                 <c:pt idx="5">
-                  <c:v>36.5</c:v>
+                  <c:v>43.0</c:v>
                 </c:pt>
                 <c:pt idx="6">
-                  <c:v>38.4</c:v>
+                  <c:v>44.7</c:v>
                 </c:pt>
                 <c:pt idx="7">
-                  <c:v>35.5</c:v>
+                  <c:v>42.1</c:v>
                 </c:pt>
                 <c:pt idx="8">
-                  <c:v>40.5</c:v>
+                  <c:v>46.8</c:v>
                 </c:pt>
                 <c:pt idx="9">
-                  <c:v>35.6</c:v>
+                  <c:v>42.3</c:v>
                 </c:pt>
                 <c:pt idx="10">
-                  <c:v>43.8</c:v>
+                  <c:v>49.5</c:v>
                 </c:pt>
                 <c:pt idx="11">
-                  <c:v>37.6</c:v>
+                  <c:v>44.0</c:v>
                 </c:pt>
                 <c:pt idx="12">
-                  <c:v>38.4</c:v>
+                  <c:v>44.7</c:v>
                 </c:pt>
               </c:numCache>
             </c:numRef>
@@ -1204,7 +1204,7 @@
         <c:axId val="-2100718248"/>
         <c:scaling>
           <c:orientation val="minMax"/>
-          <c:max val="50.0"/>
+          <c:max val="60.0"/>
           <c:min val="0.0"/>
         </c:scaling>
         <c:delete val="0"/>
@@ -1729,7 +1729,7 @@
           <a:lstStyle/>
           <a:p>
             <a:r>
-              <a:t>From gross margin to profit. October's jobs made $49,446 gross margin (38.4%). Technician time not charged to jobs took $9,638 and overheads $57,980, leaving ($18,172) profit before tax ((14.1%) of revenue). To cover overheads, jobs need a 52.5% gross margin on average.</a:t>
+              <a:t>From gross margin to profit. October's jobs made $64,114 gross margin (44.7%). Technician time not charged to jobs took $31,056 and overheads $57,980, leaving ($24,922) profit before tax ((17.4%) of revenue). To cover overheads, jobs need a 62.0% gross margin on average.</a:t>
             </a:r>
           </a:p>
         </p:txBody>
@@ -1799,7 +1799,7 @@
           <a:lstStyle/>
           <a:p>
             <a:r>
-              <a:t>All jobs. Job gross margin, October · All jobs: 38.4%; Job gross margin, September · All jobs: 37.6%; Gross margin jobs need to break even: 52.5%. In October maintenance contracts made a 59.5% job gross margin, installations made a 26.1% job gross margin, call-outs and repairs made a 43.3% job gross margin (technician time at $68 an hour, wages and all on-costs). Jobs need 52.5% just to cover overheads. Installations: 26.1% gross margin, 8.9 points under the 35.0% target: about $6,268 on $70,800 of revenue in October. It's below the 52.5% needed to cover overheads, too. Maintenance contracts: 59.5% gross margin, 24.5 points over the 35.0% target ($8,754 ahead on $35,800 in October).</a:t>
+              <a:t>All jobs. Job gross margin, October · All jobs: 44.7%; Job gross margin, September · All jobs: 44.0%; Gross margin jobs need to break even: 62.0%. In October maintenance contracts made a 63.8% job gross margin, installations made a 34.1% job gross margin, call-outs and repairs made a 47.7% job gross margin (technician time at $68 an hour, wages and all on-costs). Jobs need 62.0% just to cover overheads. Installations: 34.1% gross margin, 0.9 points under the 35.0% target: about $743 on $79,300 of revenue in October. It's below the 62.0% needed to cover overheads, too. Maintenance contracts: 63.8% gross margin, 28.8 points over the 35.0% target ($11,549 ahead on $40,100 in October).</a:t>
             </a:r>
           </a:p>
         </p:txBody>
@@ -1869,7 +1869,7 @@
           <a:lstStyle/>
           <a:p>
             <a:r>
-              <a:t>Maintenance contracts. Job gross margin, October · Maintenance contracts: 59.5%; Job gross margin, September · Maintenance contracts: 59.5%; Gross margin jobs need to break even: 52.5%. All 12 contracts made more than the 35.0% job gross margin target. The thinnest was Kangaroo Point townhouses at 58.2% job gross margin: 14.0 h of technician time on a $2,400 monthly fee. The thinnest, Kangaroo Point townhouses: 58.2% gross margin, 23.3 points over the 35.0% target ($558 ahead on $2,400 in October). All maintenance contracts: 59.5% gross margin, 24.5 points over the 35.0% target ($8,754 ahead on $35,800 in October).</a:t>
+              <a:t>Maintenance contracts. Job gross margin, October · Maintenance contracts: 63.8%; Job gross margin, September · Maintenance contracts: 63.9%; Gross margin jobs need to break even: 62.0%. All 12 contracts made more than the 35.0% job gross margin target. The thinnest was Kangaroo Point townhouses at 62.9% job gross margin: 14.0 h of technician time on a $2,700 monthly fee. The thinnest, Kangaroo Point townhouses: 62.9% gross margin, 27.9 points over the 35.0% target ($753 ahead on $2,700 in October). All maintenance contracts: 63.8% gross margin, 28.8 points over the 35.0% target ($11,549 ahead on $40,100 in October).</a:t>
             </a:r>
           </a:p>
         </p:txBody>
@@ -1939,7 +1939,7 @@
           <a:lstStyle/>
           <a:p>
             <a:r>
-              <a:t>Job gross margin on each maintenance contract, October 2025. The month's fee less materials and technician time at $68/hour. Target 35.0% is what to price for; break-even 52.5% only covers overheads and time not charged.</a:t>
+              <a:t>Job gross margin on each maintenance contract, October 2025. The month's fee less materials and technician time at $68/hour. Target 35.0% is what to price for; break-even 62.0% only covers overheads and time not charged.</a:t>
             </a:r>
           </a:p>
         </p:txBody>
@@ -2009,7 +2009,7 @@
           <a:lstStyle/>
           <a:p>
             <a:r>
-              <a:t>Installations. Job gross margin, October · Installations: 26.1%; Job gross margin, September · Installations: 26.2%; Gross margin jobs need to break even: 52.5%. 2 of the 3 installation jobs invoiced in October made less than the 35.0% job gross margin target. The Salisbury shop solar and battery made a 17.3% job gross margin: 120.0 h of technician time ($8,160) and $3,900 of subcontractors on a $35,500 job. Jobs need 52.5% gross margin just to cover overheads. 2 installations under the 35.0% target, worth about $6,744 between them on $54,000 of revenue. The biggest gap, Salisbury shop solar and battery: 17.3% gross margin, 17.7 points under the 35.0% target: about $6,285 on $35,500 of revenue in October. It's below the 52.5% needed to cover overheads, too.</a:t>
+              <a:t>Installations. Job gross margin, October · Installations: 34.1%; Job gross margin, September · Installations: 34.2%; Gross margin jobs need to break even: 62.0%. 1 of the 3 installation jobs invoiced in October made less than the 35.0% job gross margin target. The Salisbury shop solar and battery made a 26.2% job gross margin: 120.0 h of technician time ($8,160) and $3,900 of subcontractors on a $39,800 job. Jobs need 62.0% gross margin just to cover overheads. 1 installation under the 35.0% target, worth about $3,490 between them on $39,800 of revenue. The biggest gap, Salisbury shop solar and battery: 26.2% gross margin, 8.8 points under the 35.0% target: about $3,490 on $39,800 of revenue in October. It's below the 62.0% needed to cover overheads, too.</a:t>
             </a:r>
           </a:p>
         </p:txBody>
@@ -2079,7 +2079,7 @@
           <a:lstStyle/>
           <a:p>
             <a:r>
-              <a:t>Call-outs and repairs. Job gross margin, October · Call-outs and repairs: 43.3%; Job gross margin, September · Call-outs and repairs: 44.0%; Gross margin jobs need to break even: 52.5%; Technician time charged, October: $15,005; Materials charged, October: $7,293. 43 call-outs in October billed $15,005 of technician time and $7,293 of materials ($5,610 at cost plus 30%), and made a 43.3% job gross margin between them. Gross margins run from 37.8% to 45.9% by length: the hourly rate covers technician time comfortably, so the gross margin mostly moves with how much material goes on the van. All call-outs: 43.3% gross margin, 8.3 points over the 35.0% target ($1,846 ahead on $22,298 in October).</a:t>
+              <a:t>Call-outs and repairs. Job gross margin, October · Call-outs and repairs: 47.7%; Job gross margin, September · Call-outs and repairs: 48.5%; Gross margin jobs need to break even: 62.0%; Technician time charged, October: $16,873; Materials charged, October: $7,293. 43 call-outs in October billed $16,873 of technician time and $7,293 of materials ($5,610 at cost plus 30%), and made a 47.7% job gross margin between them. Gross margins run from 41.4% to 50.5% by length: the hourly rate covers technician time comfortably, so the gross margin mostly moves with how much material goes on the van. All call-outs: 47.7% gross margin, 12.7 points over the 35.0% target ($3,060 ahead on $24,166 in October).</a:t>
             </a:r>
           </a:p>
         </p:txBody>
@@ -5564,7 +5564,7 @@
                 </a:solidFill>
                 <a:latin typeface="Roboto"/>
               </a:rPr>
-              <a:t>Data retrieved 2pm, Tue 6 Oct 2026 · Generated 8 Oct 2026, 9:35am · Sample data · Made with Python (python-pptx)</a:t>
+              <a:t>Data retrieved 2pm, Tue 6 Oct 2026 · Generated 9 Oct 2026, 8:41am · Sample data · Made with Python (python-pptx)</a:t>
             </a:r>
           </a:p>
         </p:txBody>
@@ -5783,7 +5783,7 @@
                 </a:solidFill>
                 <a:latin typeface="Roboto"/>
               </a:rPr>
-              <a:t>October's jobs made $49,446 gross margin (38.4%). Technician time not charged to jobs took $9,638 and overheads $57,980, leaving ($18,172) profit before tax ((14.1%) of revenue). To cover overheads, jobs need a 52.5% gross margin on average.</a:t>
+              <a:t>October's jobs made $64,114 gross margin (44.7%). Technician time not charged to jobs took $31,056 and overheads $57,980, leaving ($24,922) profit before tax ((17.4%) of revenue). To cover overheads, jobs need a 62.0% gross margin on average.</a:t>
             </a:r>
           </a:p>
         </p:txBody>
@@ -5855,7 +5855,7 @@
                           </a:solidFill>
                           <a:latin typeface="Roboto"/>
                         </a:rPr>
-                        <a:t>$49,446</a:t>
+                        <a:t>$64,114</a:t>
                       </a:r>
                     </a:p>
                   </a:txBody>
@@ -5911,7 +5911,7 @@
                           </a:solidFill>
                           <a:latin typeface="Roboto"/>
                         </a:rPr>
-                        <a:t>$46,800</a:t>
+                        <a:t>$68,218</a:t>
                       </a:r>
                     </a:p>
                   </a:txBody>
@@ -6023,7 +6023,7 @@
                           </a:solidFill>
                           <a:latin typeface="Roboto"/>
                         </a:rPr>
-                        <a:t>$9,638</a:t>
+                        <a:t>$31,056</a:t>
                       </a:r>
                     </a:p>
                   </a:txBody>
@@ -6079,7 +6079,7 @@
                           </a:solidFill>
                           <a:latin typeface="Roboto"/>
                         </a:rPr>
-                        <a:t>$39,808</a:t>
+                        <a:t>$33,058</a:t>
                       </a:r>
                     </a:p>
                   </a:txBody>
@@ -6191,7 +6191,7 @@
                           </a:solidFill>
                           <a:latin typeface="Roboto"/>
                         </a:rPr>
-                        <a:t>($18,172)</a:t>
+                        <a:t>($24,922)</a:t>
                       </a:r>
                     </a:p>
                   </a:txBody>
@@ -6247,7 +6247,7 @@
                           </a:solidFill>
                           <a:latin typeface="Roboto"/>
                         </a:rPr>
-                        <a:t>$128,898</a:t>
+                        <a:t>$143,566</a:t>
                       </a:r>
                     </a:p>
                   </a:txBody>
@@ -6303,7 +6303,7 @@
                           </a:solidFill>
                           <a:latin typeface="Roboto"/>
                         </a:rPr>
-                        <a:t>38.4%</a:t>
+                        <a:t>44.7%</a:t>
                       </a:r>
                     </a:p>
                   </a:txBody>
@@ -6359,7 +6359,7 @@
                           </a:solidFill>
                           <a:latin typeface="Roboto"/>
                         </a:rPr>
-                        <a:t>(14.1%)</a:t>
+                        <a:t>(17.4%)</a:t>
                       </a:r>
                     </a:p>
                   </a:txBody>
@@ -6415,7 +6415,7 @@
                           </a:solidFill>
                           <a:latin typeface="Roboto"/>
                         </a:rPr>
-                        <a:t>52.5%</a:t>
+                        <a:t>62.0%</a:t>
                       </a:r>
                     </a:p>
                   </a:txBody>
@@ -6503,7 +6503,7 @@
                 </a:solidFill>
                 <a:latin typeface="Roboto"/>
               </a:rPr>
-              <a:t>Data retrieved 2pm, Tue 6 Oct 2026 · Generated 8 Oct 2026, 9:35am · Sample data · Made with Python (python-pptx)</a:t>
+              <a:t>Data retrieved 2pm, Tue 6 Oct 2026 · Generated 9 Oct 2026, 8:41am · Sample data · Made with Python (python-pptx)</a:t>
             </a:r>
           </a:p>
         </p:txBody>
@@ -6849,7 +6849,7 @@
                 </a:solidFill>
                 <a:latin typeface="Roboto"/>
               </a:rPr>
-              <a:t>38.4%</a:t>
+              <a:t>44.7%</a:t>
             </a:r>
           </a:p>
         </p:txBody>
@@ -7015,7 +7015,7 @@
                 </a:solidFill>
                 <a:latin typeface="Roboto"/>
               </a:rPr>
-              <a:t>37.6%</a:t>
+              <a:t>44.0%</a:t>
             </a:r>
           </a:p>
         </p:txBody>
@@ -7181,7 +7181,7 @@
                 </a:solidFill>
                 <a:latin typeface="Roboto"/>
               </a:rPr>
-              <a:t>52.5%</a:t>
+              <a:t>62.0%</a:t>
             </a:r>
           </a:p>
         </p:txBody>
@@ -7251,7 +7251,7 @@
         </p:nvCxnSpPr>
         <p:spPr>
           <a:xfrm>
-            <a:off x="7186082" y="2661025"/>
+            <a:off x="6960588" y="2661025"/>
             <a:ext cx="0" cy="1657625"/>
           </a:xfrm>
           <a:prstGeom prst="line">
@@ -7287,7 +7287,7 @@
         </p:nvSpPr>
         <p:spPr>
           <a:xfrm>
-            <a:off x="6088802" y="4318650"/>
+            <a:off x="5863308" y="4318650"/>
             <a:ext cx="2194560" cy="237744"/>
           </a:xfrm>
           <a:prstGeom prst="rect">
@@ -7326,7 +7326,7 @@
         </p:nvCxnSpPr>
         <p:spPr>
           <a:xfrm>
-            <a:off x="8858928" y="2661025"/>
+            <a:off x="9367600" y="2661025"/>
             <a:ext cx="0" cy="1657625"/>
           </a:xfrm>
           <a:prstGeom prst="line">
@@ -7362,7 +7362,7 @@
         </p:nvSpPr>
         <p:spPr>
           <a:xfrm>
-            <a:off x="7761648" y="4556394"/>
+            <a:off x="8270320" y="4556394"/>
             <a:ext cx="2194560" cy="237744"/>
           </a:xfrm>
           <a:prstGeom prst="rect">
@@ -7388,7 +7388,7 @@
                 </a:solidFill>
                 <a:latin typeface="Roboto"/>
               </a:rPr>
-              <a:t>Break-even 52.5%</a:t>
+              <a:t>Break-even 62.0%</a:t>
             </a:r>
           </a:p>
         </p:txBody>
@@ -7515,7 +7515,7 @@
                 </a:solidFill>
                 <a:latin typeface="Roboto"/>
               </a:rPr>
-              <a:t>In October maintenance contracts made a 59.5% job gross margin, installations made a 26.1% job gross margin, call-outs and repairs made a 43.3% job gross margin (technician time at $68 an hour, wages and all on-costs). Jobs need 52.5% just to cover overheads.</a:t>
+              <a:t>In October maintenance contracts made a 63.8% job gross margin, installations made a 34.1% job gross margin, call-outs and repairs made a 47.7% job gross margin (technician time at $68 an hour, wages and all on-costs). Jobs need 62.0% just to cover overheads.</a:t>
             </a:r>
           </a:p>
         </p:txBody>
@@ -7642,7 +7642,7 @@
                 </a:solidFill>
                 <a:latin typeface="Roboto"/>
               </a:rPr>
-              <a:t>Installations: 26.1% gross margin, 8.9 points under the 35.0% target: about $6,268 on $70,800 of revenue in October. It's below the 52.5% needed to cover overheads, too. Maintenance contracts: 59.5% gross margin, 24.5 points over the 35.0% target ($8,754 ahead on $35,800 in October).</a:t>
+              <a:t>Installations: 34.1% gross margin, 0.9 points under the 35.0% target: about $743 on $79,300 of revenue in October. It's below the 62.0% needed to cover overheads, too. Maintenance contracts: 63.8% gross margin, 28.8 points over the 35.0% target ($11,549 ahead on $40,100 in October).</a:t>
             </a:r>
           </a:p>
         </p:txBody>
@@ -7720,7 +7720,7 @@
                 </a:solidFill>
                 <a:latin typeface="Roboto"/>
               </a:rPr>
-              <a:t>Data retrieved 2pm, Tue 6 Oct 2026 · Generated 8 Oct 2026, 9:35am · Sample data · Made with Python (python-pptx)</a:t>
+              <a:t>Data retrieved 2pm, Tue 6 Oct 2026 · Generated 9 Oct 2026, 8:41am · Sample data · Made with Python (python-pptx)</a:t>
             </a:r>
           </a:p>
         </p:txBody>
@@ -8027,7 +8027,7 @@
                 </a:solidFill>
                 <a:latin typeface="Roboto"/>
               </a:rPr>
-              <a:t>59.5%</a:t>
+              <a:t>63.8%</a:t>
             </a:r>
           </a:p>
         </p:txBody>
@@ -8193,7 +8193,7 @@
                 </a:solidFill>
                 <a:latin typeface="Roboto"/>
               </a:rPr>
-              <a:t>59.5%</a:t>
+              <a:t>63.9%</a:t>
             </a:r>
           </a:p>
         </p:txBody>
@@ -8359,7 +8359,7 @@
                 </a:solidFill>
                 <a:latin typeface="Roboto"/>
               </a:rPr>
-              <a:t>52.5%</a:t>
+              <a:t>62.0%</a:t>
             </a:r>
           </a:p>
         </p:txBody>
@@ -8525,7 +8525,7 @@
                 </a:solidFill>
                 <a:latin typeface="Roboto"/>
               </a:rPr>
-              <a:t>All 12 contracts made more than the 35.0% job gross margin target. The thinnest was Kangaroo Point townhouses at 58.2% job gross margin: 14.0 h of technician time on a $2,400 monthly fee.</a:t>
+              <a:t>All 12 contracts made more than the 35.0% job gross margin target. The thinnest was Kangaroo Point townhouses at 62.9% job gross margin: 14.0 h of technician time on a $2,700 monthly fee.</a:t>
             </a:r>
           </a:p>
         </p:txBody>
@@ -8652,7 +8652,7 @@
                 </a:solidFill>
                 <a:latin typeface="Roboto"/>
               </a:rPr>
-              <a:t>The thinnest, Kangaroo Point townhouses: 58.2% gross margin, 23.3 points over the 35.0% target ($558 ahead on $2,400 in October). All maintenance contracts: 59.5% gross margin, 24.5 points over the 35.0% target ($8,754 ahead on $35,800 in October).</a:t>
+              <a:t>The thinnest, Kangaroo Point townhouses: 62.9% gross margin, 27.9 points over the 35.0% target ($753 ahead on $2,700 in October). All maintenance contracts: 63.8% gross margin, 28.8 points over the 35.0% target ($11,549 ahead on $40,100 in October).</a:t>
             </a:r>
           </a:p>
         </p:txBody>
@@ -8730,7 +8730,7 @@
                 </a:solidFill>
                 <a:latin typeface="Roboto"/>
               </a:rPr>
-              <a:t>Data retrieved 2pm, Tue 6 Oct 2026 · Generated 8 Oct 2026, 9:35am · Sample data · Made with Python (python-pptx)</a:t>
+              <a:t>Data retrieved 2pm, Tue 6 Oct 2026 · Generated 9 Oct 2026, 8:41am · Sample data · Made with Python (python-pptx)</a:t>
             </a:r>
           </a:p>
         </p:txBody>
@@ -8949,7 +8949,7 @@
                 </a:solidFill>
                 <a:latin typeface="Roboto"/>
               </a:rPr>
-              <a:t>The month's fee less materials and technician time at $68/hour. Target 35.0% is what to price for; break-even 52.5% only covers overheads and time not charged.</a:t>
+              <a:t>The month's fee less materials and technician time at $68/hour. Target 35.0% is what to price for; break-even 62.0% only covers overheads and time not charged.</a:t>
             </a:r>
           </a:p>
         </p:txBody>
@@ -8980,7 +8980,7 @@
         </p:nvCxnSpPr>
         <p:spPr>
           <a:xfrm>
-            <a:off x="7098469" y="1599255"/>
+            <a:off x="6898280" y="1599255"/>
             <a:ext cx="0" cy="3816827"/>
           </a:xfrm>
           <a:prstGeom prst="line">
@@ -9016,7 +9016,7 @@
         </p:nvSpPr>
         <p:spPr>
           <a:xfrm>
-            <a:off x="6001189" y="5416082"/>
+            <a:off x="5801000" y="5416082"/>
             <a:ext cx="2194560" cy="237744"/>
           </a:xfrm>
           <a:prstGeom prst="rect">
@@ -9055,7 +9055,7 @@
         </p:nvCxnSpPr>
         <p:spPr>
           <a:xfrm>
-            <a:off x="8727510" y="1599255"/>
+            <a:off x="9257225" y="1599255"/>
             <a:ext cx="0" cy="3816827"/>
           </a:xfrm>
           <a:prstGeom prst="line">
@@ -9091,7 +9091,7 @@
         </p:nvSpPr>
         <p:spPr>
           <a:xfrm>
-            <a:off x="7630230" y="5653826"/>
+            <a:off x="8159945" y="5653826"/>
             <a:ext cx="2194560" cy="237744"/>
           </a:xfrm>
           <a:prstGeom prst="rect">
@@ -9117,7 +9117,7 @@
                 </a:solidFill>
                 <a:latin typeface="Roboto"/>
               </a:rPr>
-              <a:t>Break-even 52.5%</a:t>
+              <a:t>Break-even 62.0%</a:t>
             </a:r>
           </a:p>
         </p:txBody>
@@ -9195,7 +9195,7 @@
                 </a:solidFill>
                 <a:latin typeface="Roboto"/>
               </a:rPr>
-              <a:t>Data retrieved 2pm, Tue 6 Oct 2026 · Generated 8 Oct 2026, 9:35am · Sample data · Made with Python (python-pptx)</a:t>
+              <a:t>Data retrieved 2pm, Tue 6 Oct 2026 · Generated 9 Oct 2026, 8:41am · Sample data · Made with Python (python-pptx)</a:t>
             </a:r>
           </a:p>
         </p:txBody>
@@ -9541,7 +9541,7 @@
                 </a:solidFill>
                 <a:latin typeface="Roboto"/>
               </a:rPr>
-              <a:t>26.1%</a:t>
+              <a:t>34.1%</a:t>
             </a:r>
           </a:p>
         </p:txBody>
@@ -9707,7 +9707,7 @@
                 </a:solidFill>
                 <a:latin typeface="Roboto"/>
               </a:rPr>
-              <a:t>26.2%</a:t>
+              <a:t>34.2%</a:t>
             </a:r>
           </a:p>
         </p:txBody>
@@ -9873,7 +9873,7 @@
                 </a:solidFill>
                 <a:latin typeface="Roboto"/>
               </a:rPr>
-              <a:t>52.5%</a:t>
+              <a:t>62.0%</a:t>
             </a:r>
           </a:p>
         </p:txBody>
@@ -9943,7 +9943,7 @@
         </p:nvCxnSpPr>
         <p:spPr>
           <a:xfrm>
-            <a:off x="7632174" y="2661025"/>
+            <a:off x="7051175" y="2661025"/>
             <a:ext cx="0" cy="1657625"/>
           </a:xfrm>
           <a:prstGeom prst="line">
@@ -9979,7 +9979,7 @@
         </p:nvSpPr>
         <p:spPr>
           <a:xfrm>
-            <a:off x="6534894" y="4318650"/>
+            <a:off x="5953895" y="4318650"/>
             <a:ext cx="2194560" cy="237744"/>
           </a:xfrm>
           <a:prstGeom prst="rect">
@@ -10080,7 +10080,7 @@
                 </a:solidFill>
                 <a:latin typeface="Roboto"/>
               </a:rPr>
-              <a:t>Break-even 52.5%</a:t>
+              <a:t>Break-even 62.0%</a:t>
             </a:r>
           </a:p>
         </p:txBody>
@@ -10207,7 +10207,7 @@
                 </a:solidFill>
                 <a:latin typeface="Roboto"/>
               </a:rPr>
-              <a:t>2 of the 3 installation jobs invoiced in October made less than the 35.0% job gross margin target. The Salisbury shop solar and battery made a 17.3% job gross margin: 120.0 h of technician time ($8,160) and $3,900 of subcontractors on a $35,500 job. Jobs need 52.5% gross margin just to cover overheads.</a:t>
+              <a:t>1 of the 3 installation jobs invoiced in October made less than the 35.0% job gross margin target. The Salisbury shop solar and battery made a 26.2% job gross margin: 120.0 h of technician time ($8,160) and $3,900 of subcontractors on a $39,800 job. Jobs need 62.0% gross margin just to cover overheads.</a:t>
             </a:r>
           </a:p>
         </p:txBody>
@@ -10334,7 +10334,7 @@
                 </a:solidFill>
                 <a:latin typeface="Roboto"/>
               </a:rPr>
-              <a:t>2 installations under the 35.0% target, worth about $6,744 between them on $54,000 of revenue. The biggest gap, Salisbury shop solar and battery: 17.3% gross margin, 17.7 points under the 35.0% target: about $6,285 on $35,500 of revenue in October. It's below the 52.5% needed to cover overheads, too.</a:t>
+              <a:t>1 installation under the 35.0% target, worth about $3,490 between them on $39,800 of revenue. The biggest gap, Salisbury shop solar and battery: 26.2% gross margin, 8.8 points under the 35.0% target: about $3,490 on $39,800 of revenue in October. It's below the 62.0% needed to cover overheads, too.</a:t>
             </a:r>
           </a:p>
         </p:txBody>
@@ -10412,7 +10412,7 @@
                 </a:solidFill>
                 <a:latin typeface="Roboto"/>
               </a:rPr>
-              <a:t>Data retrieved 2pm, Tue 6 Oct 2026 · Generated 8 Oct 2026, 9:35am · Sample data · Made with Python (python-pptx)</a:t>
+              <a:t>Data retrieved 2pm, Tue 6 Oct 2026 · Generated 9 Oct 2026, 8:41am · Sample data · Made with Python (python-pptx)</a:t>
             </a:r>
           </a:p>
         </p:txBody>
@@ -10758,7 +10758,7 @@
                 </a:solidFill>
                 <a:latin typeface="Roboto"/>
               </a:rPr>
-              <a:t>43.3%</a:t>
+              <a:t>47.7%</a:t>
             </a:r>
           </a:p>
         </p:txBody>
@@ -10924,7 +10924,7 @@
                 </a:solidFill>
                 <a:latin typeface="Roboto"/>
               </a:rPr>
-              <a:t>44.0%</a:t>
+              <a:t>48.5%</a:t>
             </a:r>
           </a:p>
         </p:txBody>
@@ -11090,7 +11090,7 @@
                 </a:solidFill>
                 <a:latin typeface="Roboto"/>
               </a:rPr>
-              <a:t>52.5%</a:t>
+              <a:t>62.0%</a:t>
             </a:r>
           </a:p>
         </p:txBody>
@@ -11256,7 +11256,7 @@
                 </a:solidFill>
                 <a:latin typeface="Roboto"/>
               </a:rPr>
-              <a:t>$15,005</a:t>
+              <a:t>$16,873</a:t>
             </a:r>
           </a:p>
         </p:txBody>
@@ -11295,7 +11295,7 @@
                 </a:solidFill>
                 <a:latin typeface="Roboto"/>
               </a:rPr>
-              <a:t>67.3% of call-out revenue</a:t>
+              <a:t>69.8% of call-out revenue</a:t>
             </a:r>
           </a:p>
         </p:txBody>
@@ -11492,7 +11492,7 @@
         </p:nvCxnSpPr>
         <p:spPr>
           <a:xfrm>
-            <a:off x="7632174" y="2668112"/>
+            <a:off x="7051175" y="2668112"/>
             <a:ext cx="0" cy="1865498"/>
           </a:xfrm>
           <a:prstGeom prst="line">
@@ -11528,7 +11528,7 @@
         </p:nvSpPr>
         <p:spPr>
           <a:xfrm>
-            <a:off x="6534894" y="4533610"/>
+            <a:off x="5953895" y="4533610"/>
             <a:ext cx="2194560" cy="237744"/>
           </a:xfrm>
           <a:prstGeom prst="rect">
@@ -11629,7 +11629,7 @@
                 </a:solidFill>
                 <a:latin typeface="Roboto"/>
               </a:rPr>
-              <a:t>Break-even 52.5%</a:t>
+              <a:t>Break-even 62.0%</a:t>
             </a:r>
           </a:p>
         </p:txBody>
@@ -11756,7 +11756,7 @@
                 </a:solidFill>
                 <a:latin typeface="Roboto"/>
               </a:rPr>
-              <a:t>43 call-outs in October billed $15,005 of technician time and $7,293 of materials ($5,610 at cost plus 30%), and made a 43.3% job gross margin between them. Gross margins run from 37.8% to 45.9% by length: the hourly rate covers technician time comfortably, so the gross margin mostly moves with how much material goes on the van.</a:t>
+              <a:t>43 call-outs in October billed $16,873 of technician time and $7,293 of materials ($5,610 at cost plus 30%), and made a 47.7% job gross margin between them. Gross margins run from 41.4% to 50.5% by length: the hourly rate covers technician time comfortably, so the gross margin mostly moves with how much material goes on the van.</a:t>
             </a:r>
           </a:p>
         </p:txBody>
@@ -11883,7 +11883,7 @@
                 </a:solidFill>
                 <a:latin typeface="Roboto"/>
               </a:rPr>
-              <a:t>All call-outs: 43.3% gross margin, 8.3 points over the 35.0% target ($1,846 ahead on $22,298 in October).</a:t>
+              <a:t>All call-outs: 47.7% gross margin, 12.7 points over the 35.0% target ($3,060 ahead on $24,166 in October).</a:t>
             </a:r>
           </a:p>
         </p:txBody>
@@ -11961,7 +11961,7 @@
                 </a:solidFill>
                 <a:latin typeface="Roboto"/>
               </a:rPr>
-              <a:t>Data retrieved 2pm, Tue 6 Oct 2026 · Generated 8 Oct 2026, 9:35am · Sample data · Made with Python (python-pptx)</a:t>
+              <a:t>Data retrieved 2pm, Tue 6 Oct 2026 · Generated 9 Oct 2026, 8:41am · Sample data · Made with Python (python-pptx)</a:t>
             </a:r>
           </a:p>
         </p:txBody>
@@ -12276,7 +12276,7 @@
                 </a:solidFill>
                 <a:latin typeface="Roboto"/>
               </a:rPr>
-              <a:t>Data retrieved 2pm, Tue 6 Oct 2026 · Generated 8 Oct 2026, 9:35am · Sample data · Made with Python (python-pptx)</a:t>
+              <a:t>Data retrieved 2pm, Tue 6 Oct 2026 · Generated 9 Oct 2026, 8:41am · Sample data · Made with Python (python-pptx)</a:t>
             </a:r>
           </a:p>
         </p:txBody>

--- a/media/exports/reports/2025-10/job-margins.pptx
+++ b/media/exports/reports/2025-10/job-margins.pptx
@@ -1659,7 +1659,7 @@
           <a:lstStyle/>
           <a:p>
             <a:r>
-              <a:t>Which jobs actually make money?. Sample Electrical &amp; Air Pty Ltd. Period: October 2025. Every job's gross margin: revenue less materials, subcontractors and technician time at $68 an hour (fully loaded: wages and all on-costs). Pick a type of job and every number, chart and note on the page follows it.</a:t>
+              <a:t>Which jobs actually make money?. Sample Electrical &amp; Air Pty Ltd. Period: October 2025. In short: Jobs made a 44.7% gross margin in October: maintenance contracts the most (63.8%), installations the least (34.1%). Every job's gross margin: revenue less materials, subcontractors and technician time at $68 an hour (fully loaded: wages and all on-costs). Pick a type of job and every number, chart and note on the page follows it.</a:t>
             </a:r>
           </a:p>
         </p:txBody>
@@ -5374,7 +5374,7 @@
         <p:spPr>
           <a:xfrm>
             <a:off x="457200" y="3703320"/>
-            <a:ext cx="11277295" cy="535940"/>
+            <a:ext cx="11277295" cy="758190"/>
           </a:xfrm>
           <a:prstGeom prst="rect">
             <a:avLst/>
@@ -5399,7 +5399,7 @@
                 </a:solidFill>
                 <a:latin typeface="Roboto"/>
               </a:rPr>
-              <a:t>Period: October 2025. Every job's gross margin: revenue less materials, subcontractors and technician time at $68 an hour (fully loaded: wages and all on-costs). Pick a type of job and every number, chart and note on the page follows it.</a:t>
+              <a:t>Period: October 2025. In short: Jobs made a 44.7% gross margin in October: maintenance contracts the most (63.8%), installations the least (34.1%). Every job's gross margin: revenue less materials, subcontractors and technician time at $68 an hour (fully loaded: wages and all on-costs). Pick a type of job and every number, chart and note on the page follows it.</a:t>
             </a:r>
           </a:p>
         </p:txBody>
@@ -5412,7 +5412,7 @@
         </p:nvSpPr>
         <p:spPr>
           <a:xfrm>
-            <a:off x="457200" y="4330700"/>
+            <a:off x="457200" y="4552950"/>
             <a:ext cx="11277295" cy="1097280"/>
           </a:xfrm>
           <a:prstGeom prst="rect">
@@ -5564,7 +5564,7 @@
                 </a:solidFill>
                 <a:latin typeface="Roboto"/>
               </a:rPr>
-              <a:t>Data retrieved 2pm, Tue 6 Oct 2026 · Generated 9 Oct 2026, 8:41am · Sample data · Made with Python (python-pptx)</a:t>
+              <a:t>Data retrieved 2pm, Tue 6 Oct 2026 · Generated 10 Oct 2026, 9:55pm · Sample data · Made with Python (python-pptx)</a:t>
             </a:r>
           </a:p>
         </p:txBody>
@@ -6503,7 +6503,7 @@
                 </a:solidFill>
                 <a:latin typeface="Roboto"/>
               </a:rPr>
-              <a:t>Data retrieved 2pm, Tue 6 Oct 2026 · Generated 9 Oct 2026, 8:41am · Sample data · Made with Python (python-pptx)</a:t>
+              <a:t>Data retrieved 2pm, Tue 6 Oct 2026 · Generated 10 Oct 2026, 9:55pm · Sample data · Made with Python (python-pptx)</a:t>
             </a:r>
           </a:p>
         </p:txBody>
@@ -7720,7 +7720,7 @@
                 </a:solidFill>
                 <a:latin typeface="Roboto"/>
               </a:rPr>
-              <a:t>Data retrieved 2pm, Tue 6 Oct 2026 · Generated 9 Oct 2026, 8:41am · Sample data · Made with Python (python-pptx)</a:t>
+              <a:t>Data retrieved 2pm, Tue 6 Oct 2026 · Generated 10 Oct 2026, 9:55pm · Sample data · Made with Python (python-pptx)</a:t>
             </a:r>
           </a:p>
         </p:txBody>
@@ -8730,7 +8730,7 @@
                 </a:solidFill>
                 <a:latin typeface="Roboto"/>
               </a:rPr>
-              <a:t>Data retrieved 2pm, Tue 6 Oct 2026 · Generated 9 Oct 2026, 8:41am · Sample data · Made with Python (python-pptx)</a:t>
+              <a:t>Data retrieved 2pm, Tue 6 Oct 2026 · Generated 10 Oct 2026, 9:55pm · Sample data · Made with Python (python-pptx)</a:t>
             </a:r>
           </a:p>
         </p:txBody>
@@ -9195,7 +9195,7 @@
                 </a:solidFill>
                 <a:latin typeface="Roboto"/>
               </a:rPr>
-              <a:t>Data retrieved 2pm, Tue 6 Oct 2026 · Generated 9 Oct 2026, 8:41am · Sample data · Made with Python (python-pptx)</a:t>
+              <a:t>Data retrieved 2pm, Tue 6 Oct 2026 · Generated 10 Oct 2026, 9:55pm · Sample data · Made with Python (python-pptx)</a:t>
             </a:r>
           </a:p>
         </p:txBody>
@@ -10412,7 +10412,7 @@
                 </a:solidFill>
                 <a:latin typeface="Roboto"/>
               </a:rPr>
-              <a:t>Data retrieved 2pm, Tue 6 Oct 2026 · Generated 9 Oct 2026, 8:41am · Sample data · Made with Python (python-pptx)</a:t>
+              <a:t>Data retrieved 2pm, Tue 6 Oct 2026 · Generated 10 Oct 2026, 9:55pm · Sample data · Made with Python (python-pptx)</a:t>
             </a:r>
           </a:p>
         </p:txBody>
@@ -11961,7 +11961,7 @@
                 </a:solidFill>
                 <a:latin typeface="Roboto"/>
               </a:rPr>
-              <a:t>Data retrieved 2pm, Tue 6 Oct 2026 · Generated 9 Oct 2026, 8:41am · Sample data · Made with Python (python-pptx)</a:t>
+              <a:t>Data retrieved 2pm, Tue 6 Oct 2026 · Generated 10 Oct 2026, 9:55pm · Sample data · Made with Python (python-pptx)</a:t>
             </a:r>
           </a:p>
         </p:txBody>
@@ -12276,7 +12276,7 @@
                 </a:solidFill>
                 <a:latin typeface="Roboto"/>
               </a:rPr>
-              <a:t>Data retrieved 2pm, Tue 6 Oct 2026 · Generated 9 Oct 2026, 8:41am · Sample data · Made with Python (python-pptx)</a:t>
+              <a:t>Data retrieved 2pm, Tue 6 Oct 2026 · Generated 10 Oct 2026, 9:55pm · Sample data · Made with Python (python-pptx)</a:t>
             </a:r>
           </a:p>
         </p:txBody>
